--- a/FinalProjectPoster_Kang_Ashley.pptx
+++ b/FinalProjectPoster_Kang_Ashley.pptx
@@ -5519,8 +5519,8 @@
         </p:nvSpPr>
         <p:spPr>
           <a:xfrm>
-            <a:off x="220950" y="129875"/>
-            <a:ext cx="26990100" cy="3009900"/>
+            <a:off x="120950" y="129875"/>
+            <a:ext cx="27197100" cy="3009900"/>
           </a:xfrm>
           <a:prstGeom prst="roundRect">
             <a:avLst>
@@ -5692,8 +5692,8 @@
         </p:nvSpPr>
         <p:spPr>
           <a:xfrm>
-            <a:off x="220950" y="3231875"/>
-            <a:ext cx="11821500" cy="3191100"/>
+            <a:off x="120950" y="3231875"/>
+            <a:ext cx="11378100" cy="3191100"/>
           </a:xfrm>
           <a:prstGeom prst="roundRect">
             <a:avLst>
@@ -5743,8 +5743,8 @@
         </p:nvSpPr>
         <p:spPr>
           <a:xfrm>
-            <a:off x="342350" y="3767925"/>
-            <a:ext cx="11655000" cy="2655000"/>
+            <a:off x="115500" y="3698975"/>
+            <a:ext cx="11505000" cy="2724000"/>
           </a:xfrm>
           <a:prstGeom prst="rect">
             <a:avLst/>
@@ -5933,8 +5933,8 @@
         </p:nvSpPr>
         <p:spPr>
           <a:xfrm>
-            <a:off x="338598" y="3300825"/>
-            <a:ext cx="11583600" cy="467100"/>
+            <a:off x="338600" y="3300825"/>
+            <a:ext cx="11022000" cy="467100"/>
           </a:xfrm>
           <a:prstGeom prst="rect">
             <a:avLst/>
@@ -5991,8 +5991,8 @@
         </p:nvSpPr>
         <p:spPr>
           <a:xfrm>
-            <a:off x="3142750" y="2296935"/>
-            <a:ext cx="24068400" cy="794100"/>
+            <a:off x="3142750" y="2296925"/>
+            <a:ext cx="24175500" cy="794100"/>
           </a:xfrm>
           <a:prstGeom prst="rect">
             <a:avLst/>
@@ -6049,12 +6049,12 @@
         </p:nvSpPr>
         <p:spPr>
           <a:xfrm>
-            <a:off x="12130475" y="3231875"/>
-            <a:ext cx="15078300" cy="8015100"/>
+            <a:off x="11680050" y="3231875"/>
+            <a:ext cx="15638100" cy="11568000"/>
           </a:xfrm>
           <a:prstGeom prst="roundRect">
             <a:avLst>
-              <a:gd fmla="val 1731" name="adj"/>
+              <a:gd fmla="val 1148" name="adj"/>
             </a:avLst>
           </a:prstGeom>
           <a:solidFill>
@@ -6100,12 +6100,12 @@
         </p:nvSpPr>
         <p:spPr>
           <a:xfrm>
-            <a:off x="12096525" y="19007675"/>
-            <a:ext cx="15117300" cy="2818200"/>
+            <a:off x="11645075" y="19241250"/>
+            <a:ext cx="15673200" cy="2584500"/>
           </a:xfrm>
           <a:prstGeom prst="roundRect">
             <a:avLst>
-              <a:gd fmla="val 6971" name="adj"/>
+              <a:gd fmla="val 3389" name="adj"/>
             </a:avLst>
           </a:prstGeom>
           <a:solidFill>
@@ -6151,8 +6151,8 @@
         </p:nvSpPr>
         <p:spPr>
           <a:xfrm>
-            <a:off x="12098475" y="19482250"/>
-            <a:ext cx="15117300" cy="2343600"/>
+            <a:off x="11647100" y="19567675"/>
+            <a:ext cx="15638100" cy="2258400"/>
           </a:xfrm>
           <a:prstGeom prst="rect">
             <a:avLst/>
@@ -6277,7 +6277,7 @@
                 <a:cs typeface="Times New Roman"/>
                 <a:sym typeface="Times New Roman"/>
               </a:rPr>
-              <a:t>The relationship between the predictors and the outcome may be non-linear, which standard linear models may not fully capture. I will propose the Random Forests method to better capture complex, non-linear patterns in my predictors. Also for a better prediction, I can add tourist attractions as a factor since people tend to visit Boston to tour the area.</a:t>
+              <a:t>I was able to find out that the relationship between the predictors and the outcome are non-linear, but there might be other methods I could try to better capture complex, non-linear patterns in my predictors. Also for a better prediction, I can add tourist attractions as a factor since people tend to visit Boston to tour the area.</a:t>
             </a:r>
             <a:endParaRPr b="1" sz="2400">
               <a:solidFill>
@@ -6299,8 +6299,8 @@
         </p:nvSpPr>
         <p:spPr>
           <a:xfrm>
-            <a:off x="12137675" y="19020338"/>
-            <a:ext cx="15063900" cy="562500"/>
+            <a:off x="11633946" y="19241250"/>
+            <a:ext cx="15638100" cy="562500"/>
           </a:xfrm>
           <a:prstGeom prst="rect">
             <a:avLst/>
@@ -6357,8 +6357,8 @@
         </p:nvSpPr>
         <p:spPr>
           <a:xfrm>
-            <a:off x="220950" y="6514275"/>
-            <a:ext cx="11821500" cy="15311700"/>
+            <a:off x="121050" y="6514275"/>
+            <a:ext cx="11378100" cy="15311700"/>
           </a:xfrm>
           <a:prstGeom prst="roundRect">
             <a:avLst>
@@ -6408,8 +6408,8 @@
         </p:nvSpPr>
         <p:spPr>
           <a:xfrm>
-            <a:off x="375412" y="6584642"/>
-            <a:ext cx="11562600" cy="621000"/>
+            <a:off x="141700" y="6584650"/>
+            <a:ext cx="11378100" cy="621000"/>
           </a:xfrm>
           <a:prstGeom prst="rect">
             <a:avLst/>
@@ -6466,8 +6466,8 @@
         </p:nvSpPr>
         <p:spPr>
           <a:xfrm>
-            <a:off x="380325" y="6917700"/>
-            <a:ext cx="11616900" cy="9158400"/>
+            <a:off x="115500" y="7032725"/>
+            <a:ext cx="11378100" cy="9322500"/>
           </a:xfrm>
           <a:prstGeom prst="rect">
             <a:avLst/>
@@ -7452,7 +7452,7 @@
                 <a:cs typeface="Times New Roman"/>
                 <a:sym typeface="Times New Roman"/>
               </a:rPr>
-              <a:t>Tested Full, AIC, and BIC first-order models for model selection</a:t>
+              <a:t>Tested Full, AIC, and BIC first-order models and interaction models for model selection</a:t>
             </a:r>
             <a:endParaRPr sz="2400">
               <a:solidFill>
@@ -7474,8 +7474,8 @@
         </p:nvSpPr>
         <p:spPr>
           <a:xfrm>
-            <a:off x="12302925" y="7001250"/>
-            <a:ext cx="14771700" cy="621000"/>
+            <a:off x="11857850" y="7032726"/>
+            <a:ext cx="15358800" cy="987300"/>
           </a:xfrm>
           <a:prstGeom prst="rect">
             <a:avLst/>
@@ -7522,7 +7522,7 @@
                 <a:cs typeface="Times New Roman"/>
                 <a:sym typeface="Times New Roman"/>
               </a:rPr>
-              <a:t> Table for comparing the four models. We can see that the all three metrics don’t vary much by model, but the BIC model with the significant outliers removed tends to be slightly better. </a:t>
+              <a:t> Table for comparing the six models. We can see that the all three metrics don’t vary much by the non-interactive model, but the AIC model with interaction tends to be slightly better with the lowest RMSE, highest R squared, and lowest MAE. The threshold for determining the outliers is 4/n.</a:t>
             </a:r>
             <a:endParaRPr i="1" sz="2200">
               <a:solidFill>
@@ -7544,66 +7544,8 @@
         </p:nvSpPr>
         <p:spPr>
           <a:xfrm>
-            <a:off x="12200962" y="17453575"/>
-            <a:ext cx="14215500" cy="467100"/>
-          </a:xfrm>
-          <a:prstGeom prst="rect">
-            <a:avLst/>
-          </a:prstGeom>
-          <a:noFill/>
-          <a:ln>
-            <a:noFill/>
-          </a:ln>
-        </p:spPr>
-        <p:txBody>
-          <a:bodyPr anchorCtr="0" anchor="ctr" bIns="91425" lIns="91425" spcFirstLastPara="1" rIns="91425" wrap="square" tIns="91425">
-            <a:noAutofit/>
-          </a:bodyPr>
-          <a:lstStyle/>
-          <a:p>
-            <a:pPr indent="0" lvl="0" marL="0" rtl="0" algn="ctr">
-              <a:spcBef>
-                <a:spcPts val="0"/>
-              </a:spcBef>
-              <a:spcAft>
-                <a:spcPts val="0"/>
-              </a:spcAft>
-              <a:buNone/>
-            </a:pPr>
-            <a:r>
-              <a:rPr lang="en" sz="2400">
-                <a:solidFill>
-                  <a:schemeClr val="dk1"/>
-                </a:solidFill>
-                <a:latin typeface="Times New Roman"/>
-                <a:ea typeface="Times New Roman"/>
-                <a:cs typeface="Times New Roman"/>
-                <a:sym typeface="Times New Roman"/>
-              </a:rPr>
-              <a:t>Figure 3: the The linearity and equal variance assumptions are broadly met.</a:t>
-            </a:r>
-            <a:endParaRPr sz="2400">
-              <a:solidFill>
-                <a:schemeClr val="dk1"/>
-              </a:solidFill>
-              <a:latin typeface="Times New Roman"/>
-              <a:ea typeface="Times New Roman"/>
-              <a:cs typeface="Times New Roman"/>
-              <a:sym typeface="Times New Roman"/>
-            </a:endParaRPr>
-          </a:p>
-        </p:txBody>
-      </p:sp>
-      <p:sp>
-        <p:nvSpPr>
-          <p:cNvPr id="70" name="Google Shape;70;p13"/>
-          <p:cNvSpPr txBox="1"/>
-          <p:nvPr/>
-        </p:nvSpPr>
-        <p:spPr>
-          <a:xfrm>
-            <a:off x="403950" y="20555225"/>
-            <a:ext cx="11505600" cy="1119600"/>
+            <a:off x="280200" y="20687525"/>
+            <a:ext cx="11145600" cy="1138500"/>
           </a:xfrm>
           <a:prstGeom prst="rect">
             <a:avLst/>
@@ -7666,12 +7608,12 @@
       </p:sp>
       <p:graphicFrame>
         <p:nvGraphicFramePr>
-          <p:cNvPr id="71" name="Google Shape;71;p13"/>
+          <p:cNvPr id="70" name="Google Shape;70;p13"/>
           <p:cNvGraphicFramePr/>
           <p:nvPr/>
         </p:nvGraphicFramePr>
         <p:xfrm>
-          <a:off x="12470163" y="4618275"/>
+          <a:off x="11942988" y="4684329"/>
           <a:ext cx="3000000" cy="3000000"/>
         </p:xfrm>
         <a:graphic>
@@ -7679,16 +7621,19 @@
             <a:tbl>
               <a:tblPr>
                 <a:noFill/>
-                <a:tableStyleId>{139D3AC5-8908-4B74-92D6-4A814344356D}</a:tableStyleId>
+                <a:tableStyleId>{2240061D-20DE-4661-B9E2-4C5409DDBD90}</a:tableStyleId>
               </a:tblPr>
               <a:tblGrid>
-                <a:gridCol w="2771950"/>
-                <a:gridCol w="3228400"/>
-                <a:gridCol w="2293450"/>
-                <a:gridCol w="2153950"/>
-                <a:gridCol w="4152075"/>
+                <a:gridCol w="1019725"/>
+                <a:gridCol w="1635400"/>
+                <a:gridCol w="1072950"/>
+                <a:gridCol w="1098175"/>
+                <a:gridCol w="2201200"/>
+                <a:gridCol w="2230200"/>
+                <a:gridCol w="3620250"/>
+                <a:gridCol w="2234650"/>
               </a:tblGrid>
-              <a:tr h="381000">
+              <a:tr h="472150">
                 <a:tc>
                   <a:txBody>
                     <a:bodyPr/>
@@ -7709,7 +7654,7 @@
                       <a:r>
                         <a:t/>
                       </a:r>
-                      <a:endParaRPr sz="2200"/>
+                      <a:endParaRPr sz="2100"/>
                     </a:p>
                   </a:txBody>
                   <a:tcPr marT="91425" marB="91425" marR="91425" marL="91425" anchor="ctr">
@@ -7773,10 +7718,10 @@
                         <a:buNone/>
                       </a:pPr>
                       <a:r>
-                        <a:rPr b="1" lang="en" sz="2200"/>
-                        <a:t>Full Linear Model</a:t>
+                        <a:rPr b="1" lang="en" sz="2100"/>
+                        <a:t>Full Linear</a:t>
                       </a:r>
-                      <a:endParaRPr b="1" sz="2200"/>
+                      <a:endParaRPr b="1" sz="2100"/>
                     </a:p>
                   </a:txBody>
                   <a:tcPr marT="91425" marB="91425" marR="91425" marL="91425" anchor="ctr">
@@ -7839,10 +7784,10 @@
                         <a:buNone/>
                       </a:pPr>
                       <a:r>
-                        <a:rPr b="1" lang="en" sz="2200"/>
+                        <a:rPr b="1" lang="en" sz="2100"/>
                         <a:t>AIC</a:t>
                       </a:r>
-                      <a:endParaRPr b="1" sz="2200"/>
+                      <a:endParaRPr b="1" sz="2100"/>
                     </a:p>
                   </a:txBody>
                   <a:tcPr marT="91425" marB="91425" marR="91425" marL="91425" anchor="ctr">
@@ -7905,10 +7850,10 @@
                         <a:buNone/>
                       </a:pPr>
                       <a:r>
-                        <a:rPr b="1" lang="en" sz="2200"/>
+                        <a:rPr b="1" lang="en" sz="2100"/>
                         <a:t>BIC</a:t>
                       </a:r>
-                      <a:endParaRPr b="1" sz="2200"/>
+                      <a:endParaRPr b="1" sz="2100"/>
                     </a:p>
                   </a:txBody>
                   <a:tcPr marT="91425" marB="91425" marR="91425" marL="91425" anchor="ctr">
@@ -7971,14 +7916,14 @@
                         <a:buNone/>
                       </a:pPr>
                       <a:r>
-                        <a:rPr b="1" lang="en" sz="2200">
+                        <a:rPr b="1" lang="en" sz="2100">
                           <a:solidFill>
                             <a:schemeClr val="dk1"/>
                           </a:solidFill>
                         </a:rPr>
-                        <a:t>BIC outliers Removed</a:t>
+                        <a:t>BIC no outliers</a:t>
                       </a:r>
-                      <a:endParaRPr b="1" sz="2200">
+                      <a:endParaRPr b="1" sz="2100">
                         <a:solidFill>
                           <a:schemeClr val="dk1"/>
                         </a:solidFill>
@@ -7998,6 +7943,228 @@
                     <a:lnR cap="flat" cmpd="sng" w="19050">
                       <a:solidFill>
                         <a:schemeClr val="dk1"/>
+                      </a:solidFill>
+                      <a:prstDash val="solid"/>
+                      <a:round/>
+                      <a:headEnd len="sm" w="sm" type="none"/>
+                      <a:tailEnd len="sm" w="sm" type="none"/>
+                    </a:lnR>
+                    <a:lnT cap="flat" cmpd="sng" w="19050">
+                      <a:solidFill>
+                        <a:schemeClr val="dk1"/>
+                      </a:solidFill>
+                      <a:prstDash val="solid"/>
+                      <a:round/>
+                      <a:headEnd len="sm" w="sm" type="none"/>
+                      <a:tailEnd len="sm" w="sm" type="none"/>
+                    </a:lnT>
+                    <a:lnB cap="flat" cmpd="sng" w="19050">
+                      <a:solidFill>
+                        <a:schemeClr val="dk1"/>
+                      </a:solidFill>
+                      <a:prstDash val="solid"/>
+                      <a:round/>
+                      <a:headEnd len="sm" w="sm" type="none"/>
+                      <a:tailEnd len="sm" w="sm" type="none"/>
+                    </a:lnB>
+                    <a:solidFill>
+                      <a:srgbClr val="4FA8F7"/>
+                    </a:solidFill>
+                  </a:tcPr>
+                </a:tc>
+                <a:tc>
+                  <a:txBody>
+                    <a:bodyPr/>
+                    <a:lstStyle/>
+                    <a:p>
+                      <a:pPr indent="0" lvl="0" marL="0" marR="0" rtl="0" algn="l">
+                        <a:lnSpc>
+                          <a:spcPct val="80000"/>
+                        </a:lnSpc>
+                        <a:spcBef>
+                          <a:spcPts val="0"/>
+                        </a:spcBef>
+                        <a:spcAft>
+                          <a:spcPts val="0"/>
+                        </a:spcAft>
+                        <a:buNone/>
+                      </a:pPr>
+                      <a:r>
+                        <a:rPr b="1" lang="en" sz="2100"/>
+                        <a:t>AIC interaction</a:t>
+                      </a:r>
+                      <a:endParaRPr b="1" sz="2100"/>
+                    </a:p>
+                  </a:txBody>
+                  <a:tcPr marT="91425" marB="91425" marR="91425" marL="91425" anchor="ctr">
+                    <a:lnL cap="flat" cmpd="sng" w="19050">
+                      <a:solidFill>
+                        <a:schemeClr val="dk1"/>
+                      </a:solidFill>
+                      <a:prstDash val="solid"/>
+                      <a:round/>
+                      <a:headEnd len="sm" w="sm" type="none"/>
+                      <a:tailEnd len="sm" w="sm" type="none"/>
+                    </a:lnL>
+                    <a:lnR cap="flat" cmpd="sng" w="19050">
+                      <a:solidFill>
+                        <a:schemeClr val="dk1"/>
+                      </a:solidFill>
+                      <a:prstDash val="solid"/>
+                      <a:round/>
+                      <a:headEnd len="sm" w="sm" type="none"/>
+                      <a:tailEnd len="sm" w="sm" type="none"/>
+                    </a:lnR>
+                    <a:lnT cap="flat" cmpd="sng" w="19050">
+                      <a:solidFill>
+                        <a:schemeClr val="dk1"/>
+                      </a:solidFill>
+                      <a:prstDash val="solid"/>
+                      <a:round/>
+                      <a:headEnd len="sm" w="sm" type="none"/>
+                      <a:tailEnd len="sm" w="sm" type="none"/>
+                    </a:lnT>
+                    <a:lnB cap="flat" cmpd="sng" w="19050">
+                      <a:solidFill>
+                        <a:schemeClr val="dk1"/>
+                      </a:solidFill>
+                      <a:prstDash val="solid"/>
+                      <a:round/>
+                      <a:headEnd len="sm" w="sm" type="none"/>
+                      <a:tailEnd len="sm" w="sm" type="none"/>
+                    </a:lnB>
+                    <a:solidFill>
+                      <a:srgbClr val="4FA8F7"/>
+                    </a:solidFill>
+                  </a:tcPr>
+                </a:tc>
+                <a:tc>
+                  <a:txBody>
+                    <a:bodyPr/>
+                    <a:lstStyle/>
+                    <a:p>
+                      <a:pPr indent="0" lvl="0" marL="0" rtl="0" algn="l">
+                        <a:lnSpc>
+                          <a:spcPct val="80000"/>
+                        </a:lnSpc>
+                        <a:spcBef>
+                          <a:spcPts val="0"/>
+                        </a:spcBef>
+                        <a:spcAft>
+                          <a:spcPts val="0"/>
+                        </a:spcAft>
+                        <a:buClr>
+                          <a:schemeClr val="dk1"/>
+                        </a:buClr>
+                        <a:buSzPts val="1100"/>
+                        <a:buFont typeface="Arial"/>
+                        <a:buNone/>
+                      </a:pPr>
+                      <a:r>
+                        <a:rPr b="1" lang="en" sz="2100">
+                          <a:solidFill>
+                            <a:schemeClr val="dk1"/>
+                          </a:solidFill>
+                        </a:rPr>
+                        <a:t>AIC interaction no outliers</a:t>
+                      </a:r>
+                      <a:endParaRPr b="1" sz="2100">
+                        <a:solidFill>
+                          <a:schemeClr val="dk1"/>
+                        </a:solidFill>
+                      </a:endParaRPr>
+                    </a:p>
+                  </a:txBody>
+                  <a:tcPr marT="91425" marB="91425" marR="91425" marL="91425" anchor="ctr">
+                    <a:lnL cap="flat" cmpd="sng" w="19050">
+                      <a:solidFill>
+                        <a:schemeClr val="dk1"/>
+                      </a:solidFill>
+                      <a:prstDash val="solid"/>
+                      <a:round/>
+                      <a:headEnd len="sm" w="sm" type="none"/>
+                      <a:tailEnd len="sm" w="sm" type="none"/>
+                    </a:lnL>
+                    <a:lnR cap="flat" cmpd="sng" w="19050">
+                      <a:solidFill>
+                        <a:schemeClr val="dk1"/>
+                      </a:solidFill>
+                      <a:prstDash val="solid"/>
+                      <a:round/>
+                      <a:headEnd len="sm" w="sm" type="none"/>
+                      <a:tailEnd len="sm" w="sm" type="none"/>
+                    </a:lnR>
+                    <a:lnT cap="flat" cmpd="sng" w="19050">
+                      <a:solidFill>
+                        <a:schemeClr val="dk1"/>
+                      </a:solidFill>
+                      <a:prstDash val="solid"/>
+                      <a:round/>
+                      <a:headEnd len="sm" w="sm" type="none"/>
+                      <a:tailEnd len="sm" w="sm" type="none"/>
+                    </a:lnT>
+                    <a:lnB cap="flat" cmpd="sng" w="19050">
+                      <a:solidFill>
+                        <a:schemeClr val="dk1"/>
+                      </a:solidFill>
+                      <a:prstDash val="solid"/>
+                      <a:round/>
+                      <a:headEnd len="sm" w="sm" type="none"/>
+                      <a:tailEnd len="sm" w="sm" type="none"/>
+                    </a:lnB>
+                    <a:solidFill>
+                      <a:srgbClr val="4FA8F7"/>
+                    </a:solidFill>
+                  </a:tcPr>
+                </a:tc>
+                <a:tc>
+                  <a:txBody>
+                    <a:bodyPr/>
+                    <a:lstStyle/>
+                    <a:p>
+                      <a:pPr indent="0" lvl="0" marL="0" rtl="0" algn="l">
+                        <a:lnSpc>
+                          <a:spcPct val="80000"/>
+                        </a:lnSpc>
+                        <a:spcBef>
+                          <a:spcPts val="0"/>
+                        </a:spcBef>
+                        <a:spcAft>
+                          <a:spcPts val="0"/>
+                        </a:spcAft>
+                        <a:buClr>
+                          <a:schemeClr val="dk1"/>
+                        </a:buClr>
+                        <a:buSzPts val="1100"/>
+                        <a:buFont typeface="Arial"/>
+                        <a:buNone/>
+                      </a:pPr>
+                      <a:r>
+                        <a:rPr b="1" lang="en" sz="2100">
+                          <a:solidFill>
+                            <a:schemeClr val="dk1"/>
+                          </a:solidFill>
+                        </a:rPr>
+                        <a:t>BIC interaction</a:t>
+                      </a:r>
+                      <a:endParaRPr b="1" sz="2100"/>
+                    </a:p>
+                  </a:txBody>
+                  <a:tcPr marT="91425" marB="91425" marR="91425" marL="91425" anchor="ctr">
+                    <a:lnL cap="flat" cmpd="sng" w="19050">
+                      <a:solidFill>
+                        <a:schemeClr val="dk1"/>
+                      </a:solidFill>
+                      <a:prstDash val="solid"/>
+                      <a:round/>
+                      <a:headEnd len="sm" w="sm" type="none"/>
+                      <a:tailEnd len="sm" w="sm" type="none"/>
+                    </a:lnL>
+                    <a:lnR cap="flat" cmpd="sng" w="19050">
+                      <a:solidFill>
+                        <a:schemeClr val="dk1">
+                          <a:alpha val="0"/>
+                        </a:schemeClr>
                       </a:solidFill>
                       <a:prstDash val="solid"/>
                       <a:round/>
@@ -8047,10 +8214,10 @@
                         <a:buNone/>
                       </a:pPr>
                       <a:r>
-                        <a:rPr b="1" lang="en" sz="2200"/>
+                        <a:rPr b="1" lang="en" sz="2100"/>
                         <a:t>RMSE</a:t>
                       </a:r>
-                      <a:endParaRPr b="1" sz="2200"/>
+                      <a:endParaRPr b="1" sz="2100"/>
                     </a:p>
                   </a:txBody>
                   <a:tcPr marT="91425" marB="91425" marR="91425" marL="91425" anchor="ctr">
@@ -8115,10 +8282,10 @@
                         <a:buNone/>
                       </a:pPr>
                       <a:r>
-                        <a:rPr lang="en" sz="2200"/>
+                        <a:rPr lang="en" sz="2100"/>
                         <a:t>18.798</a:t>
                       </a:r>
-                      <a:endParaRPr sz="2200"/>
+                      <a:endParaRPr sz="2100"/>
                     </a:p>
                   </a:txBody>
                   <a:tcPr marT="91425" marB="91425" marR="91425" marL="91425" anchor="ctr">
@@ -8178,10 +8345,10 @@
                         <a:buNone/>
                       </a:pPr>
                       <a:r>
-                        <a:rPr lang="en" sz="2200"/>
+                        <a:rPr lang="en" sz="2100"/>
                         <a:t>18.829  </a:t>
                       </a:r>
-                      <a:endParaRPr sz="2200"/>
+                      <a:endParaRPr sz="2100"/>
                     </a:p>
                   </a:txBody>
                   <a:tcPr marT="91425" marB="91425" marR="91425" marL="91425" anchor="ctr">
@@ -8241,10 +8408,10 @@
                         <a:buNone/>
                       </a:pPr>
                       <a:r>
-                        <a:rPr lang="en" sz="2200"/>
+                        <a:rPr lang="en" sz="2100"/>
                         <a:t>18.831</a:t>
                       </a:r>
-                      <a:endParaRPr sz="2200"/>
+                      <a:endParaRPr sz="2100"/>
                     </a:p>
                   </a:txBody>
                   <a:tcPr marT="91425" marB="91425" marR="91425" marL="91425" anchor="ctr">
@@ -8304,14 +8471,14 @@
                         <a:buNone/>
                       </a:pPr>
                       <a:r>
-                        <a:rPr b="1" lang="en" sz="2200">
+                        <a:rPr lang="en" sz="2100">
                           <a:solidFill>
                             <a:schemeClr val="dk1"/>
                           </a:solidFill>
                         </a:rPr>
-                        <a:t>18.721</a:t>
+                        <a:t>13.922</a:t>
                       </a:r>
-                      <a:endParaRPr b="1" sz="2200">
+                      <a:endParaRPr sz="2100">
                         <a:solidFill>
                           <a:schemeClr val="dk1"/>
                         </a:solidFill>
@@ -8356,8 +8523,202 @@
                       <a:tailEnd len="sm" w="sm" type="none"/>
                     </a:lnB>
                     <a:solidFill>
+                      <a:srgbClr val="9AC5F7"/>
+                    </a:solidFill>
+                  </a:tcPr>
+                </a:tc>
+                <a:tc>
+                  <a:txBody>
+                    <a:bodyPr/>
+                    <a:lstStyle/>
+                    <a:p>
+                      <a:pPr indent="0" lvl="0" marL="0" rtl="0" algn="r">
+                        <a:lnSpc>
+                          <a:spcPct val="80000"/>
+                        </a:lnSpc>
+                        <a:spcBef>
+                          <a:spcPts val="0"/>
+                        </a:spcBef>
+                        <a:spcAft>
+                          <a:spcPts val="0"/>
+                        </a:spcAft>
+                        <a:buNone/>
+                      </a:pPr>
+                      <a:r>
+                        <a:rPr lang="en" sz="2100"/>
+                        <a:t>15.071  </a:t>
+                      </a:r>
+                      <a:endParaRPr sz="2100"/>
+                    </a:p>
+                  </a:txBody>
+                  <a:tcPr marT="91425" marB="91425" marR="91425" marL="91425" anchor="ctr">
+                    <a:lnL cap="flat" cmpd="sng" w="19050">
+                      <a:solidFill>
+                        <a:schemeClr val="dk1"/>
+                      </a:solidFill>
+                      <a:prstDash val="solid"/>
+                      <a:round/>
+                      <a:headEnd len="sm" w="sm" type="none"/>
+                      <a:tailEnd len="sm" w="sm" type="none"/>
+                    </a:lnL>
+                    <a:lnR cap="flat" cmpd="sng" w="19050">
+                      <a:solidFill>
+                        <a:schemeClr val="dk1"/>
+                      </a:solidFill>
+                      <a:prstDash val="solid"/>
+                      <a:round/>
+                      <a:headEnd len="sm" w="sm" type="none"/>
+                      <a:tailEnd len="sm" w="sm" type="none"/>
+                    </a:lnR>
+                    <a:lnT cap="flat" cmpd="sng" w="19050">
+                      <a:solidFill>
+                        <a:schemeClr val="dk1"/>
+                      </a:solidFill>
+                      <a:prstDash val="solid"/>
+                      <a:round/>
+                      <a:headEnd len="sm" w="sm" type="none"/>
+                      <a:tailEnd len="sm" w="sm" type="none"/>
+                    </a:lnT>
+                    <a:lnB cap="flat" cmpd="sng" w="19050">
+                      <a:solidFill>
+                        <a:schemeClr val="dk1"/>
+                      </a:solidFill>
+                      <a:prstDash val="solid"/>
+                      <a:round/>
+                      <a:headEnd len="sm" w="sm" type="none"/>
+                      <a:tailEnd len="sm" w="sm" type="none"/>
+                    </a:lnB>
+                  </a:tcPr>
+                </a:tc>
+                <a:tc>
+                  <a:txBody>
+                    <a:bodyPr/>
+                    <a:lstStyle/>
+                    <a:p>
+                      <a:pPr indent="0" lvl="0" marL="0" rtl="0" algn="r">
+                        <a:lnSpc>
+                          <a:spcPct val="80000"/>
+                        </a:lnSpc>
+                        <a:spcBef>
+                          <a:spcPts val="0"/>
+                        </a:spcBef>
+                        <a:spcAft>
+                          <a:spcPts val="0"/>
+                        </a:spcAft>
+                        <a:buNone/>
+                      </a:pPr>
+                      <a:r>
+                        <a:rPr lang="en" sz="2100"/>
+                        <a:t>11.155</a:t>
+                      </a:r>
+                      <a:endParaRPr sz="2100"/>
+                    </a:p>
+                  </a:txBody>
+                  <a:tcPr marT="91425" marB="91425" marR="91425" marL="91425" anchor="ctr">
+                    <a:lnL cap="flat" cmpd="sng" w="19050">
+                      <a:solidFill>
+                        <a:schemeClr val="dk1"/>
+                      </a:solidFill>
+                      <a:prstDash val="solid"/>
+                      <a:round/>
+                      <a:headEnd len="sm" w="sm" type="none"/>
+                      <a:tailEnd len="sm" w="sm" type="none"/>
+                    </a:lnL>
+                    <a:lnR cap="flat" cmpd="sng" w="19050">
+                      <a:solidFill>
+                        <a:schemeClr val="dk1"/>
+                      </a:solidFill>
+                      <a:prstDash val="solid"/>
+                      <a:round/>
+                      <a:headEnd len="sm" w="sm" type="none"/>
+                      <a:tailEnd len="sm" w="sm" type="none"/>
+                    </a:lnR>
+                    <a:lnT cap="flat" cmpd="sng" w="19050">
+                      <a:solidFill>
+                        <a:schemeClr val="dk1"/>
+                      </a:solidFill>
+                      <a:prstDash val="solid"/>
+                      <a:round/>
+                      <a:headEnd len="sm" w="sm" type="none"/>
+                      <a:tailEnd len="sm" w="sm" type="none"/>
+                    </a:lnT>
+                    <a:lnB cap="flat" cmpd="sng" w="19050">
+                      <a:solidFill>
+                        <a:schemeClr val="dk1"/>
+                      </a:solidFill>
+                      <a:prstDash val="solid"/>
+                      <a:round/>
+                      <a:headEnd len="sm" w="sm" type="none"/>
+                      <a:tailEnd len="sm" w="sm" type="none"/>
+                    </a:lnB>
+                    <a:solidFill>
                       <a:srgbClr val="7FB7F8"/>
                     </a:solidFill>
+                  </a:tcPr>
+                </a:tc>
+                <a:tc>
+                  <a:txBody>
+                    <a:bodyPr/>
+                    <a:lstStyle/>
+                    <a:p>
+                      <a:pPr indent="0" lvl="0" marL="0" rtl="0" algn="r">
+                        <a:lnSpc>
+                          <a:spcPct val="80000"/>
+                        </a:lnSpc>
+                        <a:spcBef>
+                          <a:spcPts val="0"/>
+                        </a:spcBef>
+                        <a:spcAft>
+                          <a:spcPts val="0"/>
+                        </a:spcAft>
+                        <a:buNone/>
+                      </a:pPr>
+                      <a:r>
+                        <a:rPr lang="en" sz="2100"/>
+                        <a:t>15.470</a:t>
+                      </a:r>
+                      <a:endParaRPr sz="2100"/>
+                    </a:p>
+                  </a:txBody>
+                  <a:tcPr marT="91425" marB="91425" marR="91425" marL="91425" anchor="ctr">
+                    <a:lnL cap="flat" cmpd="sng" w="19050">
+                      <a:solidFill>
+                        <a:schemeClr val="dk1"/>
+                      </a:solidFill>
+                      <a:prstDash val="solid"/>
+                      <a:round/>
+                      <a:headEnd len="sm" w="sm" type="none"/>
+                      <a:tailEnd len="sm" w="sm" type="none"/>
+                    </a:lnL>
+                    <a:lnR cap="flat" cmpd="sng" w="19050">
+                      <a:solidFill>
+                        <a:schemeClr val="dk1">
+                          <a:alpha val="0"/>
+                        </a:schemeClr>
+                      </a:solidFill>
+                      <a:prstDash val="solid"/>
+                      <a:round/>
+                      <a:headEnd len="sm" w="sm" type="none"/>
+                      <a:tailEnd len="sm" w="sm" type="none"/>
+                    </a:lnR>
+                    <a:lnT cap="flat" cmpd="sng" w="19050">
+                      <a:solidFill>
+                        <a:schemeClr val="dk1"/>
+                      </a:solidFill>
+                      <a:prstDash val="solid"/>
+                      <a:round/>
+                      <a:headEnd len="sm" w="sm" type="none"/>
+                      <a:tailEnd len="sm" w="sm" type="none"/>
+                    </a:lnT>
+                    <a:lnB cap="flat" cmpd="sng" w="19050">
+                      <a:solidFill>
+                        <a:schemeClr val="dk1"/>
+                      </a:solidFill>
+                      <a:prstDash val="solid"/>
+                      <a:round/>
+                      <a:headEnd len="sm" w="sm" type="none"/>
+                      <a:tailEnd len="sm" w="sm" type="none"/>
+                    </a:lnB>
                   </a:tcPr>
                 </a:tc>
               </a:tr>
@@ -8385,14 +8746,14 @@
                         <a:buNone/>
                       </a:pPr>
                       <a:r>
-                        <a:rPr b="1" lang="en" sz="2200">
+                        <a:rPr b="1" lang="en" sz="2100">
                           <a:solidFill>
                             <a:schemeClr val="dk1"/>
                           </a:solidFill>
                         </a:rPr>
-                        <a:t>R squared  </a:t>
+                        <a:t>R^2 </a:t>
                       </a:r>
-                      <a:endParaRPr b="1" sz="2200"/>
+                      <a:endParaRPr b="1" sz="2100"/>
                     </a:p>
                   </a:txBody>
                   <a:tcPr marT="91425" marB="91425" marR="91425" marL="91425" anchor="ctr">
@@ -8462,14 +8823,14 @@
                         <a:buNone/>
                       </a:pPr>
                       <a:r>
-                        <a:rPr lang="en" sz="2200">
+                        <a:rPr lang="en" sz="2100">
                           <a:solidFill>
                             <a:schemeClr val="dk1"/>
                           </a:solidFill>
                         </a:rPr>
                         <a:t>0.965</a:t>
                       </a:r>
-                      <a:endParaRPr sz="2200"/>
+                      <a:endParaRPr sz="2100"/>
                     </a:p>
                   </a:txBody>
                   <a:tcPr marT="91425" marB="91425" marR="91425" marL="91425" anchor="ctr">
@@ -8534,14 +8895,14 @@
                         <a:buNone/>
                       </a:pPr>
                       <a:r>
-                        <a:rPr lang="en" sz="2200">
+                        <a:rPr lang="en" sz="2100">
                           <a:solidFill>
                             <a:schemeClr val="dk1"/>
                           </a:solidFill>
                         </a:rPr>
                         <a:t>0.965</a:t>
                       </a:r>
-                      <a:endParaRPr sz="2200"/>
+                      <a:endParaRPr sz="2100"/>
                     </a:p>
                   </a:txBody>
                   <a:tcPr marT="91425" marB="91425" marR="91425" marL="91425" anchor="ctr">
@@ -8601,14 +8962,14 @@
                         <a:buNone/>
                       </a:pPr>
                       <a:r>
-                        <a:rPr lang="en" sz="2200">
+                        <a:rPr lang="en" sz="2100">
                           <a:solidFill>
                             <a:schemeClr val="dk1"/>
                           </a:solidFill>
                         </a:rPr>
                         <a:t>0.964  </a:t>
                       </a:r>
-                      <a:endParaRPr sz="2200"/>
+                      <a:endParaRPr sz="2100"/>
                     </a:p>
                   </a:txBody>
                   <a:tcPr marT="91425" marB="91425" marR="91425" marL="91425" anchor="ctr">
@@ -8668,14 +9029,14 @@
                         <a:buNone/>
                       </a:pPr>
                       <a:r>
-                        <a:rPr b="1" lang="en" sz="2200">
+                        <a:rPr lang="en" sz="2100">
                           <a:solidFill>
                             <a:schemeClr val="dk1"/>
                           </a:solidFill>
                         </a:rPr>
-                        <a:t>0.965</a:t>
+                        <a:t>0.973</a:t>
                       </a:r>
-                      <a:endParaRPr b="1" sz="2200">
+                      <a:endParaRPr sz="2100">
                         <a:solidFill>
                           <a:schemeClr val="dk1"/>
                         </a:solidFill>
@@ -8720,8 +9081,241 @@
                       <a:tailEnd len="sm" w="sm" type="none"/>
                     </a:lnB>
                     <a:solidFill>
+                      <a:srgbClr val="9AC5F7"/>
+                    </a:solidFill>
+                  </a:tcPr>
+                </a:tc>
+                <a:tc>
+                  <a:txBody>
+                    <a:bodyPr/>
+                    <a:lstStyle/>
+                    <a:p>
+                      <a:pPr indent="0" lvl="0" marL="0" rtl="0" algn="r">
+                        <a:lnSpc>
+                          <a:spcPct val="80000"/>
+                        </a:lnSpc>
+                        <a:spcBef>
+                          <a:spcPts val="0"/>
+                        </a:spcBef>
+                        <a:spcAft>
+                          <a:spcPts val="0"/>
+                        </a:spcAft>
+                        <a:buClr>
+                          <a:schemeClr val="dk1"/>
+                        </a:buClr>
+                        <a:buSzPts val="1100"/>
+                        <a:buFont typeface="Arial"/>
+                        <a:buNone/>
+                      </a:pPr>
+                      <a:r>
+                        <a:rPr lang="en" sz="2100">
+                          <a:solidFill>
+                            <a:schemeClr val="dk1"/>
+                          </a:solidFill>
+                        </a:rPr>
+                        <a:t>0.977</a:t>
+                      </a:r>
+                      <a:endParaRPr sz="2100">
+                        <a:solidFill>
+                          <a:schemeClr val="dk1"/>
+                        </a:solidFill>
+                      </a:endParaRPr>
+                    </a:p>
+                  </a:txBody>
+                  <a:tcPr marT="91425" marB="91425" marR="91425" marL="91425" anchor="ctr">
+                    <a:lnL cap="flat" cmpd="sng" w="19050">
+                      <a:solidFill>
+                        <a:schemeClr val="dk1"/>
+                      </a:solidFill>
+                      <a:prstDash val="solid"/>
+                      <a:round/>
+                      <a:headEnd len="sm" w="sm" type="none"/>
+                      <a:tailEnd len="sm" w="sm" type="none"/>
+                    </a:lnL>
+                    <a:lnR cap="flat" cmpd="sng" w="19050">
+                      <a:solidFill>
+                        <a:schemeClr val="dk1"/>
+                      </a:solidFill>
+                      <a:prstDash val="solid"/>
+                      <a:round/>
+                      <a:headEnd len="sm" w="sm" type="none"/>
+                      <a:tailEnd len="sm" w="sm" type="none"/>
+                    </a:lnR>
+                    <a:lnT cap="flat" cmpd="sng" w="19050">
+                      <a:solidFill>
+                        <a:schemeClr val="dk1"/>
+                      </a:solidFill>
+                      <a:prstDash val="solid"/>
+                      <a:round/>
+                      <a:headEnd len="sm" w="sm" type="none"/>
+                      <a:tailEnd len="sm" w="sm" type="none"/>
+                    </a:lnT>
+                    <a:lnB cap="flat" cmpd="sng" w="19050">
+                      <a:solidFill>
+                        <a:schemeClr val="dk1"/>
+                      </a:solidFill>
+                      <a:prstDash val="solid"/>
+                      <a:round/>
+                      <a:headEnd len="sm" w="sm" type="none"/>
+                      <a:tailEnd len="sm" w="sm" type="none"/>
+                    </a:lnB>
+                  </a:tcPr>
+                </a:tc>
+                <a:tc>
+                  <a:txBody>
+                    <a:bodyPr/>
+                    <a:lstStyle/>
+                    <a:p>
+                      <a:pPr indent="0" lvl="0" marL="0" rtl="0" algn="r">
+                        <a:lnSpc>
+                          <a:spcPct val="80000"/>
+                        </a:lnSpc>
+                        <a:spcBef>
+                          <a:spcPts val="0"/>
+                        </a:spcBef>
+                        <a:spcAft>
+                          <a:spcPts val="0"/>
+                        </a:spcAft>
+                        <a:buClr>
+                          <a:schemeClr val="dk1"/>
+                        </a:buClr>
+                        <a:buSzPts val="1100"/>
+                        <a:buFont typeface="Arial"/>
+                        <a:buNone/>
+                      </a:pPr>
+                      <a:r>
+                        <a:rPr lang="en" sz="2100">
+                          <a:solidFill>
+                            <a:schemeClr val="dk1"/>
+                          </a:solidFill>
+                        </a:rPr>
+                        <a:t>0.984</a:t>
+                      </a:r>
+                      <a:endParaRPr sz="2100">
+                        <a:solidFill>
+                          <a:schemeClr val="dk1"/>
+                        </a:solidFill>
+                      </a:endParaRPr>
+                    </a:p>
+                  </a:txBody>
+                  <a:tcPr marT="91425" marB="91425" marR="91425" marL="91425" anchor="ctr">
+                    <a:lnL cap="flat" cmpd="sng" w="19050">
+                      <a:solidFill>
+                        <a:schemeClr val="dk1"/>
+                      </a:solidFill>
+                      <a:prstDash val="solid"/>
+                      <a:round/>
+                      <a:headEnd len="sm" w="sm" type="none"/>
+                      <a:tailEnd len="sm" w="sm" type="none"/>
+                    </a:lnL>
+                    <a:lnR cap="flat" cmpd="sng" w="19050">
+                      <a:solidFill>
+                        <a:schemeClr val="dk1"/>
+                      </a:solidFill>
+                      <a:prstDash val="solid"/>
+                      <a:round/>
+                      <a:headEnd len="sm" w="sm" type="none"/>
+                      <a:tailEnd len="sm" w="sm" type="none"/>
+                    </a:lnR>
+                    <a:lnT cap="flat" cmpd="sng" w="19050">
+                      <a:solidFill>
+                        <a:schemeClr val="dk1"/>
+                      </a:solidFill>
+                      <a:prstDash val="solid"/>
+                      <a:round/>
+                      <a:headEnd len="sm" w="sm" type="none"/>
+                      <a:tailEnd len="sm" w="sm" type="none"/>
+                    </a:lnT>
+                    <a:lnB cap="flat" cmpd="sng" w="19050">
+                      <a:solidFill>
+                        <a:schemeClr val="dk1"/>
+                      </a:solidFill>
+                      <a:prstDash val="solid"/>
+                      <a:round/>
+                      <a:headEnd len="sm" w="sm" type="none"/>
+                      <a:tailEnd len="sm" w="sm" type="none"/>
+                    </a:lnB>
+                    <a:solidFill>
                       <a:srgbClr val="7FB7F8"/>
                     </a:solidFill>
+                  </a:tcPr>
+                </a:tc>
+                <a:tc>
+                  <a:txBody>
+                    <a:bodyPr/>
+                    <a:lstStyle/>
+                    <a:p>
+                      <a:pPr indent="0" lvl="0" marL="0" rtl="0" algn="r">
+                        <a:lnSpc>
+                          <a:spcPct val="80000"/>
+                        </a:lnSpc>
+                        <a:spcBef>
+                          <a:spcPts val="0"/>
+                        </a:spcBef>
+                        <a:spcAft>
+                          <a:spcPts val="0"/>
+                        </a:spcAft>
+                        <a:buClr>
+                          <a:schemeClr val="dk1"/>
+                        </a:buClr>
+                        <a:buSzPts val="1100"/>
+                        <a:buFont typeface="Arial"/>
+                        <a:buNone/>
+                      </a:pPr>
+                      <a:r>
+                        <a:rPr lang="en" sz="2100">
+                          <a:solidFill>
+                            <a:schemeClr val="dk1"/>
+                          </a:solidFill>
+                        </a:rPr>
+                        <a:t>0.976</a:t>
+                      </a:r>
+                      <a:endParaRPr sz="2100">
+                        <a:solidFill>
+                          <a:schemeClr val="dk1"/>
+                        </a:solidFill>
+                      </a:endParaRPr>
+                    </a:p>
+                  </a:txBody>
+                  <a:tcPr marT="91425" marB="91425" marR="91425" marL="91425" anchor="ctr">
+                    <a:lnL cap="flat" cmpd="sng" w="19050">
+                      <a:solidFill>
+                        <a:schemeClr val="dk1"/>
+                      </a:solidFill>
+                      <a:prstDash val="solid"/>
+                      <a:round/>
+                      <a:headEnd len="sm" w="sm" type="none"/>
+                      <a:tailEnd len="sm" w="sm" type="none"/>
+                    </a:lnL>
+                    <a:lnR cap="flat" cmpd="sng" w="19050">
+                      <a:solidFill>
+                        <a:schemeClr val="dk1">
+                          <a:alpha val="0"/>
+                        </a:schemeClr>
+                      </a:solidFill>
+                      <a:prstDash val="solid"/>
+                      <a:round/>
+                      <a:headEnd len="sm" w="sm" type="none"/>
+                      <a:tailEnd len="sm" w="sm" type="none"/>
+                    </a:lnR>
+                    <a:lnT cap="flat" cmpd="sng" w="19050">
+                      <a:solidFill>
+                        <a:schemeClr val="dk1"/>
+                      </a:solidFill>
+                      <a:prstDash val="solid"/>
+                      <a:round/>
+                      <a:headEnd len="sm" w="sm" type="none"/>
+                      <a:tailEnd len="sm" w="sm" type="none"/>
+                    </a:lnT>
+                    <a:lnB cap="flat" cmpd="sng" w="19050">
+                      <a:solidFill>
+                        <a:schemeClr val="dk1"/>
+                      </a:solidFill>
+                      <a:prstDash val="solid"/>
+                      <a:round/>
+                      <a:headEnd len="sm" w="sm" type="none"/>
+                      <a:tailEnd len="sm" w="sm" type="none"/>
+                    </a:lnB>
                   </a:tcPr>
                 </a:tc>
               </a:tr>
@@ -8744,10 +9338,10 @@
                         <a:buNone/>
                       </a:pPr>
                       <a:r>
-                        <a:rPr b="1" lang="en" sz="2200"/>
+                        <a:rPr b="1" lang="en" sz="2100"/>
                         <a:t>MAE</a:t>
                       </a:r>
-                      <a:endParaRPr b="1" sz="2200"/>
+                      <a:endParaRPr b="1" sz="2100"/>
                     </a:p>
                   </a:txBody>
                   <a:tcPr marT="91425" marB="91425" marR="91425" marL="91425" anchor="ctr">
@@ -8817,14 +9411,14 @@
                         <a:buNone/>
                       </a:pPr>
                       <a:r>
-                        <a:rPr lang="en" sz="2200">
+                        <a:rPr lang="en" sz="2100">
                           <a:solidFill>
                             <a:schemeClr val="dk1"/>
                           </a:solidFill>
                         </a:rPr>
                         <a:t>11.539</a:t>
                       </a:r>
-                      <a:endParaRPr sz="2200"/>
+                      <a:endParaRPr sz="2100"/>
                     </a:p>
                   </a:txBody>
                   <a:tcPr marT="91425" marB="91425" marR="91425" marL="91425" anchor="ctr">
@@ -8889,14 +9483,14 @@
                         <a:buNone/>
                       </a:pPr>
                       <a:r>
-                        <a:rPr lang="en" sz="2200">
+                        <a:rPr lang="en" sz="2100">
                           <a:solidFill>
                             <a:schemeClr val="dk1"/>
                           </a:solidFill>
                         </a:rPr>
                         <a:t>11.544</a:t>
                       </a:r>
-                      <a:endParaRPr sz="2200"/>
+                      <a:endParaRPr sz="2100"/>
                     </a:p>
                   </a:txBody>
                   <a:tcPr marT="91425" marB="91425" marR="91425" marL="91425" anchor="ctr">
@@ -8961,14 +9555,14 @@
                         <a:buNone/>
                       </a:pPr>
                       <a:r>
-                        <a:rPr lang="en" sz="2200">
+                        <a:rPr lang="en" sz="2100">
                           <a:solidFill>
                             <a:schemeClr val="dk1"/>
                           </a:solidFill>
                         </a:rPr>
                         <a:t>11.515</a:t>
                       </a:r>
-                      <a:endParaRPr sz="2200"/>
+                      <a:endParaRPr sz="2100"/>
                     </a:p>
                   </a:txBody>
                   <a:tcPr marT="91425" marB="91425" marR="91425" marL="91425" anchor="ctr">
@@ -9028,14 +9622,14 @@
                         <a:buNone/>
                       </a:pPr>
                       <a:r>
-                        <a:rPr b="1" lang="en" sz="2200">
+                        <a:rPr lang="en" sz="2100">
                           <a:solidFill>
                             <a:schemeClr val="dk1"/>
                           </a:solidFill>
                         </a:rPr>
-                        <a:t>11.476</a:t>
+                        <a:t>9.326</a:t>
                       </a:r>
-                      <a:endParaRPr b="1" sz="2200">
+                      <a:endParaRPr sz="2100">
                         <a:solidFill>
                           <a:schemeClr val="dk1"/>
                         </a:solidFill>
@@ -9080,8 +9674,241 @@
                       <a:tailEnd len="sm" w="sm" type="none"/>
                     </a:lnB>
                     <a:solidFill>
+                      <a:srgbClr val="9AC5F7"/>
+                    </a:solidFill>
+                  </a:tcPr>
+                </a:tc>
+                <a:tc>
+                  <a:txBody>
+                    <a:bodyPr/>
+                    <a:lstStyle/>
+                    <a:p>
+                      <a:pPr indent="0" lvl="0" marL="0" rtl="0" algn="r">
+                        <a:lnSpc>
+                          <a:spcPct val="80000"/>
+                        </a:lnSpc>
+                        <a:spcBef>
+                          <a:spcPts val="0"/>
+                        </a:spcBef>
+                        <a:spcAft>
+                          <a:spcPts val="0"/>
+                        </a:spcAft>
+                        <a:buClr>
+                          <a:schemeClr val="dk1"/>
+                        </a:buClr>
+                        <a:buSzPts val="1100"/>
+                        <a:buFont typeface="Arial"/>
+                        <a:buNone/>
+                      </a:pPr>
+                      <a:r>
+                        <a:rPr lang="en" sz="2100">
+                          <a:solidFill>
+                            <a:schemeClr val="dk1"/>
+                          </a:solidFill>
+                        </a:rPr>
+                        <a:t>9.474</a:t>
+                      </a:r>
+                      <a:endParaRPr sz="2100">
+                        <a:solidFill>
+                          <a:schemeClr val="dk1"/>
+                        </a:solidFill>
+                      </a:endParaRPr>
+                    </a:p>
+                  </a:txBody>
+                  <a:tcPr marT="91425" marB="91425" marR="91425" marL="91425" anchor="ctr">
+                    <a:lnL cap="flat" cmpd="sng" w="19050">
+                      <a:solidFill>
+                        <a:schemeClr val="dk1"/>
+                      </a:solidFill>
+                      <a:prstDash val="solid"/>
+                      <a:round/>
+                      <a:headEnd len="sm" w="sm" type="none"/>
+                      <a:tailEnd len="sm" w="sm" type="none"/>
+                    </a:lnL>
+                    <a:lnR cap="flat" cmpd="sng" w="19050">
+                      <a:solidFill>
+                        <a:schemeClr val="dk1"/>
+                      </a:solidFill>
+                      <a:prstDash val="solid"/>
+                      <a:round/>
+                      <a:headEnd len="sm" w="sm" type="none"/>
+                      <a:tailEnd len="sm" w="sm" type="none"/>
+                    </a:lnR>
+                    <a:lnT cap="flat" cmpd="sng" w="19050">
+                      <a:solidFill>
+                        <a:schemeClr val="dk1"/>
+                      </a:solidFill>
+                      <a:prstDash val="solid"/>
+                      <a:round/>
+                      <a:headEnd len="sm" w="sm" type="none"/>
+                      <a:tailEnd len="sm" w="sm" type="none"/>
+                    </a:lnT>
+                    <a:lnB cap="flat" cmpd="sng" w="19050">
+                      <a:solidFill>
+                        <a:schemeClr val="dk1"/>
+                      </a:solidFill>
+                      <a:prstDash val="solid"/>
+                      <a:round/>
+                      <a:headEnd len="sm" w="sm" type="none"/>
+                      <a:tailEnd len="sm" w="sm" type="none"/>
+                    </a:lnB>
+                  </a:tcPr>
+                </a:tc>
+                <a:tc>
+                  <a:txBody>
+                    <a:bodyPr/>
+                    <a:lstStyle/>
+                    <a:p>
+                      <a:pPr indent="0" lvl="0" marL="0" rtl="0" algn="r">
+                        <a:lnSpc>
+                          <a:spcPct val="80000"/>
+                        </a:lnSpc>
+                        <a:spcBef>
+                          <a:spcPts val="0"/>
+                        </a:spcBef>
+                        <a:spcAft>
+                          <a:spcPts val="0"/>
+                        </a:spcAft>
+                        <a:buClr>
+                          <a:schemeClr val="dk1"/>
+                        </a:buClr>
+                        <a:buSzPts val="1100"/>
+                        <a:buFont typeface="Arial"/>
+                        <a:buNone/>
+                      </a:pPr>
+                      <a:r>
+                        <a:rPr lang="en" sz="2100">
+                          <a:solidFill>
+                            <a:schemeClr val="dk1"/>
+                          </a:solidFill>
+                        </a:rPr>
+                        <a:t>7.621</a:t>
+                      </a:r>
+                      <a:endParaRPr sz="2100">
+                        <a:solidFill>
+                          <a:schemeClr val="dk1"/>
+                        </a:solidFill>
+                      </a:endParaRPr>
+                    </a:p>
+                  </a:txBody>
+                  <a:tcPr marT="91425" marB="91425" marR="91425" marL="91425" anchor="ctr">
+                    <a:lnL cap="flat" cmpd="sng" w="19050">
+                      <a:solidFill>
+                        <a:schemeClr val="dk1"/>
+                      </a:solidFill>
+                      <a:prstDash val="solid"/>
+                      <a:round/>
+                      <a:headEnd len="sm" w="sm" type="none"/>
+                      <a:tailEnd len="sm" w="sm" type="none"/>
+                    </a:lnL>
+                    <a:lnR cap="flat" cmpd="sng" w="19050">
+                      <a:solidFill>
+                        <a:schemeClr val="dk1"/>
+                      </a:solidFill>
+                      <a:prstDash val="solid"/>
+                      <a:round/>
+                      <a:headEnd len="sm" w="sm" type="none"/>
+                      <a:tailEnd len="sm" w="sm" type="none"/>
+                    </a:lnR>
+                    <a:lnT cap="flat" cmpd="sng" w="19050">
+                      <a:solidFill>
+                        <a:schemeClr val="dk1"/>
+                      </a:solidFill>
+                      <a:prstDash val="solid"/>
+                      <a:round/>
+                      <a:headEnd len="sm" w="sm" type="none"/>
+                      <a:tailEnd len="sm" w="sm" type="none"/>
+                    </a:lnT>
+                    <a:lnB cap="flat" cmpd="sng" w="19050">
+                      <a:solidFill>
+                        <a:schemeClr val="dk1"/>
+                      </a:solidFill>
+                      <a:prstDash val="solid"/>
+                      <a:round/>
+                      <a:headEnd len="sm" w="sm" type="none"/>
+                      <a:tailEnd len="sm" w="sm" type="none"/>
+                    </a:lnB>
+                    <a:solidFill>
                       <a:srgbClr val="7FB7F8"/>
                     </a:solidFill>
+                  </a:tcPr>
+                </a:tc>
+                <a:tc>
+                  <a:txBody>
+                    <a:bodyPr/>
+                    <a:lstStyle/>
+                    <a:p>
+                      <a:pPr indent="0" lvl="0" marL="0" rtl="0" algn="r">
+                        <a:lnSpc>
+                          <a:spcPct val="80000"/>
+                        </a:lnSpc>
+                        <a:spcBef>
+                          <a:spcPts val="0"/>
+                        </a:spcBef>
+                        <a:spcAft>
+                          <a:spcPts val="0"/>
+                        </a:spcAft>
+                        <a:buClr>
+                          <a:schemeClr val="dk1"/>
+                        </a:buClr>
+                        <a:buSzPts val="1100"/>
+                        <a:buFont typeface="Arial"/>
+                        <a:buNone/>
+                      </a:pPr>
+                      <a:r>
+                        <a:rPr lang="en" sz="2100">
+                          <a:solidFill>
+                            <a:schemeClr val="dk1"/>
+                          </a:solidFill>
+                        </a:rPr>
+                        <a:t>9.742</a:t>
+                      </a:r>
+                      <a:endParaRPr sz="2100">
+                        <a:solidFill>
+                          <a:schemeClr val="dk1"/>
+                        </a:solidFill>
+                      </a:endParaRPr>
+                    </a:p>
+                  </a:txBody>
+                  <a:tcPr marT="91425" marB="91425" marR="91425" marL="91425" anchor="ctr">
+                    <a:lnL cap="flat" cmpd="sng" w="19050">
+                      <a:solidFill>
+                        <a:schemeClr val="dk1"/>
+                      </a:solidFill>
+                      <a:prstDash val="solid"/>
+                      <a:round/>
+                      <a:headEnd len="sm" w="sm" type="none"/>
+                      <a:tailEnd len="sm" w="sm" type="none"/>
+                    </a:lnL>
+                    <a:lnR cap="flat" cmpd="sng" w="19050">
+                      <a:solidFill>
+                        <a:schemeClr val="dk1">
+                          <a:alpha val="0"/>
+                        </a:schemeClr>
+                      </a:solidFill>
+                      <a:prstDash val="solid"/>
+                      <a:round/>
+                      <a:headEnd len="sm" w="sm" type="none"/>
+                      <a:tailEnd len="sm" w="sm" type="none"/>
+                    </a:lnR>
+                    <a:lnT cap="flat" cmpd="sng" w="19050">
+                      <a:solidFill>
+                        <a:schemeClr val="dk1"/>
+                      </a:solidFill>
+                      <a:prstDash val="solid"/>
+                      <a:round/>
+                      <a:headEnd len="sm" w="sm" type="none"/>
+                      <a:tailEnd len="sm" w="sm" type="none"/>
+                    </a:lnT>
+                    <a:lnB cap="flat" cmpd="sng" w="19050">
+                      <a:solidFill>
+                        <a:schemeClr val="dk1"/>
+                      </a:solidFill>
+                      <a:prstDash val="solid"/>
+                      <a:round/>
+                      <a:headEnd len="sm" w="sm" type="none"/>
+                      <a:tailEnd len="sm" w="sm" type="none"/>
+                    </a:lnB>
                   </a:tcPr>
                 </a:tc>
               </a:tr>
@@ -9104,10 +9931,10 @@
                         <a:buNone/>
                       </a:pPr>
                       <a:r>
-                        <a:rPr b="1" lang="en" sz="2200"/>
+                        <a:rPr b="1" lang="en" sz="2100"/>
                         <a:t>p</a:t>
                       </a:r>
-                      <a:endParaRPr b="1" sz="2200"/>
+                      <a:endParaRPr b="1" sz="2100"/>
                     </a:p>
                   </a:txBody>
                   <a:tcPr marT="91425" marB="91425" marR="91425" marL="91425" anchor="ctr">
@@ -9172,10 +9999,10 @@
                         <a:buNone/>
                       </a:pPr>
                       <a:r>
-                        <a:rPr lang="en" sz="2200"/>
+                        <a:rPr lang="en" sz="2100"/>
                         <a:t>26</a:t>
                       </a:r>
-                      <a:endParaRPr sz="2200"/>
+                      <a:endParaRPr sz="2100"/>
                     </a:p>
                   </a:txBody>
                   <a:tcPr marT="91425" marB="91425" marR="91425" marL="91425" anchor="ctr">
@@ -9235,10 +10062,10 @@
                         <a:buNone/>
                       </a:pPr>
                       <a:r>
-                        <a:rPr lang="en" sz="2200"/>
+                        <a:rPr lang="en" sz="2100"/>
                         <a:t>23</a:t>
                       </a:r>
-                      <a:endParaRPr sz="2200"/>
+                      <a:endParaRPr sz="2100"/>
                     </a:p>
                   </a:txBody>
                   <a:tcPr marT="91425" marB="91425" marR="91425" marL="91425" anchor="ctr">
@@ -9298,10 +10125,10 @@
                         <a:buNone/>
                       </a:pPr>
                       <a:r>
-                        <a:rPr lang="en" sz="2200"/>
+                        <a:rPr lang="en" sz="2100"/>
                         <a:t>21</a:t>
                       </a:r>
-                      <a:endParaRPr sz="2200"/>
+                      <a:endParaRPr sz="2100"/>
                     </a:p>
                   </a:txBody>
                   <a:tcPr marT="91425" marB="91425" marR="91425" marL="91425" anchor="ctr">
@@ -9361,14 +10188,14 @@
                         <a:buNone/>
                       </a:pPr>
                       <a:r>
-                        <a:rPr b="1" lang="en" sz="2200">
+                        <a:rPr lang="en" sz="2100">
                           <a:solidFill>
                             <a:schemeClr val="dk1"/>
                           </a:solidFill>
                         </a:rPr>
                         <a:t>21</a:t>
                       </a:r>
-                      <a:endParaRPr b="1" sz="2200">
+                      <a:endParaRPr sz="2100">
                         <a:solidFill>
                           <a:schemeClr val="dk1"/>
                         </a:solidFill>
@@ -9413,8 +10240,202 @@
                       <a:tailEnd len="sm" w="sm" type="none"/>
                     </a:lnB>
                     <a:solidFill>
+                      <a:srgbClr val="9AC5F7"/>
+                    </a:solidFill>
+                  </a:tcPr>
+                </a:tc>
+                <a:tc>
+                  <a:txBody>
+                    <a:bodyPr/>
+                    <a:lstStyle/>
+                    <a:p>
+                      <a:pPr indent="0" lvl="0" marL="0" marR="0" rtl="0" algn="r">
+                        <a:lnSpc>
+                          <a:spcPct val="80000"/>
+                        </a:lnSpc>
+                        <a:spcBef>
+                          <a:spcPts val="0"/>
+                        </a:spcBef>
+                        <a:spcAft>
+                          <a:spcPts val="0"/>
+                        </a:spcAft>
+                        <a:buNone/>
+                      </a:pPr>
+                      <a:r>
+                        <a:rPr lang="en" sz="2100"/>
+                        <a:t>146</a:t>
+                      </a:r>
+                      <a:endParaRPr sz="2100"/>
+                    </a:p>
+                  </a:txBody>
+                  <a:tcPr marT="91425" marB="91425" marR="91425" marL="91425" anchor="ctr">
+                    <a:lnL cap="flat" cmpd="sng" w="19050">
+                      <a:solidFill>
+                        <a:schemeClr val="dk1"/>
+                      </a:solidFill>
+                      <a:prstDash val="solid"/>
+                      <a:round/>
+                      <a:headEnd len="sm" w="sm" type="none"/>
+                      <a:tailEnd len="sm" w="sm" type="none"/>
+                    </a:lnL>
+                    <a:lnR cap="flat" cmpd="sng" w="19050">
+                      <a:solidFill>
+                        <a:schemeClr val="dk1"/>
+                      </a:solidFill>
+                      <a:prstDash val="solid"/>
+                      <a:round/>
+                      <a:headEnd len="sm" w="sm" type="none"/>
+                      <a:tailEnd len="sm" w="sm" type="none"/>
+                    </a:lnR>
+                    <a:lnT cap="flat" cmpd="sng" w="19050">
+                      <a:solidFill>
+                        <a:schemeClr val="dk1"/>
+                      </a:solidFill>
+                      <a:prstDash val="solid"/>
+                      <a:round/>
+                      <a:headEnd len="sm" w="sm" type="none"/>
+                      <a:tailEnd len="sm" w="sm" type="none"/>
+                    </a:lnT>
+                    <a:lnB cap="flat" cmpd="sng" w="19050">
+                      <a:solidFill>
+                        <a:schemeClr val="dk1"/>
+                      </a:solidFill>
+                      <a:prstDash val="solid"/>
+                      <a:round/>
+                      <a:headEnd len="sm" w="sm" type="none"/>
+                      <a:tailEnd len="sm" w="sm" type="none"/>
+                    </a:lnB>
+                  </a:tcPr>
+                </a:tc>
+                <a:tc>
+                  <a:txBody>
+                    <a:bodyPr/>
+                    <a:lstStyle/>
+                    <a:p>
+                      <a:pPr indent="0" lvl="0" marL="0" marR="0" rtl="0" algn="r">
+                        <a:lnSpc>
+                          <a:spcPct val="80000"/>
+                        </a:lnSpc>
+                        <a:spcBef>
+                          <a:spcPts val="0"/>
+                        </a:spcBef>
+                        <a:spcAft>
+                          <a:spcPts val="0"/>
+                        </a:spcAft>
+                        <a:buNone/>
+                      </a:pPr>
+                      <a:r>
+                        <a:rPr lang="en" sz="2100"/>
+                        <a:t>146</a:t>
+                      </a:r>
+                      <a:endParaRPr sz="2100"/>
+                    </a:p>
+                  </a:txBody>
+                  <a:tcPr marT="91425" marB="91425" marR="91425" marL="91425" anchor="ctr">
+                    <a:lnL cap="flat" cmpd="sng" w="19050">
+                      <a:solidFill>
+                        <a:schemeClr val="dk1"/>
+                      </a:solidFill>
+                      <a:prstDash val="solid"/>
+                      <a:round/>
+                      <a:headEnd len="sm" w="sm" type="none"/>
+                      <a:tailEnd len="sm" w="sm" type="none"/>
+                    </a:lnL>
+                    <a:lnR cap="flat" cmpd="sng" w="19050">
+                      <a:solidFill>
+                        <a:schemeClr val="dk1"/>
+                      </a:solidFill>
+                      <a:prstDash val="solid"/>
+                      <a:round/>
+                      <a:headEnd len="sm" w="sm" type="none"/>
+                      <a:tailEnd len="sm" w="sm" type="none"/>
+                    </a:lnR>
+                    <a:lnT cap="flat" cmpd="sng" w="19050">
+                      <a:solidFill>
+                        <a:schemeClr val="dk1"/>
+                      </a:solidFill>
+                      <a:prstDash val="solid"/>
+                      <a:round/>
+                      <a:headEnd len="sm" w="sm" type="none"/>
+                      <a:tailEnd len="sm" w="sm" type="none"/>
+                    </a:lnT>
+                    <a:lnB cap="flat" cmpd="sng" w="19050">
+                      <a:solidFill>
+                        <a:schemeClr val="dk1"/>
+                      </a:solidFill>
+                      <a:prstDash val="solid"/>
+                      <a:round/>
+                      <a:headEnd len="sm" w="sm" type="none"/>
+                      <a:tailEnd len="sm" w="sm" type="none"/>
+                    </a:lnB>
+                    <a:solidFill>
                       <a:srgbClr val="7FB7F8"/>
                     </a:solidFill>
+                  </a:tcPr>
+                </a:tc>
+                <a:tc>
+                  <a:txBody>
+                    <a:bodyPr/>
+                    <a:lstStyle/>
+                    <a:p>
+                      <a:pPr indent="0" lvl="0" marL="0" marR="0" rtl="0" algn="r">
+                        <a:lnSpc>
+                          <a:spcPct val="80000"/>
+                        </a:lnSpc>
+                        <a:spcBef>
+                          <a:spcPts val="0"/>
+                        </a:spcBef>
+                        <a:spcAft>
+                          <a:spcPts val="0"/>
+                        </a:spcAft>
+                        <a:buNone/>
+                      </a:pPr>
+                      <a:r>
+                        <a:rPr lang="en" sz="2100"/>
+                        <a:t>65</a:t>
+                      </a:r>
+                      <a:endParaRPr sz="2100"/>
+                    </a:p>
+                  </a:txBody>
+                  <a:tcPr marT="91425" marB="91425" marR="91425" marL="91425" anchor="ctr">
+                    <a:lnL cap="flat" cmpd="sng" w="19050">
+                      <a:solidFill>
+                        <a:schemeClr val="dk1"/>
+                      </a:solidFill>
+                      <a:prstDash val="solid"/>
+                      <a:round/>
+                      <a:headEnd len="sm" w="sm" type="none"/>
+                      <a:tailEnd len="sm" w="sm" type="none"/>
+                    </a:lnL>
+                    <a:lnR cap="flat" cmpd="sng" w="19050">
+                      <a:solidFill>
+                        <a:schemeClr val="dk1">
+                          <a:alpha val="0"/>
+                        </a:schemeClr>
+                      </a:solidFill>
+                      <a:prstDash val="solid"/>
+                      <a:round/>
+                      <a:headEnd len="sm" w="sm" type="none"/>
+                      <a:tailEnd len="sm" w="sm" type="none"/>
+                    </a:lnR>
+                    <a:lnT cap="flat" cmpd="sng" w="19050">
+                      <a:solidFill>
+                        <a:schemeClr val="dk1"/>
+                      </a:solidFill>
+                      <a:prstDash val="solid"/>
+                      <a:round/>
+                      <a:headEnd len="sm" w="sm" type="none"/>
+                      <a:tailEnd len="sm" w="sm" type="none"/>
+                    </a:lnT>
+                    <a:lnB cap="flat" cmpd="sng" w="19050">
+                      <a:solidFill>
+                        <a:schemeClr val="dk1"/>
+                      </a:solidFill>
+                      <a:prstDash val="solid"/>
+                      <a:round/>
+                      <a:headEnd len="sm" w="sm" type="none"/>
+                      <a:tailEnd len="sm" w="sm" type="none"/>
+                    </a:lnB>
                   </a:tcPr>
                 </a:tc>
               </a:tr>
@@ -9424,7 +10445,7 @@
       </p:graphicFrame>
       <p:pic>
         <p:nvPicPr>
-          <p:cNvPr id="72" name="Google Shape;72;p13"/>
+          <p:cNvPr id="71" name="Google Shape;71;p13"/>
           <p:cNvPicPr preferRelativeResize="0"/>
           <p:nvPr/>
         </p:nvPicPr>
@@ -9452,14 +10473,14 @@
       </p:pic>
       <p:sp>
         <p:nvSpPr>
-          <p:cNvPr id="73" name="Google Shape;73;p13"/>
+          <p:cNvPr id="72" name="Google Shape;72;p13"/>
           <p:cNvSpPr txBox="1"/>
           <p:nvPr/>
         </p:nvSpPr>
         <p:spPr>
           <a:xfrm>
-            <a:off x="12139175" y="3231875"/>
-            <a:ext cx="15078300" cy="567600"/>
+            <a:off x="11688998" y="3231875"/>
+            <a:ext cx="15528000" cy="567600"/>
           </a:xfrm>
           <a:prstGeom prst="rect">
             <a:avLst/>
@@ -9510,14 +10531,14 @@
       </p:sp>
       <p:sp>
         <p:nvSpPr>
-          <p:cNvPr id="74" name="Google Shape;74;p13"/>
+          <p:cNvPr id="73" name="Google Shape;73;p13"/>
           <p:cNvSpPr txBox="1"/>
           <p:nvPr/>
         </p:nvSpPr>
         <p:spPr>
           <a:xfrm>
-            <a:off x="12298175" y="3729550"/>
-            <a:ext cx="14771700" cy="914100"/>
+            <a:off x="11852741" y="3643204"/>
+            <a:ext cx="15212400" cy="914100"/>
           </a:xfrm>
           <a:prstGeom prst="rect">
             <a:avLst/>
@@ -9624,14 +10645,14 @@
       </p:sp>
       <p:sp>
         <p:nvSpPr>
-          <p:cNvPr id="75" name="Google Shape;75;p13"/>
+          <p:cNvPr id="74" name="Google Shape;74;p13"/>
           <p:cNvSpPr/>
           <p:nvPr/>
         </p:nvSpPr>
         <p:spPr>
           <a:xfrm>
-            <a:off x="12110975" y="11339075"/>
-            <a:ext cx="15117300" cy="7579500"/>
+            <a:off x="11645075" y="14893375"/>
+            <a:ext cx="15673200" cy="4253700"/>
           </a:xfrm>
           <a:prstGeom prst="roundRect">
             <a:avLst>
@@ -9675,14 +10696,14 @@
       </p:sp>
       <p:sp>
         <p:nvSpPr>
-          <p:cNvPr id="76" name="Google Shape;76;p13"/>
+          <p:cNvPr id="75" name="Google Shape;75;p13"/>
           <p:cNvSpPr txBox="1"/>
           <p:nvPr/>
         </p:nvSpPr>
         <p:spPr>
           <a:xfrm>
-            <a:off x="12149825" y="11339063"/>
-            <a:ext cx="15078300" cy="621000"/>
+            <a:off x="11647100" y="14893375"/>
+            <a:ext cx="15638100" cy="621000"/>
           </a:xfrm>
           <a:prstGeom prst="rect">
             <a:avLst/>
@@ -9733,14 +10754,14 @@
       </p:sp>
       <p:sp>
         <p:nvSpPr>
-          <p:cNvPr id="77" name="Google Shape;77;p13"/>
+          <p:cNvPr id="76" name="Google Shape;76;p13"/>
           <p:cNvSpPr txBox="1"/>
           <p:nvPr/>
         </p:nvSpPr>
         <p:spPr>
           <a:xfrm>
-            <a:off x="12302913" y="7664400"/>
-            <a:ext cx="14281800" cy="437700"/>
+            <a:off x="11852752" y="8064774"/>
+            <a:ext cx="14707800" cy="437700"/>
           </a:xfrm>
           <a:prstGeom prst="rect">
             <a:avLst/>
@@ -9787,7 +10808,7 @@
                 <a:cs typeface="Times New Roman"/>
                 <a:sym typeface="Times New Roman"/>
               </a:rPr>
-              <a:t>Check the assumptions for the best model</a:t>
+              <a:t>Check the assumptions for the best model, which is the AIC interaction model with outliers removed</a:t>
             </a:r>
             <a:endParaRPr sz="2400">
               <a:solidFill>
@@ -9803,14 +10824,14 @@
       </p:sp>
       <p:sp>
         <p:nvSpPr>
-          <p:cNvPr id="78" name="Google Shape;78;p13"/>
+          <p:cNvPr id="77" name="Google Shape;77;p13"/>
           <p:cNvSpPr txBox="1"/>
           <p:nvPr/>
         </p:nvSpPr>
         <p:spPr>
           <a:xfrm>
-            <a:off x="12303125" y="11747913"/>
-            <a:ext cx="14771700" cy="996900"/>
+            <a:off x="11647100" y="15301825"/>
+            <a:ext cx="15638100" cy="467100"/>
           </a:xfrm>
           <a:prstGeom prst="rect">
             <a:avLst/>
@@ -9845,7 +10866,7 @@
                 <a:cs typeface="Times New Roman"/>
                 <a:sym typeface="Times New Roman"/>
               </a:rPr>
-              <a:t>Based on the observations, the linear model appears to be the best model for predicting the popularity of a station, which I have defined as the total number of trips that started and ended at that station.</a:t>
+              <a:t>Based on the observations, the interactive model appears to be the best model for predicting the popularity of a station.</a:t>
             </a:r>
             <a:endParaRPr sz="2400">
               <a:solidFill>
@@ -9861,7 +10882,7 @@
       </p:sp>
       <p:pic>
         <p:nvPicPr>
-          <p:cNvPr id="79" name="Google Shape;79;p13"/>
+          <p:cNvPr id="78" name="Google Shape;78;p13"/>
           <p:cNvPicPr preferRelativeResize="0"/>
           <p:nvPr/>
         </p:nvPicPr>
@@ -9875,8 +10896,8 @@
         </p:blipFill>
         <p:spPr>
           <a:xfrm>
-            <a:off x="403950" y="16241638"/>
-            <a:ext cx="11505499" cy="4229125"/>
+            <a:off x="231663" y="16558901"/>
+            <a:ext cx="11145775" cy="4096888"/>
           </a:xfrm>
           <a:prstGeom prst="rect">
             <a:avLst/>
@@ -9889,14 +10910,14 @@
       </p:pic>
       <p:sp>
         <p:nvSpPr>
-          <p:cNvPr id="80" name="Google Shape;80;p13"/>
+          <p:cNvPr id="79" name="Google Shape;79;p13"/>
           <p:cNvSpPr txBox="1"/>
           <p:nvPr/>
         </p:nvSpPr>
         <p:spPr>
           <a:xfrm>
-            <a:off x="21332688" y="8029375"/>
-            <a:ext cx="5722800" cy="3124800"/>
+            <a:off x="19671200" y="8556425"/>
+            <a:ext cx="7545900" cy="3729600"/>
           </a:xfrm>
           <a:prstGeom prst="rect">
             <a:avLst/>
@@ -9943,7 +10964,7 @@
                 <a:cs typeface="Times New Roman"/>
                 <a:sym typeface="Times New Roman"/>
               </a:rPr>
-              <a:t>The larger cluster observed in the plot corresponds to a higher concentration of observations in Boston, Cambridge, and Somerville. This grouping is expected, given the greater number of data points from these municipalities. Despite this, the residuals appear to be evenly distributed around the zero line across the range of fitted values, suggesting that the model satisfies the constant variance assumption.</a:t>
+              <a:t>This is a plot of the AIC interaction model with outliers removed and transformed using the Box-Cox method. This transformation is better as the vertical spread is more stable compared to the one before transformation. The larger cluster observed in the plot corresponds to a higher concentration of observations in Boston, Cambridge, and Somerville. This grouping is expected, given the greater number of data points from these municipalities. Despite this, the residuals appear to be evenly distributed around the zero line across the range of fitted values, suggesting that the model satisfies the constant variance assumption.</a:t>
             </a:r>
             <a:endParaRPr b="1" i="1" sz="2100">
               <a:solidFill>
@@ -9959,12 +10980,12 @@
       </p:sp>
       <p:graphicFrame>
         <p:nvGraphicFramePr>
-          <p:cNvPr id="81" name="Google Shape;81;p13"/>
+          <p:cNvPr id="80" name="Google Shape;80;p13"/>
           <p:cNvGraphicFramePr/>
           <p:nvPr/>
         </p:nvGraphicFramePr>
         <p:xfrm>
-          <a:off x="12303125" y="12621563"/>
+          <a:off x="11756338" y="15860838"/>
           <a:ext cx="3000000" cy="3000000"/>
         </p:xfrm>
         <a:graphic>
@@ -9972,17 +10993,17 @@
             <a:tbl>
               <a:tblPr>
                 <a:noFill/>
-                <a:tableStyleId>{139D3AC5-8908-4B74-92D6-4A814344356D}</a:tableStyleId>
+                <a:tableStyleId>{2240061D-20DE-4661-B9E2-4C5409DDBD90}</a:tableStyleId>
               </a:tblPr>
               <a:tblGrid>
-                <a:gridCol w="3103400"/>
-                <a:gridCol w="1538675"/>
-                <a:gridCol w="2775150"/>
-                <a:gridCol w="2178625"/>
-                <a:gridCol w="3350200"/>
-                <a:gridCol w="1825650"/>
+                <a:gridCol w="2974575"/>
+                <a:gridCol w="1773300"/>
+                <a:gridCol w="3874850"/>
+                <a:gridCol w="1833125"/>
+                <a:gridCol w="3301100"/>
+                <a:gridCol w="1693725"/>
               </a:tblGrid>
-              <a:tr h="381000">
+              <a:tr h="339125">
                 <a:tc>
                   <a:txBody>
                     <a:bodyPr/>
@@ -10001,7 +11022,7 @@
                         <a:buNone/>
                       </a:pPr>
                       <a:r>
-                        <a:rPr b="1" lang="en" sz="2000">
+                        <a:rPr b="1" lang="en" sz="2100">
                           <a:solidFill>
                             <a:schemeClr val="dk1"/>
                           </a:solidFill>
@@ -10012,7 +11033,7 @@
                         </a:rPr>
                         <a:t>Predictor</a:t>
                       </a:r>
-                      <a:endParaRPr b="1" sz="2000">
+                      <a:endParaRPr b="1" sz="2100">
                         <a:solidFill>
                           <a:schemeClr val="dk1"/>
                         </a:solidFill>
@@ -10085,7 +11106,7 @@
                         <a:buNone/>
                       </a:pPr>
                       <a:r>
-                        <a:rPr b="1" lang="en" sz="2000">
+                        <a:rPr b="1" lang="en" sz="2100">
                           <a:solidFill>
                             <a:schemeClr val="dk1"/>
                           </a:solidFill>
@@ -10096,7 +11117,7 @@
                         </a:rPr>
                         <a:t>Coefficient</a:t>
                       </a:r>
-                      <a:endParaRPr b="1" sz="2000">
+                      <a:endParaRPr b="1" sz="2100">
                         <a:solidFill>
                           <a:schemeClr val="dk1"/>
                         </a:solidFill>
@@ -10167,7 +11188,7 @@
                         <a:buNone/>
                       </a:pPr>
                       <a:r>
-                        <a:rPr b="1" lang="en" sz="2000">
+                        <a:rPr b="1" lang="en" sz="2100">
                           <a:solidFill>
                             <a:schemeClr val="dk1"/>
                           </a:solidFill>
@@ -10178,7 +11199,7 @@
                         </a:rPr>
                         <a:t>Predictor</a:t>
                       </a:r>
-                      <a:endParaRPr b="1" sz="2000">
+                      <a:endParaRPr b="1" sz="2100">
                         <a:solidFill>
                           <a:schemeClr val="dk1"/>
                         </a:solidFill>
@@ -10249,7 +11270,7 @@
                         <a:buNone/>
                       </a:pPr>
                       <a:r>
-                        <a:rPr b="1" lang="en" sz="2000">
+                        <a:rPr b="1" lang="en" sz="2100">
                           <a:solidFill>
                             <a:schemeClr val="dk1"/>
                           </a:solidFill>
@@ -10260,7 +11281,7 @@
                         </a:rPr>
                         <a:t>Coefficient</a:t>
                       </a:r>
-                      <a:endParaRPr b="1" sz="2000">
+                      <a:endParaRPr b="1" sz="2100">
                         <a:solidFill>
                           <a:schemeClr val="dk1"/>
                         </a:solidFill>
@@ -10331,7 +11352,7 @@
                         <a:buNone/>
                       </a:pPr>
                       <a:r>
-                        <a:rPr b="1" lang="en" sz="2000">
+                        <a:rPr b="1" lang="en" sz="2100">
                           <a:solidFill>
                             <a:schemeClr val="dk1"/>
                           </a:solidFill>
@@ -10342,7 +11363,7 @@
                         </a:rPr>
                         <a:t>Predictor</a:t>
                       </a:r>
-                      <a:endParaRPr b="1" sz="2000">
+                      <a:endParaRPr b="1" sz="2100">
                         <a:solidFill>
                           <a:schemeClr val="dk1"/>
                         </a:solidFill>
@@ -10413,7 +11434,7 @@
                         <a:buNone/>
                       </a:pPr>
                       <a:r>
-                        <a:rPr b="1" lang="en" sz="2000">
+                        <a:rPr b="1" lang="en" sz="2100">
                           <a:solidFill>
                             <a:schemeClr val="dk1"/>
                           </a:solidFill>
@@ -10424,7 +11445,7 @@
                         </a:rPr>
                         <a:t>Coefficient</a:t>
                       </a:r>
-                      <a:endParaRPr b="1" sz="2000">
+                      <a:endParaRPr b="1" sz="2100">
                         <a:solidFill>
                           <a:schemeClr val="dk1"/>
                         </a:solidFill>
@@ -10480,7 +11501,7 @@
                   </a:tcPr>
                 </a:tc>
               </a:tr>
-              <a:tr h="381000">
+              <a:tr h="339125">
                 <a:tc>
                   <a:txBody>
                     <a:bodyPr/>
@@ -10499,7 +11520,7 @@
                         <a:buNone/>
                       </a:pPr>
                       <a:r>
-                        <a:rPr lang="en" sz="2000">
+                        <a:rPr lang="en" sz="2100">
                           <a:solidFill>
                             <a:schemeClr val="dk1"/>
                           </a:solidFill>
@@ -10510,7 +11531,7 @@
                         </a:rPr>
                         <a:t>Intercept</a:t>
                       </a:r>
-                      <a:endParaRPr sz="2000">
+                      <a:endParaRPr sz="2100">
                         <a:solidFill>
                           <a:schemeClr val="dk1"/>
                         </a:solidFill>
@@ -10527,6 +11548,649 @@
                         <a:schemeClr val="dk1">
                           <a:alpha val="0"/>
                         </a:schemeClr>
+                      </a:solidFill>
+                      <a:prstDash val="solid"/>
+                      <a:round/>
+                      <a:headEnd len="sm" w="sm" type="none"/>
+                      <a:tailEnd len="sm" w="sm" type="none"/>
+                    </a:lnL>
+                    <a:lnR cap="flat" cmpd="sng" w="19050">
+                      <a:solidFill>
+                        <a:schemeClr val="dk1"/>
+                      </a:solidFill>
+                      <a:prstDash val="solid"/>
+                      <a:round/>
+                      <a:headEnd len="sm" w="sm" type="none"/>
+                      <a:tailEnd len="sm" w="sm" type="none"/>
+                    </a:lnR>
+                    <a:lnT cap="flat" cmpd="sng" w="19050">
+                      <a:solidFill>
+                        <a:schemeClr val="dk1"/>
+                      </a:solidFill>
+                      <a:prstDash val="solid"/>
+                      <a:round/>
+                      <a:headEnd len="sm" w="sm" type="none"/>
+                      <a:tailEnd len="sm" w="sm" type="none"/>
+                    </a:lnT>
+                    <a:lnB cap="flat" cmpd="sng" w="19050">
+                      <a:solidFill>
+                        <a:schemeClr val="dk1"/>
+                      </a:solidFill>
+                      <a:prstDash val="solid"/>
+                      <a:round/>
+                      <a:headEnd len="sm" w="sm" type="none"/>
+                      <a:tailEnd len="sm" w="sm" type="none"/>
+                    </a:lnB>
+                    <a:solidFill>
+                      <a:srgbClr val="CBDFFF"/>
+                    </a:solidFill>
+                  </a:tcPr>
+                </a:tc>
+                <a:tc>
+                  <a:txBody>
+                    <a:bodyPr/>
+                    <a:lstStyle/>
+                    <a:p>
+                      <a:pPr indent="0" lvl="0" marL="0" rtl="0" algn="l">
+                        <a:lnSpc>
+                          <a:spcPct val="80000"/>
+                        </a:lnSpc>
+                        <a:spcBef>
+                          <a:spcPts val="0"/>
+                        </a:spcBef>
+                        <a:spcAft>
+                          <a:spcPts val="0"/>
+                        </a:spcAft>
+                        <a:buNone/>
+                      </a:pPr>
+                      <a:r>
+                        <a:rPr b="1" lang="en" sz="2100">
+                          <a:solidFill>
+                            <a:schemeClr val="dk1"/>
+                          </a:solidFill>
+                          <a:latin typeface="Times New Roman"/>
+                          <a:ea typeface="Times New Roman"/>
+                          <a:cs typeface="Times New Roman"/>
+                          <a:sym typeface="Times New Roman"/>
+                        </a:rPr>
+                        <a:t>5628000</a:t>
+                      </a:r>
+                      <a:endParaRPr b="1" sz="2100">
+                        <a:solidFill>
+                          <a:schemeClr val="dk1"/>
+                        </a:solidFill>
+                        <a:latin typeface="Times New Roman"/>
+                        <a:ea typeface="Times New Roman"/>
+                        <a:cs typeface="Times New Roman"/>
+                        <a:sym typeface="Times New Roman"/>
+                      </a:endParaRPr>
+                    </a:p>
+                  </a:txBody>
+                  <a:tcPr marT="91425" marB="91425" marR="91425" marL="91425" anchor="ctr">
+                    <a:lnL cap="flat" cmpd="sng" w="19050">
+                      <a:solidFill>
+                        <a:schemeClr val="dk1"/>
+                      </a:solidFill>
+                      <a:prstDash val="solid"/>
+                      <a:round/>
+                      <a:headEnd len="sm" w="sm" type="none"/>
+                      <a:tailEnd len="sm" w="sm" type="none"/>
+                    </a:lnL>
+                    <a:lnR cap="flat" cmpd="sng" w="19050">
+                      <a:solidFill>
+                        <a:schemeClr val="dk1"/>
+                      </a:solidFill>
+                      <a:prstDash val="solid"/>
+                      <a:round/>
+                      <a:headEnd len="sm" w="sm" type="none"/>
+                      <a:tailEnd len="sm" w="sm" type="none"/>
+                    </a:lnR>
+                    <a:lnT cap="flat" cmpd="sng" w="19050">
+                      <a:solidFill>
+                        <a:schemeClr val="dk1"/>
+                      </a:solidFill>
+                      <a:prstDash val="solid"/>
+                      <a:round/>
+                      <a:headEnd len="sm" w="sm" type="none"/>
+                      <a:tailEnd len="sm" w="sm" type="none"/>
+                    </a:lnT>
+                    <a:lnB cap="flat" cmpd="sng" w="19050">
+                      <a:solidFill>
+                        <a:schemeClr val="dk1"/>
+                      </a:solidFill>
+                      <a:prstDash val="solid"/>
+                      <a:round/>
+                      <a:headEnd len="sm" w="sm" type="none"/>
+                      <a:tailEnd len="sm" w="sm" type="none"/>
+                    </a:lnB>
+                    <a:solidFill>
+                      <a:srgbClr val="CBDFFF"/>
+                    </a:solidFill>
+                  </a:tcPr>
+                </a:tc>
+                <a:tc>
+                  <a:txBody>
+                    <a:bodyPr/>
+                    <a:lstStyle/>
+                    <a:p>
+                      <a:pPr indent="0" lvl="0" marL="0" rtl="0" algn="l">
+                        <a:spcBef>
+                          <a:spcPts val="0"/>
+                        </a:spcBef>
+                        <a:spcAft>
+                          <a:spcPts val="0"/>
+                        </a:spcAft>
+                        <a:buNone/>
+                      </a:pPr>
+                      <a:r>
+                        <a:rPr lang="en" sz="2100">
+                          <a:solidFill>
+                            <a:schemeClr val="dk1"/>
+                          </a:solidFill>
+                          <a:latin typeface="Times New Roman"/>
+                          <a:ea typeface="Times New Roman"/>
+                          <a:cs typeface="Times New Roman"/>
+                          <a:sym typeface="Times New Roman"/>
+                        </a:rPr>
+                        <a:t>n_institutions_1km:n_mbta_1km   </a:t>
+                      </a:r>
+                      <a:endParaRPr sz="2100">
+                        <a:latin typeface="Times New Roman"/>
+                        <a:ea typeface="Times New Roman"/>
+                        <a:cs typeface="Times New Roman"/>
+                        <a:sym typeface="Times New Roman"/>
+                      </a:endParaRPr>
+                    </a:p>
+                  </a:txBody>
+                  <a:tcPr marT="91425" marB="91425" marR="91425" marL="91425" anchor="ctr">
+                    <a:lnL cap="flat" cmpd="sng" w="19050">
+                      <a:solidFill>
+                        <a:schemeClr val="dk1"/>
+                      </a:solidFill>
+                      <a:prstDash val="solid"/>
+                      <a:round/>
+                      <a:headEnd len="sm" w="sm" type="none"/>
+                      <a:tailEnd len="sm" w="sm" type="none"/>
+                    </a:lnL>
+                    <a:lnR cap="flat" cmpd="sng" w="19050">
+                      <a:solidFill>
+                        <a:schemeClr val="dk1"/>
+                      </a:solidFill>
+                      <a:prstDash val="solid"/>
+                      <a:round/>
+                      <a:headEnd len="sm" w="sm" type="none"/>
+                      <a:tailEnd len="sm" w="sm" type="none"/>
+                    </a:lnR>
+                    <a:lnT cap="flat" cmpd="sng" w="19050">
+                      <a:solidFill>
+                        <a:schemeClr val="dk1"/>
+                      </a:solidFill>
+                      <a:prstDash val="solid"/>
+                      <a:round/>
+                      <a:headEnd len="sm" w="sm" type="none"/>
+                      <a:tailEnd len="sm" w="sm" type="none"/>
+                    </a:lnT>
+                    <a:lnB cap="flat" cmpd="sng" w="19050">
+                      <a:solidFill>
+                        <a:schemeClr val="dk1"/>
+                      </a:solidFill>
+                      <a:prstDash val="solid"/>
+                      <a:round/>
+                      <a:headEnd len="sm" w="sm" type="none"/>
+                      <a:tailEnd len="sm" w="sm" type="none"/>
+                    </a:lnB>
+                    <a:solidFill>
+                      <a:srgbClr val="CBDFFF"/>
+                    </a:solidFill>
+                  </a:tcPr>
+                </a:tc>
+                <a:tc>
+                  <a:txBody>
+                    <a:bodyPr/>
+                    <a:lstStyle/>
+                    <a:p>
+                      <a:pPr indent="0" lvl="0" marL="0" rtl="0" algn="l">
+                        <a:spcBef>
+                          <a:spcPts val="0"/>
+                        </a:spcBef>
+                        <a:spcAft>
+                          <a:spcPts val="0"/>
+                        </a:spcAft>
+                        <a:buNone/>
+                      </a:pPr>
+                      <a:r>
+                        <a:rPr b="1" lang="en" sz="2100">
+                          <a:solidFill>
+                            <a:schemeClr val="dk1"/>
+                          </a:solidFill>
+                          <a:latin typeface="Times New Roman"/>
+                          <a:ea typeface="Times New Roman"/>
+                          <a:cs typeface="Times New Roman"/>
+                          <a:sym typeface="Times New Roman"/>
+                        </a:rPr>
+                        <a:t>0.1646</a:t>
+                      </a:r>
+                      <a:endParaRPr b="1" sz="2100">
+                        <a:latin typeface="Times New Roman"/>
+                        <a:ea typeface="Times New Roman"/>
+                        <a:cs typeface="Times New Roman"/>
+                        <a:sym typeface="Times New Roman"/>
+                      </a:endParaRPr>
+                    </a:p>
+                  </a:txBody>
+                  <a:tcPr marT="91425" marB="91425" marR="91425" marL="91425" anchor="ctr">
+                    <a:lnL cap="flat" cmpd="sng" w="19050">
+                      <a:solidFill>
+                        <a:schemeClr val="dk1"/>
+                      </a:solidFill>
+                      <a:prstDash val="solid"/>
+                      <a:round/>
+                      <a:headEnd len="sm" w="sm" type="none"/>
+                      <a:tailEnd len="sm" w="sm" type="none"/>
+                    </a:lnL>
+                    <a:lnR cap="flat" cmpd="sng" w="19050">
+                      <a:solidFill>
+                        <a:schemeClr val="dk1"/>
+                      </a:solidFill>
+                      <a:prstDash val="solid"/>
+                      <a:round/>
+                      <a:headEnd len="sm" w="sm" type="none"/>
+                      <a:tailEnd len="sm" w="sm" type="none"/>
+                    </a:lnR>
+                    <a:lnT cap="flat" cmpd="sng" w="19050">
+                      <a:solidFill>
+                        <a:schemeClr val="dk1"/>
+                      </a:solidFill>
+                      <a:prstDash val="solid"/>
+                      <a:round/>
+                      <a:headEnd len="sm" w="sm" type="none"/>
+                      <a:tailEnd len="sm" w="sm" type="none"/>
+                    </a:lnT>
+                    <a:lnB cap="flat" cmpd="sng" w="19050">
+                      <a:solidFill>
+                        <a:schemeClr val="dk1"/>
+                      </a:solidFill>
+                      <a:prstDash val="solid"/>
+                      <a:round/>
+                      <a:headEnd len="sm" w="sm" type="none"/>
+                      <a:tailEnd len="sm" w="sm" type="none"/>
+                    </a:lnB>
+                    <a:solidFill>
+                      <a:srgbClr val="CBDFFF"/>
+                    </a:solidFill>
+                  </a:tcPr>
+                </a:tc>
+                <a:tc>
+                  <a:txBody>
+                    <a:bodyPr/>
+                    <a:lstStyle/>
+                    <a:p>
+                      <a:pPr indent="0" lvl="0" marL="0" rtl="0" algn="l">
+                        <a:spcBef>
+                          <a:spcPts val="0"/>
+                        </a:spcBef>
+                        <a:spcAft>
+                          <a:spcPts val="0"/>
+                        </a:spcAft>
+                        <a:buNone/>
+                      </a:pPr>
+                      <a:r>
+                        <a:rPr lang="en" sz="2100">
+                          <a:solidFill>
+                            <a:schemeClr val="dk1"/>
+                          </a:solidFill>
+                          <a:latin typeface="Times New Roman"/>
+                          <a:ea typeface="Times New Roman"/>
+                          <a:cs typeface="Times New Roman"/>
+                          <a:sym typeface="Times New Roman"/>
+                        </a:rPr>
+                        <a:t>n_institutions_1km:Long       </a:t>
+                      </a:r>
+                      <a:endParaRPr sz="2100">
+                        <a:latin typeface="Times New Roman"/>
+                        <a:ea typeface="Times New Roman"/>
+                        <a:cs typeface="Times New Roman"/>
+                        <a:sym typeface="Times New Roman"/>
+                      </a:endParaRPr>
+                    </a:p>
+                  </a:txBody>
+                  <a:tcPr marT="91425" marB="91425" marR="91425" marL="91425" anchor="ctr">
+                    <a:lnL cap="flat" cmpd="sng" w="19050">
+                      <a:solidFill>
+                        <a:schemeClr val="dk1"/>
+                      </a:solidFill>
+                      <a:prstDash val="solid"/>
+                      <a:round/>
+                      <a:headEnd len="sm" w="sm" type="none"/>
+                      <a:tailEnd len="sm" w="sm" type="none"/>
+                    </a:lnL>
+                    <a:lnR cap="flat" cmpd="sng" w="19050">
+                      <a:solidFill>
+                        <a:schemeClr val="dk1"/>
+                      </a:solidFill>
+                      <a:prstDash val="solid"/>
+                      <a:round/>
+                      <a:headEnd len="sm" w="sm" type="none"/>
+                      <a:tailEnd len="sm" w="sm" type="none"/>
+                    </a:lnR>
+                    <a:lnT cap="flat" cmpd="sng" w="19050">
+                      <a:solidFill>
+                        <a:schemeClr val="dk1"/>
+                      </a:solidFill>
+                      <a:prstDash val="solid"/>
+                      <a:round/>
+                      <a:headEnd len="sm" w="sm" type="none"/>
+                      <a:tailEnd len="sm" w="sm" type="none"/>
+                    </a:lnT>
+                    <a:lnB cap="flat" cmpd="sng" w="19050">
+                      <a:solidFill>
+                        <a:schemeClr val="dk1"/>
+                      </a:solidFill>
+                      <a:prstDash val="solid"/>
+                      <a:round/>
+                      <a:headEnd len="sm" w="sm" type="none"/>
+                      <a:tailEnd len="sm" w="sm" type="none"/>
+                    </a:lnB>
+                    <a:solidFill>
+                      <a:srgbClr val="D4D8FF"/>
+                    </a:solidFill>
+                  </a:tcPr>
+                </a:tc>
+                <a:tc>
+                  <a:txBody>
+                    <a:bodyPr/>
+                    <a:lstStyle/>
+                    <a:p>
+                      <a:pPr indent="0" lvl="0" marL="0" rtl="0" algn="l">
+                        <a:spcBef>
+                          <a:spcPts val="0"/>
+                        </a:spcBef>
+                        <a:spcAft>
+                          <a:spcPts val="0"/>
+                        </a:spcAft>
+                        <a:buNone/>
+                      </a:pPr>
+                      <a:r>
+                        <a:rPr b="1" lang="en" sz="2100">
+                          <a:solidFill>
+                            <a:schemeClr val="dk1"/>
+                          </a:solidFill>
+                          <a:latin typeface="Times New Roman"/>
+                          <a:ea typeface="Times New Roman"/>
+                          <a:cs typeface="Times New Roman"/>
+                          <a:sym typeface="Times New Roman"/>
+                        </a:rPr>
+                        <a:t>-54.46</a:t>
+                      </a:r>
+                      <a:endParaRPr b="1" sz="2100">
+                        <a:latin typeface="Times New Roman"/>
+                        <a:ea typeface="Times New Roman"/>
+                        <a:cs typeface="Times New Roman"/>
+                        <a:sym typeface="Times New Roman"/>
+                      </a:endParaRPr>
+                    </a:p>
+                  </a:txBody>
+                  <a:tcPr marT="91425" marB="91425" marR="91425" marL="91425" anchor="ctr">
+                    <a:lnL cap="flat" cmpd="sng" w="19050">
+                      <a:solidFill>
+                        <a:schemeClr val="dk1"/>
+                      </a:solidFill>
+                      <a:prstDash val="solid"/>
+                      <a:round/>
+                      <a:headEnd len="sm" w="sm" type="none"/>
+                      <a:tailEnd len="sm" w="sm" type="none"/>
+                    </a:lnL>
+                    <a:lnR cap="flat" cmpd="sng" w="19050">
+                      <a:solidFill>
+                        <a:schemeClr val="dk1">
+                          <a:alpha val="0"/>
+                        </a:schemeClr>
+                      </a:solidFill>
+                      <a:prstDash val="solid"/>
+                      <a:round/>
+                      <a:headEnd len="sm" w="sm" type="none"/>
+                      <a:tailEnd len="sm" w="sm" type="none"/>
+                    </a:lnR>
+                    <a:lnT cap="flat" cmpd="sng" w="19050">
+                      <a:solidFill>
+                        <a:schemeClr val="dk1"/>
+                      </a:solidFill>
+                      <a:prstDash val="solid"/>
+                      <a:round/>
+                      <a:headEnd len="sm" w="sm" type="none"/>
+                      <a:tailEnd len="sm" w="sm" type="none"/>
+                    </a:lnT>
+                    <a:lnB cap="flat" cmpd="sng" w="19050">
+                      <a:solidFill>
+                        <a:schemeClr val="dk1"/>
+                      </a:solidFill>
+                      <a:prstDash val="solid"/>
+                      <a:round/>
+                      <a:headEnd len="sm" w="sm" type="none"/>
+                      <a:tailEnd len="sm" w="sm" type="none"/>
+                    </a:lnB>
+                    <a:solidFill>
+                      <a:srgbClr val="D4D8FF"/>
+                    </a:solidFill>
+                  </a:tcPr>
+                </a:tc>
+              </a:tr>
+              <a:tr h="339125">
+                <a:tc>
+                  <a:txBody>
+                    <a:bodyPr/>
+                    <a:lstStyle/>
+                    <a:p>
+                      <a:pPr indent="0" lvl="0" marL="0" rtl="0" algn="l">
+                        <a:lnSpc>
+                          <a:spcPct val="80000"/>
+                        </a:lnSpc>
+                        <a:spcBef>
+                          <a:spcPts val="0"/>
+                        </a:spcBef>
+                        <a:spcAft>
+                          <a:spcPts val="0"/>
+                        </a:spcAft>
+                        <a:buClr>
+                          <a:schemeClr val="dk1"/>
+                        </a:buClr>
+                        <a:buSzPts val="1100"/>
+                        <a:buFont typeface="Arial"/>
+                        <a:buNone/>
+                      </a:pPr>
+                      <a:r>
+                        <a:rPr lang="en" sz="2100">
+                          <a:solidFill>
+                            <a:schemeClr val="dk1"/>
+                          </a:solidFill>
+                          <a:latin typeface="Times New Roman"/>
+                          <a:ea typeface="Times New Roman"/>
+                          <a:cs typeface="Times New Roman"/>
+                          <a:sym typeface="Times New Roman"/>
+                        </a:rPr>
+                        <a:t>Longitude</a:t>
+                      </a:r>
+                      <a:endParaRPr sz="2100">
+                        <a:solidFill>
+                          <a:schemeClr val="dk1"/>
+                        </a:solidFill>
+                        <a:latin typeface="Times New Roman"/>
+                        <a:ea typeface="Times New Roman"/>
+                        <a:cs typeface="Times New Roman"/>
+                        <a:sym typeface="Times New Roman"/>
+                      </a:endParaRPr>
+                    </a:p>
+                  </a:txBody>
+                  <a:tcPr marT="91425" marB="91425" marR="91425" marL="91425" anchor="ctr">
+                    <a:lnL cap="flat" cmpd="sng" w="19050">
+                      <a:solidFill>
+                        <a:schemeClr val="dk1">
+                          <a:alpha val="0"/>
+                        </a:schemeClr>
+                      </a:solidFill>
+                      <a:prstDash val="solid"/>
+                      <a:round/>
+                      <a:headEnd len="sm" w="sm" type="none"/>
+                      <a:tailEnd len="sm" w="sm" type="none"/>
+                    </a:lnL>
+                    <a:lnR cap="flat" cmpd="sng" w="19050">
+                      <a:solidFill>
+                        <a:schemeClr val="dk1"/>
+                      </a:solidFill>
+                      <a:prstDash val="solid"/>
+                      <a:round/>
+                      <a:headEnd len="sm" w="sm" type="none"/>
+                      <a:tailEnd len="sm" w="sm" type="none"/>
+                    </a:lnR>
+                    <a:lnT cap="flat" cmpd="sng" w="19050">
+                      <a:solidFill>
+                        <a:schemeClr val="dk1"/>
+                      </a:solidFill>
+                      <a:prstDash val="solid"/>
+                      <a:round/>
+                      <a:headEnd len="sm" w="sm" type="none"/>
+                      <a:tailEnd len="sm" w="sm" type="none"/>
+                    </a:lnT>
+                    <a:lnB cap="flat" cmpd="sng" w="19050">
+                      <a:solidFill>
+                        <a:schemeClr val="dk1"/>
+                      </a:solidFill>
+                      <a:prstDash val="solid"/>
+                      <a:round/>
+                      <a:headEnd len="sm" w="sm" type="none"/>
+                      <a:tailEnd len="sm" w="sm" type="none"/>
+                    </a:lnB>
+                    <a:solidFill>
+                      <a:srgbClr val="CBDFFF"/>
+                    </a:solidFill>
+                  </a:tcPr>
+                </a:tc>
+                <a:tc>
+                  <a:txBody>
+                    <a:bodyPr/>
+                    <a:lstStyle/>
+                    <a:p>
+                      <a:pPr indent="0" lvl="0" marL="0" rtl="0" algn="l">
+                        <a:lnSpc>
+                          <a:spcPct val="80000"/>
+                        </a:lnSpc>
+                        <a:spcBef>
+                          <a:spcPts val="0"/>
+                        </a:spcBef>
+                        <a:spcAft>
+                          <a:spcPts val="0"/>
+                        </a:spcAft>
+                        <a:buNone/>
+                      </a:pPr>
+                      <a:r>
+                        <a:rPr b="1" lang="en" sz="2100">
+                          <a:solidFill>
+                            <a:schemeClr val="dk1"/>
+                          </a:solidFill>
+                          <a:latin typeface="Times New Roman"/>
+                          <a:ea typeface="Times New Roman"/>
+                          <a:cs typeface="Times New Roman"/>
+                          <a:sym typeface="Times New Roman"/>
+                        </a:rPr>
+                        <a:t>79180</a:t>
+                      </a:r>
+                      <a:endParaRPr b="1" sz="2100">
+                        <a:solidFill>
+                          <a:schemeClr val="dk1"/>
+                        </a:solidFill>
+                        <a:latin typeface="Times New Roman"/>
+                        <a:ea typeface="Times New Roman"/>
+                        <a:cs typeface="Times New Roman"/>
+                        <a:sym typeface="Times New Roman"/>
+                      </a:endParaRPr>
+                    </a:p>
+                  </a:txBody>
+                  <a:tcPr marT="91425" marB="91425" marR="91425" marL="91425" anchor="ctr">
+                    <a:lnL cap="flat" cmpd="sng" w="19050">
+                      <a:solidFill>
+                        <a:schemeClr val="dk1"/>
+                      </a:solidFill>
+                      <a:prstDash val="solid"/>
+                      <a:round/>
+                      <a:headEnd len="sm" w="sm" type="none"/>
+                      <a:tailEnd len="sm" w="sm" type="none"/>
+                    </a:lnL>
+                    <a:lnR cap="flat" cmpd="sng" w="19050">
+                      <a:solidFill>
+                        <a:schemeClr val="dk1"/>
+                      </a:solidFill>
+                      <a:prstDash val="solid"/>
+                      <a:round/>
+                      <a:headEnd len="sm" w="sm" type="none"/>
+                      <a:tailEnd len="sm" w="sm" type="none"/>
+                    </a:lnR>
+                    <a:lnT cap="flat" cmpd="sng" w="19050">
+                      <a:solidFill>
+                        <a:schemeClr val="dk1"/>
+                      </a:solidFill>
+                      <a:prstDash val="solid"/>
+                      <a:round/>
+                      <a:headEnd len="sm" w="sm" type="none"/>
+                      <a:tailEnd len="sm" w="sm" type="none"/>
+                    </a:lnT>
+                    <a:lnB cap="flat" cmpd="sng" w="19050">
+                      <a:solidFill>
+                        <a:schemeClr val="dk1"/>
+                      </a:solidFill>
+                      <a:prstDash val="solid"/>
+                      <a:round/>
+                      <a:headEnd len="sm" w="sm" type="none"/>
+                      <a:tailEnd len="sm" w="sm" type="none"/>
+                    </a:lnB>
+                    <a:solidFill>
+                      <a:srgbClr val="CBDFFF"/>
+                    </a:solidFill>
+                  </a:tcPr>
+                </a:tc>
+                <a:tc>
+                  <a:txBody>
+                    <a:bodyPr/>
+                    <a:lstStyle/>
+                    <a:p>
+                      <a:pPr indent="0" lvl="0" marL="0" rtl="0" algn="l">
+                        <a:lnSpc>
+                          <a:spcPct val="80000"/>
+                        </a:lnSpc>
+                        <a:spcBef>
+                          <a:spcPts val="0"/>
+                        </a:spcBef>
+                        <a:spcAft>
+                          <a:spcPts val="0"/>
+                        </a:spcAft>
+                        <a:buNone/>
+                      </a:pPr>
+                      <a:r>
+                        <a:rPr lang="en" sz="2100">
+                          <a:solidFill>
+                            <a:schemeClr val="dk1"/>
+                          </a:solidFill>
+                          <a:latin typeface="Times New Roman"/>
+                          <a:ea typeface="Times New Roman"/>
+                          <a:cs typeface="Times New Roman"/>
+                          <a:sym typeface="Times New Roman"/>
+                        </a:rPr>
+                        <a:t>n_institutions_1km</a:t>
+                      </a:r>
+                      <a:endParaRPr sz="2100">
+                        <a:solidFill>
+                          <a:schemeClr val="dk1"/>
+                        </a:solidFill>
+                        <a:latin typeface="Times New Roman"/>
+                        <a:ea typeface="Times New Roman"/>
+                        <a:cs typeface="Times New Roman"/>
+                        <a:sym typeface="Times New Roman"/>
+                      </a:endParaRPr>
+                    </a:p>
+                  </a:txBody>
+                  <a:tcPr marT="91425" marB="91425" marR="91425" marL="91425" anchor="ctr">
+                    <a:lnL cap="flat" cmpd="sng" w="19050">
+                      <a:solidFill>
+                        <a:schemeClr val="dk1"/>
                       </a:solidFill>
                       <a:prstDash val="solid"/>
                       <a:round/>
@@ -10583,7 +12247,7 @@
                         <a:buNone/>
                       </a:pPr>
                       <a:r>
-                        <a:rPr b="1" lang="en" sz="2000">
+                        <a:rPr b="1" lang="en" sz="2100">
                           <a:solidFill>
                             <a:schemeClr val="dk1"/>
                           </a:solidFill>
@@ -10592,9 +12256,9 @@
                           <a:cs typeface="Times New Roman"/>
                           <a:sym typeface="Times New Roman"/>
                         </a:rPr>
-                        <a:t>-926.9</a:t>
+                        <a:t>-4055</a:t>
                       </a:r>
-                      <a:endParaRPr b="1" sz="2000">
+                      <a:endParaRPr b="1" sz="2100">
                         <a:solidFill>
                           <a:schemeClr val="dk1"/>
                         </a:solidFill>
@@ -10665,7 +12329,7 @@
                         <a:buNone/>
                       </a:pPr>
                       <a:r>
-                        <a:rPr lang="en" sz="2000">
+                        <a:rPr lang="en" sz="2100">
                           <a:solidFill>
                             <a:schemeClr val="dk1"/>
                           </a:solidFill>
@@ -10674,9 +12338,9 @@
                           <a:cs typeface="Times New Roman"/>
                           <a:sym typeface="Times New Roman"/>
                         </a:rPr>
-                        <a:t>Municipality - Revere</a:t>
+                        <a:t>avg_TMIN:avg_TMAX   </a:t>
                       </a:r>
-                      <a:endParaRPr sz="2000">
+                      <a:endParaRPr b="1" sz="2100">
                         <a:solidFill>
                           <a:schemeClr val="dk1"/>
                         </a:solidFill>
@@ -10747,7 +12411,7 @@
                         <a:buNone/>
                       </a:pPr>
                       <a:r>
-                        <a:rPr b="1" lang="en" sz="2000">
+                        <a:rPr b="1" lang="en" sz="2100">
                           <a:solidFill>
                             <a:schemeClr val="dk1"/>
                           </a:solidFill>
@@ -10756,9 +12420,254 @@
                           <a:cs typeface="Times New Roman"/>
                           <a:sym typeface="Times New Roman"/>
                         </a:rPr>
-                        <a:t>-14.25</a:t>
+                        <a:t> -0.09651</a:t>
                       </a:r>
-                      <a:endParaRPr b="1" sz="2000">
+                      <a:endParaRPr b="1" sz="2100">
+                        <a:solidFill>
+                          <a:schemeClr val="dk1"/>
+                        </a:solidFill>
+                        <a:latin typeface="Times New Roman"/>
+                        <a:ea typeface="Times New Roman"/>
+                        <a:cs typeface="Times New Roman"/>
+                        <a:sym typeface="Times New Roman"/>
+                      </a:endParaRPr>
+                    </a:p>
+                  </a:txBody>
+                  <a:tcPr marT="91425" marB="91425" marR="91425" marL="91425" anchor="ctr">
+                    <a:lnL cap="flat" cmpd="sng" w="19050">
+                      <a:solidFill>
+                        <a:schemeClr val="dk1"/>
+                      </a:solidFill>
+                      <a:prstDash val="solid"/>
+                      <a:round/>
+                      <a:headEnd len="sm" w="sm" type="none"/>
+                      <a:tailEnd len="sm" w="sm" type="none"/>
+                    </a:lnL>
+                    <a:lnR cap="flat" cmpd="sng" w="19050">
+                      <a:solidFill>
+                        <a:schemeClr val="dk1">
+                          <a:alpha val="0"/>
+                        </a:schemeClr>
+                      </a:solidFill>
+                      <a:prstDash val="solid"/>
+                      <a:round/>
+                      <a:headEnd len="sm" w="sm" type="none"/>
+                      <a:tailEnd len="sm" w="sm" type="none"/>
+                    </a:lnR>
+                    <a:lnT cap="flat" cmpd="sng" w="19050">
+                      <a:solidFill>
+                        <a:schemeClr val="dk1"/>
+                      </a:solidFill>
+                      <a:prstDash val="solid"/>
+                      <a:round/>
+                      <a:headEnd len="sm" w="sm" type="none"/>
+                      <a:tailEnd len="sm" w="sm" type="none"/>
+                    </a:lnT>
+                    <a:lnB cap="flat" cmpd="sng" w="19050">
+                      <a:solidFill>
+                        <a:schemeClr val="dk1"/>
+                      </a:solidFill>
+                      <a:prstDash val="solid"/>
+                      <a:round/>
+                      <a:headEnd len="sm" w="sm" type="none"/>
+                      <a:tailEnd len="sm" w="sm" type="none"/>
+                    </a:lnB>
+                    <a:solidFill>
+                      <a:srgbClr val="D4D8FF"/>
+                    </a:solidFill>
+                  </a:tcPr>
+                </a:tc>
+              </a:tr>
+              <a:tr h="388575">
+                <a:tc>
+                  <a:txBody>
+                    <a:bodyPr/>
+                    <a:lstStyle/>
+                    <a:p>
+                      <a:pPr indent="0" lvl="0" marL="0" rtl="0" algn="l">
+                        <a:spcBef>
+                          <a:spcPts val="0"/>
+                        </a:spcBef>
+                        <a:spcAft>
+                          <a:spcPts val="0"/>
+                        </a:spcAft>
+                        <a:buNone/>
+                      </a:pPr>
+                      <a:r>
+                        <a:rPr lang="en" sz="2100">
+                          <a:solidFill>
+                            <a:schemeClr val="dk1"/>
+                          </a:solidFill>
+                          <a:latin typeface="Times New Roman"/>
+                          <a:ea typeface="Times New Roman"/>
+                          <a:cs typeface="Times New Roman"/>
+                          <a:sym typeface="Times New Roman"/>
+                        </a:rPr>
+                        <a:t>Lat:membership_total            </a:t>
+                      </a:r>
+                      <a:endParaRPr sz="2100">
+                        <a:latin typeface="Times New Roman"/>
+                        <a:ea typeface="Times New Roman"/>
+                        <a:cs typeface="Times New Roman"/>
+                        <a:sym typeface="Times New Roman"/>
+                      </a:endParaRPr>
+                    </a:p>
+                  </a:txBody>
+                  <a:tcPr marT="91425" marB="91425" marR="91425" marL="91425" anchor="ctr">
+                    <a:lnL cap="flat" cmpd="sng" w="19050">
+                      <a:solidFill>
+                        <a:schemeClr val="dk1">
+                          <a:alpha val="0"/>
+                        </a:schemeClr>
+                      </a:solidFill>
+                      <a:prstDash val="solid"/>
+                      <a:round/>
+                      <a:headEnd len="sm" w="sm" type="none"/>
+                      <a:tailEnd len="sm" w="sm" type="none"/>
+                    </a:lnL>
+                    <a:lnR cap="flat" cmpd="sng" w="19050">
+                      <a:solidFill>
+                        <a:schemeClr val="dk1"/>
+                      </a:solidFill>
+                      <a:prstDash val="solid"/>
+                      <a:round/>
+                      <a:headEnd len="sm" w="sm" type="none"/>
+                      <a:tailEnd len="sm" w="sm" type="none"/>
+                    </a:lnR>
+                    <a:lnT cap="flat" cmpd="sng" w="19050">
+                      <a:solidFill>
+                        <a:schemeClr val="dk1"/>
+                      </a:solidFill>
+                      <a:prstDash val="solid"/>
+                      <a:round/>
+                      <a:headEnd len="sm" w="sm" type="none"/>
+                      <a:tailEnd len="sm" w="sm" type="none"/>
+                    </a:lnT>
+                    <a:lnB cap="flat" cmpd="sng" w="19050">
+                      <a:solidFill>
+                        <a:schemeClr val="dk1"/>
+                      </a:solidFill>
+                      <a:prstDash val="solid"/>
+                      <a:round/>
+                      <a:headEnd len="sm" w="sm" type="none"/>
+                      <a:tailEnd len="sm" w="sm" type="none"/>
+                    </a:lnB>
+                    <a:solidFill>
+                      <a:srgbClr val="CBDFFF"/>
+                    </a:solidFill>
+                  </a:tcPr>
+                </a:tc>
+                <a:tc>
+                  <a:txBody>
+                    <a:bodyPr/>
+                    <a:lstStyle/>
+                    <a:p>
+                      <a:pPr indent="0" lvl="0" marL="0" rtl="0" algn="l">
+                        <a:spcBef>
+                          <a:spcPts val="0"/>
+                        </a:spcBef>
+                        <a:spcAft>
+                          <a:spcPts val="0"/>
+                        </a:spcAft>
+                        <a:buNone/>
+                      </a:pPr>
+                      <a:r>
+                        <a:rPr b="1" lang="en" sz="2100">
+                          <a:solidFill>
+                            <a:schemeClr val="dk1"/>
+                          </a:solidFill>
+                          <a:latin typeface="Times New Roman"/>
+                          <a:ea typeface="Times New Roman"/>
+                          <a:cs typeface="Times New Roman"/>
+                          <a:sym typeface="Times New Roman"/>
+                        </a:rPr>
+                        <a:t>2.868</a:t>
+                      </a:r>
+                      <a:endParaRPr b="1" sz="2100">
+                        <a:latin typeface="Times New Roman"/>
+                        <a:ea typeface="Times New Roman"/>
+                        <a:cs typeface="Times New Roman"/>
+                        <a:sym typeface="Times New Roman"/>
+                      </a:endParaRPr>
+                    </a:p>
+                  </a:txBody>
+                  <a:tcPr marT="91425" marB="91425" marR="91425" marL="91425" anchor="ctr">
+                    <a:lnL cap="flat" cmpd="sng" w="19050">
+                      <a:solidFill>
+                        <a:schemeClr val="dk1"/>
+                      </a:solidFill>
+                      <a:prstDash val="solid"/>
+                      <a:round/>
+                      <a:headEnd len="sm" w="sm" type="none"/>
+                      <a:tailEnd len="sm" w="sm" type="none"/>
+                    </a:lnL>
+                    <a:lnR cap="flat" cmpd="sng" w="19050">
+                      <a:solidFill>
+                        <a:schemeClr val="dk1"/>
+                      </a:solidFill>
+                      <a:prstDash val="solid"/>
+                      <a:round/>
+                      <a:headEnd len="sm" w="sm" type="none"/>
+                      <a:tailEnd len="sm" w="sm" type="none"/>
+                    </a:lnR>
+                    <a:lnT cap="flat" cmpd="sng" w="19050">
+                      <a:solidFill>
+                        <a:schemeClr val="dk1"/>
+                      </a:solidFill>
+                      <a:prstDash val="solid"/>
+                      <a:round/>
+                      <a:headEnd len="sm" w="sm" type="none"/>
+                      <a:tailEnd len="sm" w="sm" type="none"/>
+                    </a:lnT>
+                    <a:lnB cap="flat" cmpd="sng" w="19050">
+                      <a:solidFill>
+                        <a:schemeClr val="dk1"/>
+                      </a:solidFill>
+                      <a:prstDash val="solid"/>
+                      <a:round/>
+                      <a:headEnd len="sm" w="sm" type="none"/>
+                      <a:tailEnd len="sm" w="sm" type="none"/>
+                    </a:lnB>
+                    <a:solidFill>
+                      <a:srgbClr val="CBDFFF"/>
+                    </a:solidFill>
+                  </a:tcPr>
+                </a:tc>
+                <a:tc>
+                  <a:txBody>
+                    <a:bodyPr/>
+                    <a:lstStyle/>
+                    <a:p>
+                      <a:pPr indent="0" lvl="0" marL="0" rtl="0" algn="l">
+                        <a:lnSpc>
+                          <a:spcPct val="80000"/>
+                        </a:lnSpc>
+                        <a:spcBef>
+                          <a:spcPts val="0"/>
+                        </a:spcBef>
+                        <a:spcAft>
+                          <a:spcPts val="0"/>
+                        </a:spcAft>
+                        <a:buClr>
+                          <a:schemeClr val="dk1"/>
+                        </a:buClr>
+                        <a:buSzPts val="1100"/>
+                        <a:buFont typeface="Arial"/>
+                        <a:buNone/>
+                      </a:pPr>
+                      <a:r>
+                        <a:rPr lang="en" sz="2100">
+                          <a:solidFill>
+                            <a:schemeClr val="dk1"/>
+                          </a:solidFill>
+                          <a:latin typeface="Times New Roman"/>
+                          <a:ea typeface="Times New Roman"/>
+                          <a:cs typeface="Times New Roman"/>
+                          <a:sym typeface="Times New Roman"/>
+                        </a:rPr>
+                        <a:t>Latitude</a:t>
+                      </a:r>
+                      <a:endParaRPr sz="2100">
                         <a:solidFill>
                           <a:schemeClr val="dk1"/>
                         </a:solidFill>
@@ -10829,15 +12738,18 @@
                         <a:buNone/>
                       </a:pPr>
                       <a:r>
-                        <a:rPr lang="en" sz="2000">
+                        <a:rPr b="1" lang="en" sz="2100">
+                          <a:solidFill>
+                            <a:schemeClr val="dk1"/>
+                          </a:solidFill>
                           <a:latin typeface="Times New Roman"/>
                           <a:ea typeface="Times New Roman"/>
                           <a:cs typeface="Times New Roman"/>
                           <a:sym typeface="Times New Roman"/>
                         </a:rPr>
-                        <a:t>Municipality - Watertown</a:t>
+                        <a:t>-109600</a:t>
                       </a:r>
-                      <a:endParaRPr sz="2000">
+                      <a:endParaRPr b="1" sz="2100">
                         <a:solidFill>
                           <a:schemeClr val="dk1"/>
                         </a:solidFill>
@@ -10852,211 +12764,6 @@
                     <a:lnL cap="flat" cmpd="sng" w="19050">
                       <a:solidFill>
                         <a:schemeClr val="dk1"/>
-                      </a:solidFill>
-                      <a:prstDash val="solid"/>
-                      <a:round/>
-                      <a:headEnd len="sm" w="sm" type="none"/>
-                      <a:tailEnd len="sm" w="sm" type="none"/>
-                    </a:lnL>
-                    <a:lnR cap="flat" cmpd="sng" w="19050">
-                      <a:solidFill>
-                        <a:schemeClr val="dk1"/>
-                      </a:solidFill>
-                      <a:prstDash val="solid"/>
-                      <a:round/>
-                      <a:headEnd len="sm" w="sm" type="none"/>
-                      <a:tailEnd len="sm" w="sm" type="none"/>
-                    </a:lnR>
-                    <a:lnT cap="flat" cmpd="sng" w="19050">
-                      <a:solidFill>
-                        <a:schemeClr val="dk1"/>
-                      </a:solidFill>
-                      <a:prstDash val="solid"/>
-                      <a:round/>
-                      <a:headEnd len="sm" w="sm" type="none"/>
-                      <a:tailEnd len="sm" w="sm" type="none"/>
-                    </a:lnT>
-                    <a:lnB cap="flat" cmpd="sng" w="19050">
-                      <a:solidFill>
-                        <a:schemeClr val="dk1"/>
-                      </a:solidFill>
-                      <a:prstDash val="solid"/>
-                      <a:round/>
-                      <a:headEnd len="sm" w="sm" type="none"/>
-                      <a:tailEnd len="sm" w="sm" type="none"/>
-                    </a:lnB>
-                    <a:solidFill>
-                      <a:srgbClr val="CBDFFF"/>
-                    </a:solidFill>
-                  </a:tcPr>
-                </a:tc>
-                <a:tc>
-                  <a:txBody>
-                    <a:bodyPr/>
-                    <a:lstStyle/>
-                    <a:p>
-                      <a:pPr indent="0" lvl="0" marL="0" rtl="0" algn="l">
-                        <a:lnSpc>
-                          <a:spcPct val="80000"/>
-                        </a:lnSpc>
-                        <a:spcBef>
-                          <a:spcPts val="0"/>
-                        </a:spcBef>
-                        <a:spcAft>
-                          <a:spcPts val="0"/>
-                        </a:spcAft>
-                        <a:buNone/>
-                      </a:pPr>
-                      <a:r>
-                        <a:rPr b="1" lang="en" sz="2000">
-                          <a:solidFill>
-                            <a:schemeClr val="dk1"/>
-                          </a:solidFill>
-                          <a:latin typeface="Times New Roman"/>
-                          <a:ea typeface="Times New Roman"/>
-                          <a:cs typeface="Times New Roman"/>
-                          <a:sym typeface="Times New Roman"/>
-                        </a:rPr>
-                        <a:t>7.274</a:t>
-                      </a:r>
-                      <a:endParaRPr b="1" sz="2000">
-                        <a:solidFill>
-                          <a:schemeClr val="dk1"/>
-                        </a:solidFill>
-                        <a:latin typeface="Times New Roman"/>
-                        <a:ea typeface="Times New Roman"/>
-                        <a:cs typeface="Times New Roman"/>
-                        <a:sym typeface="Times New Roman"/>
-                      </a:endParaRPr>
-                    </a:p>
-                  </a:txBody>
-                  <a:tcPr marT="91425" marB="91425" marR="91425" marL="91425" anchor="ctr">
-                    <a:lnL cap="flat" cmpd="sng" w="19050">
-                      <a:solidFill>
-                        <a:schemeClr val="dk1"/>
-                      </a:solidFill>
-                      <a:prstDash val="solid"/>
-                      <a:round/>
-                      <a:headEnd len="sm" w="sm" type="none"/>
-                      <a:tailEnd len="sm" w="sm" type="none"/>
-                    </a:lnL>
-                    <a:lnR cap="flat" cmpd="sng" w="19050">
-                      <a:solidFill>
-                        <a:schemeClr val="dk1">
-                          <a:alpha val="0"/>
-                        </a:schemeClr>
-                      </a:solidFill>
-                      <a:prstDash val="solid"/>
-                      <a:round/>
-                      <a:headEnd len="sm" w="sm" type="none"/>
-                      <a:tailEnd len="sm" w="sm" type="none"/>
-                    </a:lnR>
-                    <a:lnT cap="flat" cmpd="sng" w="19050">
-                      <a:solidFill>
-                        <a:schemeClr val="dk1"/>
-                      </a:solidFill>
-                      <a:prstDash val="solid"/>
-                      <a:round/>
-                      <a:headEnd len="sm" w="sm" type="none"/>
-                      <a:tailEnd len="sm" w="sm" type="none"/>
-                    </a:lnT>
-                    <a:lnB cap="flat" cmpd="sng" w="19050">
-                      <a:solidFill>
-                        <a:schemeClr val="dk1"/>
-                      </a:solidFill>
-                      <a:prstDash val="solid"/>
-                      <a:round/>
-                      <a:headEnd len="sm" w="sm" type="none"/>
-                      <a:tailEnd len="sm" w="sm" type="none"/>
-                    </a:lnB>
-                    <a:solidFill>
-                      <a:srgbClr val="CBDFFF"/>
-                    </a:solidFill>
-                  </a:tcPr>
-                </a:tc>
-              </a:tr>
-              <a:tr h="381000">
-                <a:tc>
-                  <a:txBody>
-                    <a:bodyPr/>
-                    <a:lstStyle/>
-                    <a:p>
-                      <a:pPr indent="0" lvl="0" marL="0" rtl="0" algn="l">
-                        <a:lnSpc>
-                          <a:spcPct val="80000"/>
-                        </a:lnSpc>
-                        <a:spcBef>
-                          <a:spcPts val="0"/>
-                        </a:spcBef>
-                        <a:spcAft>
-                          <a:spcPts val="0"/>
-                        </a:spcAft>
-                        <a:buNone/>
-                      </a:pPr>
-                      <a:r>
-                        <a:rPr lang="en" sz="2000">
-                          <a:solidFill>
-                            <a:schemeClr val="dk1"/>
-                          </a:solidFill>
-                          <a:latin typeface="Times New Roman"/>
-                          <a:ea typeface="Times New Roman"/>
-                          <a:cs typeface="Times New Roman"/>
-                          <a:sym typeface="Times New Roman"/>
-                        </a:rPr>
-                        <a:t>Seasonal status:</a:t>
-                      </a:r>
-                      <a:endParaRPr sz="2000">
-                        <a:solidFill>
-                          <a:schemeClr val="dk1"/>
-                        </a:solidFill>
-                        <a:latin typeface="Times New Roman"/>
-                        <a:ea typeface="Times New Roman"/>
-                        <a:cs typeface="Times New Roman"/>
-                        <a:sym typeface="Times New Roman"/>
-                      </a:endParaRPr>
-                    </a:p>
-                    <a:p>
-                      <a:pPr indent="0" lvl="0" marL="0" rtl="0" algn="l">
-                        <a:lnSpc>
-                          <a:spcPct val="80000"/>
-                        </a:lnSpc>
-                        <a:spcBef>
-                          <a:spcPts val="0"/>
-                        </a:spcBef>
-                        <a:spcAft>
-                          <a:spcPts val="0"/>
-                        </a:spcAft>
-                        <a:buNone/>
-                      </a:pPr>
-                      <a:r>
-                        <a:rPr lang="en" sz="2000">
-                          <a:solidFill>
-                            <a:schemeClr val="dk1"/>
-                          </a:solidFill>
-                          <a:latin typeface="Times New Roman"/>
-                          <a:ea typeface="Times New Roman"/>
-                          <a:cs typeface="Times New Roman"/>
-                          <a:sym typeface="Times New Roman"/>
-                        </a:rPr>
-                        <a:t>winter storage</a:t>
-                      </a:r>
-                      <a:endParaRPr sz="2000">
-                        <a:solidFill>
-                          <a:schemeClr val="dk1"/>
-                        </a:solidFill>
-                        <a:latin typeface="Times New Roman"/>
-                        <a:ea typeface="Times New Roman"/>
-                        <a:cs typeface="Times New Roman"/>
-                        <a:sym typeface="Times New Roman"/>
-                      </a:endParaRPr>
-                    </a:p>
-                  </a:txBody>
-                  <a:tcPr marT="91425" marB="91425" marR="91425" marL="91425" anchor="ctr">
-                    <a:lnL cap="flat" cmpd="sng" w="19050">
-                      <a:solidFill>
-                        <a:schemeClr val="dk1">
-                          <a:alpha val="0"/>
-                        </a:schemeClr>
                       </a:solidFill>
                       <a:prstDash val="solid"/>
                       <a:round/>
@@ -11113,18 +12820,15 @@
                         <a:buNone/>
                       </a:pPr>
                       <a:r>
-                        <a:rPr b="1" lang="en" sz="2000">
-                          <a:solidFill>
-                            <a:schemeClr val="dk1"/>
-                          </a:solidFill>
+                        <a:rPr lang="en" sz="2100">
                           <a:latin typeface="Times New Roman"/>
                           <a:ea typeface="Times New Roman"/>
                           <a:cs typeface="Times New Roman"/>
                           <a:sym typeface="Times New Roman"/>
                         </a:rPr>
-                        <a:t>-2.011</a:t>
+                        <a:t>Lat:Long    </a:t>
                       </a:r>
-                      <a:endParaRPr b="1" sz="2000">
+                      <a:endParaRPr b="1" sz="2100">
                         <a:solidFill>
                           <a:schemeClr val="dk1"/>
                         </a:solidFill>
@@ -11195,7 +12899,7 @@
                         <a:buNone/>
                       </a:pPr>
                       <a:r>
-                        <a:rPr lang="en" sz="2000">
+                        <a:rPr b="1" lang="en" sz="2100">
                           <a:solidFill>
                             <a:schemeClr val="dk1"/>
                           </a:solidFill>
@@ -11204,9 +12908,9 @@
                           <a:cs typeface="Times New Roman"/>
                           <a:sym typeface="Times New Roman"/>
                         </a:rPr>
-                        <a:t>Municipality - Salem</a:t>
+                        <a:t>-1537</a:t>
                       </a:r>
-                      <a:endParaRPr sz="2000">
+                      <a:endParaRPr b="1" sz="2100">
                         <a:solidFill>
                           <a:schemeClr val="dk1"/>
                         </a:solidFill>
@@ -11229,7 +12933,9 @@
                     </a:lnL>
                     <a:lnR cap="flat" cmpd="sng" w="19050">
                       <a:solidFill>
-                        <a:schemeClr val="dk1"/>
+                        <a:schemeClr val="dk1">
+                          <a:alpha val="0"/>
+                        </a:schemeClr>
                       </a:solidFill>
                       <a:prstDash val="solid"/>
                       <a:round/>
@@ -11259,15 +12965,14 @@
                     </a:solidFill>
                   </a:tcPr>
                 </a:tc>
+              </a:tr>
+              <a:tr h="388575">
                 <a:tc>
                   <a:txBody>
                     <a:bodyPr/>
                     <a:lstStyle/>
                     <a:p>
                       <a:pPr indent="0" lvl="0" marL="0" rtl="0" algn="l">
-                        <a:lnSpc>
-                          <a:spcPct val="80000"/>
-                        </a:lnSpc>
                         <a:spcBef>
                           <a:spcPts val="0"/>
                         </a:spcBef>
@@ -11277,7 +12982,7 @@
                         <a:buNone/>
                       </a:pPr>
                       <a:r>
-                        <a:rPr b="1" lang="en" sz="2000">
+                        <a:rPr lang="en" sz="2100">
                           <a:solidFill>
                             <a:schemeClr val="dk1"/>
                           </a:solidFill>
@@ -11286,12 +12991,9 @@
                           <a:cs typeface="Times New Roman"/>
                           <a:sym typeface="Times New Roman"/>
                         </a:rPr>
-                        <a:t>-41.79</a:t>
+                        <a:t>Long:membership_total           </a:t>
                       </a:r>
-                      <a:endParaRPr b="1" sz="2000">
-                        <a:solidFill>
-                          <a:schemeClr val="dk1"/>
-                        </a:solidFill>
+                      <a:endParaRPr sz="2100">
                         <a:latin typeface="Times New Roman"/>
                         <a:ea typeface="Times New Roman"/>
                         <a:cs typeface="Times New Roman"/>
@@ -11302,86 +13004,9 @@
                   <a:tcPr marT="91425" marB="91425" marR="91425" marL="91425" anchor="ctr">
                     <a:lnL cap="flat" cmpd="sng" w="19050">
                       <a:solidFill>
-                        <a:schemeClr val="dk1"/>
-                      </a:solidFill>
-                      <a:prstDash val="solid"/>
-                      <a:round/>
-                      <a:headEnd len="sm" w="sm" type="none"/>
-                      <a:tailEnd len="sm" w="sm" type="none"/>
-                    </a:lnL>
-                    <a:lnR cap="flat" cmpd="sng" w="19050">
-                      <a:solidFill>
-                        <a:schemeClr val="dk1"/>
-                      </a:solidFill>
-                      <a:prstDash val="solid"/>
-                      <a:round/>
-                      <a:headEnd len="sm" w="sm" type="none"/>
-                      <a:tailEnd len="sm" w="sm" type="none"/>
-                    </a:lnR>
-                    <a:lnT cap="flat" cmpd="sng" w="19050">
-                      <a:solidFill>
-                        <a:schemeClr val="dk1"/>
-                      </a:solidFill>
-                      <a:prstDash val="solid"/>
-                      <a:round/>
-                      <a:headEnd len="sm" w="sm" type="none"/>
-                      <a:tailEnd len="sm" w="sm" type="none"/>
-                    </a:lnT>
-                    <a:lnB cap="flat" cmpd="sng" w="19050">
-                      <a:solidFill>
-                        <a:schemeClr val="dk1"/>
-                      </a:solidFill>
-                      <a:prstDash val="solid"/>
-                      <a:round/>
-                      <a:headEnd len="sm" w="sm" type="none"/>
-                      <a:tailEnd len="sm" w="sm" type="none"/>
-                    </a:lnB>
-                    <a:solidFill>
-                      <a:srgbClr val="D4D8FF"/>
-                    </a:solidFill>
-                  </a:tcPr>
-                </a:tc>
-                <a:tc>
-                  <a:txBody>
-                    <a:bodyPr/>
-                    <a:lstStyle/>
-                    <a:p>
-                      <a:pPr indent="0" lvl="0" marL="0" rtl="0" algn="l">
-                        <a:lnSpc>
-                          <a:spcPct val="80000"/>
-                        </a:lnSpc>
-                        <a:spcBef>
-                          <a:spcPts val="0"/>
-                        </a:spcBef>
-                        <a:spcAft>
-                          <a:spcPts val="0"/>
-                        </a:spcAft>
-                        <a:buNone/>
-                      </a:pPr>
-                      <a:r>
-                        <a:rPr lang="en" sz="2000">
-                          <a:latin typeface="Times New Roman"/>
-                          <a:ea typeface="Times New Roman"/>
-                          <a:cs typeface="Times New Roman"/>
-                          <a:sym typeface="Times New Roman"/>
-                        </a:rPr>
-                        <a:t>Total Docks</a:t>
-                      </a:r>
-                      <a:endParaRPr sz="2000">
-                        <a:solidFill>
-                          <a:schemeClr val="dk1"/>
-                        </a:solidFill>
-                        <a:latin typeface="Times New Roman"/>
-                        <a:ea typeface="Times New Roman"/>
-                        <a:cs typeface="Times New Roman"/>
-                        <a:sym typeface="Times New Roman"/>
-                      </a:endParaRPr>
-                    </a:p>
-                  </a:txBody>
-                  <a:tcPr marT="91425" marB="91425" marR="91425" marL="91425" anchor="ctr">
-                    <a:lnL cap="flat" cmpd="sng" w="19050">
-                      <a:solidFill>
-                        <a:schemeClr val="dk1"/>
+                        <a:schemeClr val="dk1">
+                          <a:alpha val="0"/>
+                        </a:schemeClr>
                       </a:solidFill>
                       <a:prstDash val="solid"/>
                       <a:round/>
@@ -11426,95 +13051,6 @@
                     <a:lstStyle/>
                     <a:p>
                       <a:pPr indent="0" lvl="0" marL="0" rtl="0" algn="l">
-                        <a:lnSpc>
-                          <a:spcPct val="80000"/>
-                        </a:lnSpc>
-                        <a:spcBef>
-                          <a:spcPts val="0"/>
-                        </a:spcBef>
-                        <a:spcAft>
-                          <a:spcPts val="0"/>
-                        </a:spcAft>
-                        <a:buNone/>
-                      </a:pPr>
-                      <a:r>
-                        <a:rPr b="1" lang="en" sz="2000">
-                          <a:solidFill>
-                            <a:schemeClr val="dk1"/>
-                          </a:solidFill>
-                          <a:latin typeface="Times New Roman"/>
-                          <a:ea typeface="Times New Roman"/>
-                          <a:cs typeface="Times New Roman"/>
-                          <a:sym typeface="Times New Roman"/>
-                        </a:rPr>
-                        <a:t>0.1746</a:t>
-                      </a:r>
-                      <a:endParaRPr b="1" sz="2000">
-                        <a:solidFill>
-                          <a:schemeClr val="dk1"/>
-                        </a:solidFill>
-                        <a:latin typeface="Times New Roman"/>
-                        <a:ea typeface="Times New Roman"/>
-                        <a:cs typeface="Times New Roman"/>
-                        <a:sym typeface="Times New Roman"/>
-                      </a:endParaRPr>
-                    </a:p>
-                  </a:txBody>
-                  <a:tcPr marT="91425" marB="91425" marR="91425" marL="91425" anchor="ctr">
-                    <a:lnL cap="flat" cmpd="sng" w="19050">
-                      <a:solidFill>
-                        <a:schemeClr val="dk1"/>
-                      </a:solidFill>
-                      <a:prstDash val="solid"/>
-                      <a:round/>
-                      <a:headEnd len="sm" w="sm" type="none"/>
-                      <a:tailEnd len="sm" w="sm" type="none"/>
-                    </a:lnL>
-                    <a:lnR cap="flat" cmpd="sng" w="19050">
-                      <a:solidFill>
-                        <a:schemeClr val="dk1">
-                          <a:alpha val="0"/>
-                        </a:schemeClr>
-                      </a:solidFill>
-                      <a:prstDash val="solid"/>
-                      <a:round/>
-                      <a:headEnd len="sm" w="sm" type="none"/>
-                      <a:tailEnd len="sm" w="sm" type="none"/>
-                    </a:lnR>
-                    <a:lnT cap="flat" cmpd="sng" w="19050">
-                      <a:solidFill>
-                        <a:schemeClr val="dk1"/>
-                      </a:solidFill>
-                      <a:prstDash val="solid"/>
-                      <a:round/>
-                      <a:headEnd len="sm" w="sm" type="none"/>
-                      <a:tailEnd len="sm" w="sm" type="none"/>
-                    </a:lnT>
-                    <a:lnB cap="flat" cmpd="sng" w="19050">
-                      <a:solidFill>
-                        <a:schemeClr val="dk1"/>
-                      </a:solidFill>
-                      <a:prstDash val="solid"/>
-                      <a:round/>
-                      <a:headEnd len="sm" w="sm" type="none"/>
-                      <a:tailEnd len="sm" w="sm" type="none"/>
-                    </a:lnB>
-                    <a:solidFill>
-                      <a:srgbClr val="CBDFFF"/>
-                    </a:solidFill>
-                  </a:tcPr>
-                </a:tc>
-              </a:tr>
-              <a:tr h="381000">
-                <a:tc>
-                  <a:txBody>
-                    <a:bodyPr/>
-                    <a:lstStyle/>
-                    <a:p>
-                      <a:pPr indent="0" lvl="0" marL="0" rtl="0" algn="l">
-                        <a:lnSpc>
-                          <a:spcPct val="80000"/>
-                        </a:lnSpc>
                         <a:spcBef>
                           <a:spcPts val="0"/>
                         </a:spcBef>
@@ -11529,7 +13065,7 @@
                         <a:buNone/>
                       </a:pPr>
                       <a:r>
-                        <a:rPr lang="en" sz="2000">
+                        <a:rPr b="1" lang="en" sz="2100">
                           <a:solidFill>
                             <a:schemeClr val="dk1"/>
                           </a:solidFill>
@@ -11538,2397 +13074,9 @@
                           <a:cs typeface="Times New Roman"/>
                           <a:sym typeface="Times New Roman"/>
                         </a:rPr>
-                        <a:t>Seasonal status:</a:t>
+                        <a:t>2.801</a:t>
                       </a:r>
-                      <a:endParaRPr sz="2000">
-                        <a:solidFill>
-                          <a:schemeClr val="dk1"/>
-                        </a:solidFill>
-                        <a:latin typeface="Times New Roman"/>
-                        <a:ea typeface="Times New Roman"/>
-                        <a:cs typeface="Times New Roman"/>
-                        <a:sym typeface="Times New Roman"/>
-                      </a:endParaRPr>
-                    </a:p>
-                    <a:p>
-                      <a:pPr indent="0" lvl="0" marL="0" rtl="0" algn="l">
-                        <a:lnSpc>
-                          <a:spcPct val="80000"/>
-                        </a:lnSpc>
-                        <a:spcBef>
-                          <a:spcPts val="0"/>
-                        </a:spcBef>
-                        <a:spcAft>
-                          <a:spcPts val="0"/>
-                        </a:spcAft>
-                        <a:buClr>
-                          <a:schemeClr val="dk1"/>
-                        </a:buClr>
-                        <a:buSzPts val="1100"/>
-                        <a:buFont typeface="Arial"/>
-                        <a:buNone/>
-                      </a:pPr>
-                      <a:r>
-                        <a:rPr lang="en" sz="2000">
-                          <a:solidFill>
-                            <a:schemeClr val="dk1"/>
-                          </a:solidFill>
-                          <a:latin typeface="Times New Roman"/>
-                          <a:ea typeface="Times New Roman"/>
-                          <a:cs typeface="Times New Roman"/>
-                          <a:sym typeface="Times New Roman"/>
-                        </a:rPr>
-                        <a:t>year round currently stored</a:t>
-                      </a:r>
-                      <a:endParaRPr sz="2000">
-                        <a:solidFill>
-                          <a:schemeClr val="dk1"/>
-                        </a:solidFill>
-                        <a:latin typeface="Times New Roman"/>
-                        <a:ea typeface="Times New Roman"/>
-                        <a:cs typeface="Times New Roman"/>
-                        <a:sym typeface="Times New Roman"/>
-                      </a:endParaRPr>
-                    </a:p>
-                  </a:txBody>
-                  <a:tcPr marT="91425" marB="91425" marR="91425" marL="91425" anchor="ctr">
-                    <a:lnL cap="flat" cmpd="sng" w="19050">
-                      <a:solidFill>
-                        <a:schemeClr val="dk1">
-                          <a:alpha val="0"/>
-                        </a:schemeClr>
-                      </a:solidFill>
-                      <a:prstDash val="solid"/>
-                      <a:round/>
-                      <a:headEnd len="sm" w="sm" type="none"/>
-                      <a:tailEnd len="sm" w="sm" type="none"/>
-                    </a:lnL>
-                    <a:lnR cap="flat" cmpd="sng" w="19050">
-                      <a:solidFill>
-                        <a:schemeClr val="dk1"/>
-                      </a:solidFill>
-                      <a:prstDash val="solid"/>
-                      <a:round/>
-                      <a:headEnd len="sm" w="sm" type="none"/>
-                      <a:tailEnd len="sm" w="sm" type="none"/>
-                    </a:lnR>
-                    <a:lnT cap="flat" cmpd="sng" w="19050">
-                      <a:solidFill>
-                        <a:schemeClr val="dk1"/>
-                      </a:solidFill>
-                      <a:prstDash val="solid"/>
-                      <a:round/>
-                      <a:headEnd len="sm" w="sm" type="none"/>
-                      <a:tailEnd len="sm" w="sm" type="none"/>
-                    </a:lnT>
-                    <a:lnB cap="flat" cmpd="sng" w="19050">
-                      <a:solidFill>
-                        <a:schemeClr val="dk1"/>
-                      </a:solidFill>
-                      <a:prstDash val="solid"/>
-                      <a:round/>
-                      <a:headEnd len="sm" w="sm" type="none"/>
-                      <a:tailEnd len="sm" w="sm" type="none"/>
-                    </a:lnB>
-                    <a:solidFill>
-                      <a:srgbClr val="D4D8FF"/>
-                    </a:solidFill>
-                  </a:tcPr>
-                </a:tc>
-                <a:tc>
-                  <a:txBody>
-                    <a:bodyPr/>
-                    <a:lstStyle/>
-                    <a:p>
-                      <a:pPr indent="0" lvl="0" marL="0" rtl="0" algn="l">
-                        <a:lnSpc>
-                          <a:spcPct val="80000"/>
-                        </a:lnSpc>
-                        <a:spcBef>
-                          <a:spcPts val="0"/>
-                        </a:spcBef>
-                        <a:spcAft>
-                          <a:spcPts val="0"/>
-                        </a:spcAft>
-                        <a:buNone/>
-                      </a:pPr>
-                      <a:r>
-                        <a:rPr b="1" lang="en" sz="2000">
-                          <a:solidFill>
-                            <a:schemeClr val="dk1"/>
-                          </a:solidFill>
-                          <a:latin typeface="Times New Roman"/>
-                          <a:ea typeface="Times New Roman"/>
-                          <a:cs typeface="Times New Roman"/>
-                          <a:sym typeface="Times New Roman"/>
-                        </a:rPr>
-                        <a:t>-19.32</a:t>
-                      </a:r>
-                      <a:endParaRPr b="1" sz="2000">
-                        <a:solidFill>
-                          <a:schemeClr val="dk1"/>
-                        </a:solidFill>
-                        <a:latin typeface="Times New Roman"/>
-                        <a:ea typeface="Times New Roman"/>
-                        <a:cs typeface="Times New Roman"/>
-                        <a:sym typeface="Times New Roman"/>
-                      </a:endParaRPr>
-                    </a:p>
-                  </a:txBody>
-                  <a:tcPr marT="91425" marB="91425" marR="91425" marL="91425" anchor="ctr">
-                    <a:lnL cap="flat" cmpd="sng" w="19050">
-                      <a:solidFill>
-                        <a:schemeClr val="dk1"/>
-                      </a:solidFill>
-                      <a:prstDash val="solid"/>
-                      <a:round/>
-                      <a:headEnd len="sm" w="sm" type="none"/>
-                      <a:tailEnd len="sm" w="sm" type="none"/>
-                    </a:lnL>
-                    <a:lnR cap="flat" cmpd="sng" w="19050">
-                      <a:solidFill>
-                        <a:schemeClr val="dk1"/>
-                      </a:solidFill>
-                      <a:prstDash val="solid"/>
-                      <a:round/>
-                      <a:headEnd len="sm" w="sm" type="none"/>
-                      <a:tailEnd len="sm" w="sm" type="none"/>
-                    </a:lnR>
-                    <a:lnT cap="flat" cmpd="sng" w="19050">
-                      <a:solidFill>
-                        <a:schemeClr val="dk1"/>
-                      </a:solidFill>
-                      <a:prstDash val="solid"/>
-                      <a:round/>
-                      <a:headEnd len="sm" w="sm" type="none"/>
-                      <a:tailEnd len="sm" w="sm" type="none"/>
-                    </a:lnT>
-                    <a:lnB cap="flat" cmpd="sng" w="19050">
-                      <a:solidFill>
-                        <a:schemeClr val="dk1"/>
-                      </a:solidFill>
-                      <a:prstDash val="solid"/>
-                      <a:round/>
-                      <a:headEnd len="sm" w="sm" type="none"/>
-                      <a:tailEnd len="sm" w="sm" type="none"/>
-                    </a:lnB>
-                    <a:solidFill>
-                      <a:srgbClr val="D4D8FF"/>
-                    </a:solidFill>
-                  </a:tcPr>
-                </a:tc>
-                <a:tc>
-                  <a:txBody>
-                    <a:bodyPr/>
-                    <a:lstStyle/>
-                    <a:p>
-                      <a:pPr indent="0" lvl="0" marL="0" rtl="0" algn="l">
-                        <a:lnSpc>
-                          <a:spcPct val="80000"/>
-                        </a:lnSpc>
-                        <a:spcBef>
-                          <a:spcPts val="0"/>
-                        </a:spcBef>
-                        <a:spcAft>
-                          <a:spcPts val="0"/>
-                        </a:spcAft>
-                        <a:buNone/>
-                      </a:pPr>
-                      <a:r>
-                        <a:rPr lang="en" sz="2000">
-                          <a:solidFill>
-                            <a:schemeClr val="dk1"/>
-                          </a:solidFill>
-                          <a:latin typeface="Times New Roman"/>
-                          <a:ea typeface="Times New Roman"/>
-                          <a:cs typeface="Times New Roman"/>
-                          <a:sym typeface="Times New Roman"/>
-                        </a:rPr>
-                        <a:t>Municipality - Somerville</a:t>
-                      </a:r>
-                      <a:endParaRPr sz="2000">
-                        <a:solidFill>
-                          <a:schemeClr val="dk1"/>
-                        </a:solidFill>
-                        <a:latin typeface="Times New Roman"/>
-                        <a:ea typeface="Times New Roman"/>
-                        <a:cs typeface="Times New Roman"/>
-                        <a:sym typeface="Times New Roman"/>
-                      </a:endParaRPr>
-                    </a:p>
-                  </a:txBody>
-                  <a:tcPr marT="91425" marB="91425" marR="91425" marL="91425" anchor="ctr">
-                    <a:lnL cap="flat" cmpd="sng" w="19050">
-                      <a:solidFill>
-                        <a:schemeClr val="dk1"/>
-                      </a:solidFill>
-                      <a:prstDash val="solid"/>
-                      <a:round/>
-                      <a:headEnd len="sm" w="sm" type="none"/>
-                      <a:tailEnd len="sm" w="sm" type="none"/>
-                    </a:lnL>
-                    <a:lnR cap="flat" cmpd="sng" w="19050">
-                      <a:solidFill>
-                        <a:schemeClr val="dk1"/>
-                      </a:solidFill>
-                      <a:prstDash val="solid"/>
-                      <a:round/>
-                      <a:headEnd len="sm" w="sm" type="none"/>
-                      <a:tailEnd len="sm" w="sm" type="none"/>
-                    </a:lnR>
-                    <a:lnT cap="flat" cmpd="sng" w="19050">
-                      <a:solidFill>
-                        <a:schemeClr val="dk1"/>
-                      </a:solidFill>
-                      <a:prstDash val="solid"/>
-                      <a:round/>
-                      <a:headEnd len="sm" w="sm" type="none"/>
-                      <a:tailEnd len="sm" w="sm" type="none"/>
-                    </a:lnT>
-                    <a:lnB cap="flat" cmpd="sng" w="19050">
-                      <a:solidFill>
-                        <a:schemeClr val="dk1"/>
-                      </a:solidFill>
-                      <a:prstDash val="solid"/>
-                      <a:round/>
-                      <a:headEnd len="sm" w="sm" type="none"/>
-                      <a:tailEnd len="sm" w="sm" type="none"/>
-                    </a:lnB>
-                    <a:solidFill>
-                      <a:srgbClr val="D4D8FF"/>
-                    </a:solidFill>
-                  </a:tcPr>
-                </a:tc>
-                <a:tc>
-                  <a:txBody>
-                    <a:bodyPr/>
-                    <a:lstStyle/>
-                    <a:p>
-                      <a:pPr indent="0" lvl="0" marL="0" rtl="0" algn="l">
-                        <a:lnSpc>
-                          <a:spcPct val="80000"/>
-                        </a:lnSpc>
-                        <a:spcBef>
-                          <a:spcPts val="0"/>
-                        </a:spcBef>
-                        <a:spcAft>
-                          <a:spcPts val="0"/>
-                        </a:spcAft>
-                        <a:buNone/>
-                      </a:pPr>
-                      <a:r>
-                        <a:rPr b="1" lang="en" sz="2000">
-                          <a:solidFill>
-                            <a:schemeClr val="dk1"/>
-                          </a:solidFill>
-                          <a:latin typeface="Times New Roman"/>
-                          <a:ea typeface="Times New Roman"/>
-                          <a:cs typeface="Times New Roman"/>
-                          <a:sym typeface="Times New Roman"/>
-                        </a:rPr>
-                        <a:t>-2.642</a:t>
-                      </a:r>
-                      <a:endParaRPr b="1" sz="2000">
-                        <a:solidFill>
-                          <a:schemeClr val="dk1"/>
-                        </a:solidFill>
-                        <a:latin typeface="Times New Roman"/>
-                        <a:ea typeface="Times New Roman"/>
-                        <a:cs typeface="Times New Roman"/>
-                        <a:sym typeface="Times New Roman"/>
-                      </a:endParaRPr>
-                    </a:p>
-                  </a:txBody>
-                  <a:tcPr marT="91425" marB="91425" marR="91425" marL="91425" anchor="ctr">
-                    <a:lnL cap="flat" cmpd="sng" w="19050">
-                      <a:solidFill>
-                        <a:schemeClr val="dk1"/>
-                      </a:solidFill>
-                      <a:prstDash val="solid"/>
-                      <a:round/>
-                      <a:headEnd len="sm" w="sm" type="none"/>
-                      <a:tailEnd len="sm" w="sm" type="none"/>
-                    </a:lnL>
-                    <a:lnR cap="flat" cmpd="sng" w="19050">
-                      <a:solidFill>
-                        <a:schemeClr val="dk1"/>
-                      </a:solidFill>
-                      <a:prstDash val="solid"/>
-                      <a:round/>
-                      <a:headEnd len="sm" w="sm" type="none"/>
-                      <a:tailEnd len="sm" w="sm" type="none"/>
-                    </a:lnR>
-                    <a:lnT cap="flat" cmpd="sng" w="19050">
-                      <a:solidFill>
-                        <a:schemeClr val="dk1"/>
-                      </a:solidFill>
-                      <a:prstDash val="solid"/>
-                      <a:round/>
-                      <a:headEnd len="sm" w="sm" type="none"/>
-                      <a:tailEnd len="sm" w="sm" type="none"/>
-                    </a:lnT>
-                    <a:lnB cap="flat" cmpd="sng" w="19050">
-                      <a:solidFill>
-                        <a:schemeClr val="dk1"/>
-                      </a:solidFill>
-                      <a:prstDash val="solid"/>
-                      <a:round/>
-                      <a:headEnd len="sm" w="sm" type="none"/>
-                      <a:tailEnd len="sm" w="sm" type="none"/>
-                    </a:lnB>
-                    <a:solidFill>
-                      <a:srgbClr val="D4D8FF"/>
-                    </a:solidFill>
-                  </a:tcPr>
-                </a:tc>
-                <a:tc>
-                  <a:txBody>
-                    <a:bodyPr/>
-                    <a:lstStyle/>
-                    <a:p>
-                      <a:pPr indent="0" lvl="0" marL="0" rtl="0" algn="l">
-                        <a:lnSpc>
-                          <a:spcPct val="110000"/>
-                        </a:lnSpc>
-                        <a:spcBef>
-                          <a:spcPts val="0"/>
-                        </a:spcBef>
-                        <a:spcAft>
-                          <a:spcPts val="0"/>
-                        </a:spcAft>
-                        <a:buNone/>
-                      </a:pPr>
-                      <a:r>
-                        <a:rPr lang="en" sz="2000">
-                          <a:solidFill>
-                            <a:schemeClr val="dk1"/>
-                          </a:solidFill>
-                          <a:latin typeface="Times New Roman"/>
-                          <a:ea typeface="Times New Roman"/>
-                          <a:cs typeface="Times New Roman"/>
-                          <a:sym typeface="Times New Roman"/>
-                        </a:rPr>
-                        <a:t>Institutions within 1km </a:t>
-                      </a:r>
-                      <a:endParaRPr sz="2000">
-                        <a:solidFill>
-                          <a:schemeClr val="dk1"/>
-                        </a:solidFill>
-                        <a:latin typeface="Times New Roman"/>
-                        <a:ea typeface="Times New Roman"/>
-                        <a:cs typeface="Times New Roman"/>
-                        <a:sym typeface="Times New Roman"/>
-                      </a:endParaRPr>
-                    </a:p>
-                    <a:p>
-                      <a:pPr indent="0" lvl="0" marL="0" rtl="0" algn="l">
-                        <a:lnSpc>
-                          <a:spcPct val="110000"/>
-                        </a:lnSpc>
-                        <a:spcBef>
-                          <a:spcPts val="0"/>
-                        </a:spcBef>
-                        <a:spcAft>
-                          <a:spcPts val="0"/>
-                        </a:spcAft>
-                        <a:buNone/>
-                      </a:pPr>
-                      <a:r>
-                        <a:rPr lang="en" sz="2000">
-                          <a:solidFill>
-                            <a:schemeClr val="dk1"/>
-                          </a:solidFill>
-                          <a:latin typeface="Times New Roman"/>
-                          <a:ea typeface="Times New Roman"/>
-                          <a:cs typeface="Times New Roman"/>
-                          <a:sym typeface="Times New Roman"/>
-                        </a:rPr>
-                        <a:t>of the Station</a:t>
-                      </a:r>
-                      <a:endParaRPr sz="2000">
-                        <a:solidFill>
-                          <a:schemeClr val="dk1"/>
-                        </a:solidFill>
-                        <a:latin typeface="Times New Roman"/>
-                        <a:ea typeface="Times New Roman"/>
-                        <a:cs typeface="Times New Roman"/>
-                        <a:sym typeface="Times New Roman"/>
-                      </a:endParaRPr>
-                    </a:p>
-                  </a:txBody>
-                  <a:tcPr marT="91425" marB="91425" marR="91425" marL="91425" anchor="ctr">
-                    <a:lnL cap="flat" cmpd="sng" w="19050">
-                      <a:solidFill>
-                        <a:schemeClr val="dk1"/>
-                      </a:solidFill>
-                      <a:prstDash val="solid"/>
-                      <a:round/>
-                      <a:headEnd len="sm" w="sm" type="none"/>
-                      <a:tailEnd len="sm" w="sm" type="none"/>
-                    </a:lnL>
-                    <a:lnR cap="flat" cmpd="sng" w="19050">
-                      <a:solidFill>
-                        <a:schemeClr val="dk1"/>
-                      </a:solidFill>
-                      <a:prstDash val="solid"/>
-                      <a:round/>
-                      <a:headEnd len="sm" w="sm" type="none"/>
-                      <a:tailEnd len="sm" w="sm" type="none"/>
-                    </a:lnR>
-                    <a:lnT cap="flat" cmpd="sng" w="19050">
-                      <a:solidFill>
-                        <a:schemeClr val="dk1"/>
-                      </a:solidFill>
-                      <a:prstDash val="solid"/>
-                      <a:round/>
-                      <a:headEnd len="sm" w="sm" type="none"/>
-                      <a:tailEnd len="sm" w="sm" type="none"/>
-                    </a:lnT>
-                    <a:lnB cap="flat" cmpd="sng" w="19050">
-                      <a:solidFill>
-                        <a:schemeClr val="dk1"/>
-                      </a:solidFill>
-                      <a:prstDash val="solid"/>
-                      <a:round/>
-                      <a:headEnd len="sm" w="sm" type="none"/>
-                      <a:tailEnd len="sm" w="sm" type="none"/>
-                    </a:lnB>
-                    <a:solidFill>
-                      <a:srgbClr val="CBDFFF"/>
-                    </a:solidFill>
-                  </a:tcPr>
-                </a:tc>
-                <a:tc>
-                  <a:txBody>
-                    <a:bodyPr/>
-                    <a:lstStyle/>
-                    <a:p>
-                      <a:pPr indent="0" lvl="0" marL="0" rtl="0" algn="l">
-                        <a:lnSpc>
-                          <a:spcPct val="80000"/>
-                        </a:lnSpc>
-                        <a:spcBef>
-                          <a:spcPts val="0"/>
-                        </a:spcBef>
-                        <a:spcAft>
-                          <a:spcPts val="0"/>
-                        </a:spcAft>
-                        <a:buNone/>
-                      </a:pPr>
-                      <a:r>
-                        <a:rPr b="1" lang="en" sz="2000">
-                          <a:solidFill>
-                            <a:schemeClr val="dk1"/>
-                          </a:solidFill>
-                          <a:latin typeface="Times New Roman"/>
-                          <a:ea typeface="Times New Roman"/>
-                          <a:cs typeface="Times New Roman"/>
-                          <a:sym typeface="Times New Roman"/>
-                        </a:rPr>
-                        <a:t>2.181</a:t>
-                      </a:r>
-                      <a:endParaRPr b="1" sz="2000">
-                        <a:solidFill>
-                          <a:schemeClr val="dk1"/>
-                        </a:solidFill>
-                        <a:latin typeface="Times New Roman"/>
-                        <a:ea typeface="Times New Roman"/>
-                        <a:cs typeface="Times New Roman"/>
-                        <a:sym typeface="Times New Roman"/>
-                      </a:endParaRPr>
-                    </a:p>
-                  </a:txBody>
-                  <a:tcPr marT="91425" marB="91425" marR="91425" marL="91425" anchor="ctr">
-                    <a:lnL cap="flat" cmpd="sng" w="19050">
-                      <a:solidFill>
-                        <a:schemeClr val="dk1"/>
-                      </a:solidFill>
-                      <a:prstDash val="solid"/>
-                      <a:round/>
-                      <a:headEnd len="sm" w="sm" type="none"/>
-                      <a:tailEnd len="sm" w="sm" type="none"/>
-                    </a:lnL>
-                    <a:lnR cap="flat" cmpd="sng" w="19050">
-                      <a:solidFill>
-                        <a:schemeClr val="dk1">
-                          <a:alpha val="0"/>
-                        </a:schemeClr>
-                      </a:solidFill>
-                      <a:prstDash val="solid"/>
-                      <a:round/>
-                      <a:headEnd len="sm" w="sm" type="none"/>
-                      <a:tailEnd len="sm" w="sm" type="none"/>
-                    </a:lnR>
-                    <a:lnT cap="flat" cmpd="sng" w="19050">
-                      <a:solidFill>
-                        <a:schemeClr val="dk1"/>
-                      </a:solidFill>
-                      <a:prstDash val="solid"/>
-                      <a:round/>
-                      <a:headEnd len="sm" w="sm" type="none"/>
-                      <a:tailEnd len="sm" w="sm" type="none"/>
-                    </a:lnT>
-                    <a:lnB cap="flat" cmpd="sng" w="19050">
-                      <a:solidFill>
-                        <a:schemeClr val="dk1"/>
-                      </a:solidFill>
-                      <a:prstDash val="solid"/>
-                      <a:round/>
-                      <a:headEnd len="sm" w="sm" type="none"/>
-                      <a:tailEnd len="sm" w="sm" type="none"/>
-                    </a:lnB>
-                    <a:solidFill>
-                      <a:srgbClr val="CBDFFF"/>
-                    </a:solidFill>
-                  </a:tcPr>
-                </a:tc>
-              </a:tr>
-              <a:tr h="381000">
-                <a:tc>
-                  <a:txBody>
-                    <a:bodyPr/>
-                    <a:lstStyle/>
-                    <a:p>
-                      <a:pPr indent="0" lvl="0" marL="0" rtl="0" algn="l">
-                        <a:lnSpc>
-                          <a:spcPct val="80000"/>
-                        </a:lnSpc>
-                        <a:spcBef>
-                          <a:spcPts val="0"/>
-                        </a:spcBef>
-                        <a:spcAft>
-                          <a:spcPts val="0"/>
-                        </a:spcAft>
-                        <a:buNone/>
-                      </a:pPr>
-                      <a:r>
-                        <a:rPr lang="en" sz="2000">
-                          <a:solidFill>
-                            <a:schemeClr val="dk1"/>
-                          </a:solidFill>
-                          <a:latin typeface="Times New Roman"/>
-                          <a:ea typeface="Times New Roman"/>
-                          <a:cs typeface="Times New Roman"/>
-                          <a:sym typeface="Times New Roman"/>
-                        </a:rPr>
-                        <a:t>Municipality - Cambridge</a:t>
-                      </a:r>
-                      <a:endParaRPr sz="2000">
-                        <a:solidFill>
-                          <a:schemeClr val="dk1"/>
-                        </a:solidFill>
-                        <a:latin typeface="Times New Roman"/>
-                        <a:ea typeface="Times New Roman"/>
-                        <a:cs typeface="Times New Roman"/>
-                        <a:sym typeface="Times New Roman"/>
-                      </a:endParaRPr>
-                    </a:p>
-                  </a:txBody>
-                  <a:tcPr marT="91425" marB="91425" marR="91425" marL="91425" anchor="ctr">
-                    <a:lnL cap="flat" cmpd="sng" w="19050">
-                      <a:solidFill>
-                        <a:schemeClr val="dk1">
-                          <a:alpha val="0"/>
-                        </a:schemeClr>
-                      </a:solidFill>
-                      <a:prstDash val="solid"/>
-                      <a:round/>
-                      <a:headEnd len="sm" w="sm" type="none"/>
-                      <a:tailEnd len="sm" w="sm" type="none"/>
-                    </a:lnL>
-                    <a:lnR cap="flat" cmpd="sng" w="19050">
-                      <a:solidFill>
-                        <a:schemeClr val="dk1"/>
-                      </a:solidFill>
-                      <a:prstDash val="solid"/>
-                      <a:round/>
-                      <a:headEnd len="sm" w="sm" type="none"/>
-                      <a:tailEnd len="sm" w="sm" type="none"/>
-                    </a:lnR>
-                    <a:lnT cap="flat" cmpd="sng" w="19050">
-                      <a:solidFill>
-                        <a:schemeClr val="dk1"/>
-                      </a:solidFill>
-                      <a:prstDash val="solid"/>
-                      <a:round/>
-                      <a:headEnd len="sm" w="sm" type="none"/>
-                      <a:tailEnd len="sm" w="sm" type="none"/>
-                    </a:lnT>
-                    <a:lnB cap="flat" cmpd="sng" w="19050">
-                      <a:solidFill>
-                        <a:schemeClr val="dk1"/>
-                      </a:solidFill>
-                      <a:prstDash val="solid"/>
-                      <a:round/>
-                      <a:headEnd len="sm" w="sm" type="none"/>
-                      <a:tailEnd len="sm" w="sm" type="none"/>
-                    </a:lnB>
-                    <a:solidFill>
-                      <a:srgbClr val="D4D8FF"/>
-                    </a:solidFill>
-                  </a:tcPr>
-                </a:tc>
-                <a:tc>
-                  <a:txBody>
-                    <a:bodyPr/>
-                    <a:lstStyle/>
-                    <a:p>
-                      <a:pPr indent="0" lvl="0" marL="0" rtl="0" algn="l">
-                        <a:lnSpc>
-                          <a:spcPct val="80000"/>
-                        </a:lnSpc>
-                        <a:spcBef>
-                          <a:spcPts val="0"/>
-                        </a:spcBef>
-                        <a:spcAft>
-                          <a:spcPts val="0"/>
-                        </a:spcAft>
-                        <a:buNone/>
-                      </a:pPr>
-                      <a:r>
-                        <a:rPr b="1" lang="en" sz="2000">
-                          <a:solidFill>
-                            <a:schemeClr val="dk1"/>
-                          </a:solidFill>
-                          <a:latin typeface="Times New Roman"/>
-                          <a:ea typeface="Times New Roman"/>
-                          <a:cs typeface="Times New Roman"/>
-                          <a:sym typeface="Times New Roman"/>
-                        </a:rPr>
-                        <a:t>-7.383</a:t>
-                      </a:r>
-                      <a:endParaRPr b="1" sz="2000">
-                        <a:solidFill>
-                          <a:schemeClr val="dk1"/>
-                        </a:solidFill>
-                        <a:latin typeface="Times New Roman"/>
-                        <a:ea typeface="Times New Roman"/>
-                        <a:cs typeface="Times New Roman"/>
-                        <a:sym typeface="Times New Roman"/>
-                      </a:endParaRPr>
-                    </a:p>
-                  </a:txBody>
-                  <a:tcPr marT="91425" marB="91425" marR="91425" marL="91425" anchor="ctr">
-                    <a:lnL cap="flat" cmpd="sng" w="19050">
-                      <a:solidFill>
-                        <a:schemeClr val="dk1"/>
-                      </a:solidFill>
-                      <a:prstDash val="solid"/>
-                      <a:round/>
-                      <a:headEnd len="sm" w="sm" type="none"/>
-                      <a:tailEnd len="sm" w="sm" type="none"/>
-                    </a:lnL>
-                    <a:lnR cap="flat" cmpd="sng" w="19050">
-                      <a:solidFill>
-                        <a:schemeClr val="dk1"/>
-                      </a:solidFill>
-                      <a:prstDash val="solid"/>
-                      <a:round/>
-                      <a:headEnd len="sm" w="sm" type="none"/>
-                      <a:tailEnd len="sm" w="sm" type="none"/>
-                    </a:lnR>
-                    <a:lnT cap="flat" cmpd="sng" w="19050">
-                      <a:solidFill>
-                        <a:schemeClr val="dk1"/>
-                      </a:solidFill>
-                      <a:prstDash val="solid"/>
-                      <a:round/>
-                      <a:headEnd len="sm" w="sm" type="none"/>
-                      <a:tailEnd len="sm" w="sm" type="none"/>
-                    </a:lnT>
-                    <a:lnB cap="flat" cmpd="sng" w="19050">
-                      <a:solidFill>
-                        <a:schemeClr val="dk1"/>
-                      </a:solidFill>
-                      <a:prstDash val="solid"/>
-                      <a:round/>
-                      <a:headEnd len="sm" w="sm" type="none"/>
-                      <a:tailEnd len="sm" w="sm" type="none"/>
-                    </a:lnB>
-                    <a:solidFill>
-                      <a:srgbClr val="D4D8FF"/>
-                    </a:solidFill>
-                  </a:tcPr>
-                </a:tc>
-                <a:tc>
-                  <a:txBody>
-                    <a:bodyPr/>
-                    <a:lstStyle/>
-                    <a:p>
-                      <a:pPr indent="0" lvl="0" marL="0" rtl="0" algn="l">
-                        <a:lnSpc>
-                          <a:spcPct val="110000"/>
-                        </a:lnSpc>
-                        <a:spcBef>
-                          <a:spcPts val="0"/>
-                        </a:spcBef>
-                        <a:spcAft>
-                          <a:spcPts val="0"/>
-                        </a:spcAft>
-                        <a:buNone/>
-                      </a:pPr>
-                      <a:r>
-                        <a:rPr lang="en" sz="2000">
-                          <a:solidFill>
-                            <a:schemeClr val="dk1"/>
-                          </a:solidFill>
-                          <a:latin typeface="Times New Roman"/>
-                          <a:ea typeface="Times New Roman"/>
-                          <a:cs typeface="Times New Roman"/>
-                          <a:sym typeface="Times New Roman"/>
-                        </a:rPr>
-                        <a:t>MBTA Stations within 1km of the Station</a:t>
-                      </a:r>
-                      <a:endParaRPr sz="2000">
-                        <a:solidFill>
-                          <a:schemeClr val="dk1"/>
-                        </a:solidFill>
-                        <a:latin typeface="Times New Roman"/>
-                        <a:ea typeface="Times New Roman"/>
-                        <a:cs typeface="Times New Roman"/>
-                        <a:sym typeface="Times New Roman"/>
-                      </a:endParaRPr>
-                    </a:p>
-                  </a:txBody>
-                  <a:tcPr marT="91425" marB="91425" marR="91425" marL="91425" anchor="ctr">
-                    <a:lnL cap="flat" cmpd="sng" w="19050">
-                      <a:solidFill>
-                        <a:schemeClr val="dk1"/>
-                      </a:solidFill>
-                      <a:prstDash val="solid"/>
-                      <a:round/>
-                      <a:headEnd len="sm" w="sm" type="none"/>
-                      <a:tailEnd len="sm" w="sm" type="none"/>
-                    </a:lnL>
-                    <a:lnR cap="flat" cmpd="sng" w="19050">
-                      <a:solidFill>
-                        <a:schemeClr val="dk1"/>
-                      </a:solidFill>
-                      <a:prstDash val="solid"/>
-                      <a:round/>
-                      <a:headEnd len="sm" w="sm" type="none"/>
-                      <a:tailEnd len="sm" w="sm" type="none"/>
-                    </a:lnR>
-                    <a:lnT cap="flat" cmpd="sng" w="19050">
-                      <a:solidFill>
-                        <a:schemeClr val="dk1"/>
-                      </a:solidFill>
-                      <a:prstDash val="solid"/>
-                      <a:round/>
-                      <a:headEnd len="sm" w="sm" type="none"/>
-                      <a:tailEnd len="sm" w="sm" type="none"/>
-                    </a:lnT>
-                    <a:lnB cap="flat" cmpd="sng" w="19050">
-                      <a:solidFill>
-                        <a:schemeClr val="dk1"/>
-                      </a:solidFill>
-                      <a:prstDash val="solid"/>
-                      <a:round/>
-                      <a:headEnd len="sm" w="sm" type="none"/>
-                      <a:tailEnd len="sm" w="sm" type="none"/>
-                    </a:lnB>
-                    <a:solidFill>
-                      <a:srgbClr val="D4D8FF"/>
-                    </a:solidFill>
-                  </a:tcPr>
-                </a:tc>
-                <a:tc>
-                  <a:txBody>
-                    <a:bodyPr/>
-                    <a:lstStyle/>
-                    <a:p>
-                      <a:pPr indent="0" lvl="0" marL="0" rtl="0" algn="l">
-                        <a:lnSpc>
-                          <a:spcPct val="80000"/>
-                        </a:lnSpc>
-                        <a:spcBef>
-                          <a:spcPts val="0"/>
-                        </a:spcBef>
-                        <a:spcAft>
-                          <a:spcPts val="0"/>
-                        </a:spcAft>
-                        <a:buNone/>
-                      </a:pPr>
-                      <a:r>
-                        <a:rPr b="1" lang="en" sz="2000">
-                          <a:solidFill>
-                            <a:schemeClr val="dk1"/>
-                          </a:solidFill>
-                          <a:latin typeface="Times New Roman"/>
-                          <a:ea typeface="Times New Roman"/>
-                          <a:cs typeface="Times New Roman"/>
-                          <a:sym typeface="Times New Roman"/>
-                        </a:rPr>
-                        <a:t>-0.1379</a:t>
-                      </a:r>
-                      <a:endParaRPr b="1" sz="2000">
-                        <a:solidFill>
-                          <a:schemeClr val="dk1"/>
-                        </a:solidFill>
-                        <a:latin typeface="Times New Roman"/>
-                        <a:ea typeface="Times New Roman"/>
-                        <a:cs typeface="Times New Roman"/>
-                        <a:sym typeface="Times New Roman"/>
-                      </a:endParaRPr>
-                    </a:p>
-                  </a:txBody>
-                  <a:tcPr marT="91425" marB="91425" marR="91425" marL="91425" anchor="ctr">
-                    <a:lnL cap="flat" cmpd="sng" w="19050">
-                      <a:solidFill>
-                        <a:schemeClr val="dk1"/>
-                      </a:solidFill>
-                      <a:prstDash val="solid"/>
-                      <a:round/>
-                      <a:headEnd len="sm" w="sm" type="none"/>
-                      <a:tailEnd len="sm" w="sm" type="none"/>
-                    </a:lnL>
-                    <a:lnR cap="flat" cmpd="sng" w="19050">
-                      <a:solidFill>
-                        <a:schemeClr val="dk1"/>
-                      </a:solidFill>
-                      <a:prstDash val="solid"/>
-                      <a:round/>
-                      <a:headEnd len="sm" w="sm" type="none"/>
-                      <a:tailEnd len="sm" w="sm" type="none"/>
-                    </a:lnR>
-                    <a:lnT cap="flat" cmpd="sng" w="19050">
-                      <a:solidFill>
-                        <a:schemeClr val="dk1"/>
-                      </a:solidFill>
-                      <a:prstDash val="solid"/>
-                      <a:round/>
-                      <a:headEnd len="sm" w="sm" type="none"/>
-                      <a:tailEnd len="sm" w="sm" type="none"/>
-                    </a:lnT>
-                    <a:lnB cap="flat" cmpd="sng" w="19050">
-                      <a:solidFill>
-                        <a:schemeClr val="dk1"/>
-                      </a:solidFill>
-                      <a:prstDash val="solid"/>
-                      <a:round/>
-                      <a:headEnd len="sm" w="sm" type="none"/>
-                      <a:tailEnd len="sm" w="sm" type="none"/>
-                    </a:lnB>
-                    <a:solidFill>
-                      <a:srgbClr val="D4D8FF"/>
-                    </a:solidFill>
-                  </a:tcPr>
-                </a:tc>
-                <a:tc>
-                  <a:txBody>
-                    <a:bodyPr/>
-                    <a:lstStyle/>
-                    <a:p>
-                      <a:pPr indent="0" lvl="0" marL="0" rtl="0" algn="l">
-                        <a:lnSpc>
-                          <a:spcPct val="80000"/>
-                        </a:lnSpc>
-                        <a:spcBef>
-                          <a:spcPts val="0"/>
-                        </a:spcBef>
-                        <a:spcAft>
-                          <a:spcPts val="0"/>
-                        </a:spcAft>
-                        <a:buNone/>
-                      </a:pPr>
-                      <a:r>
-                        <a:rPr lang="en" sz="2000">
-                          <a:solidFill>
-                            <a:schemeClr val="dk1"/>
-                          </a:solidFill>
-                          <a:latin typeface="Times New Roman"/>
-                          <a:ea typeface="Times New Roman"/>
-                          <a:cs typeface="Times New Roman"/>
-                          <a:sym typeface="Times New Roman"/>
-                        </a:rPr>
-                        <a:t>Latitude</a:t>
-                      </a:r>
-                      <a:endParaRPr sz="2000">
-                        <a:solidFill>
-                          <a:schemeClr val="dk1"/>
-                        </a:solidFill>
-                        <a:latin typeface="Times New Roman"/>
-                        <a:ea typeface="Times New Roman"/>
-                        <a:cs typeface="Times New Roman"/>
-                        <a:sym typeface="Times New Roman"/>
-                      </a:endParaRPr>
-                    </a:p>
-                  </a:txBody>
-                  <a:tcPr marT="91425" marB="91425" marR="91425" marL="91425" anchor="ctr">
-                    <a:lnL cap="flat" cmpd="sng" w="19050">
-                      <a:solidFill>
-                        <a:schemeClr val="dk1"/>
-                      </a:solidFill>
-                      <a:prstDash val="solid"/>
-                      <a:round/>
-                      <a:headEnd len="sm" w="sm" type="none"/>
-                      <a:tailEnd len="sm" w="sm" type="none"/>
-                    </a:lnL>
-                    <a:lnR cap="flat" cmpd="sng" w="19050">
-                      <a:solidFill>
-                        <a:schemeClr val="dk1"/>
-                      </a:solidFill>
-                      <a:prstDash val="solid"/>
-                      <a:round/>
-                      <a:headEnd len="sm" w="sm" type="none"/>
-                      <a:tailEnd len="sm" w="sm" type="none"/>
-                    </a:lnR>
-                    <a:lnT cap="flat" cmpd="sng" w="19050">
-                      <a:solidFill>
-                        <a:schemeClr val="dk1"/>
-                      </a:solidFill>
-                      <a:prstDash val="solid"/>
-                      <a:round/>
-                      <a:headEnd len="sm" w="sm" type="none"/>
-                      <a:tailEnd len="sm" w="sm" type="none"/>
-                    </a:lnT>
-                    <a:lnB cap="flat" cmpd="sng" w="19050">
-                      <a:solidFill>
-                        <a:schemeClr val="dk1"/>
-                      </a:solidFill>
-                      <a:prstDash val="solid"/>
-                      <a:round/>
-                      <a:headEnd len="sm" w="sm" type="none"/>
-                      <a:tailEnd len="sm" w="sm" type="none"/>
-                    </a:lnB>
-                    <a:solidFill>
-                      <a:srgbClr val="CBDFFF"/>
-                    </a:solidFill>
-                  </a:tcPr>
-                </a:tc>
-                <a:tc>
-                  <a:txBody>
-                    <a:bodyPr/>
-                    <a:lstStyle/>
-                    <a:p>
-                      <a:pPr indent="0" lvl="0" marL="0" rtl="0" algn="l">
-                        <a:lnSpc>
-                          <a:spcPct val="80000"/>
-                        </a:lnSpc>
-                        <a:spcBef>
-                          <a:spcPts val="0"/>
-                        </a:spcBef>
-                        <a:spcAft>
-                          <a:spcPts val="0"/>
-                        </a:spcAft>
-                        <a:buNone/>
-                      </a:pPr>
-                      <a:r>
-                        <a:rPr b="1" lang="en" sz="2000">
-                          <a:solidFill>
-                            <a:schemeClr val="dk1"/>
-                          </a:solidFill>
-                          <a:latin typeface="Times New Roman"/>
-                          <a:ea typeface="Times New Roman"/>
-                          <a:cs typeface="Times New Roman"/>
-                          <a:sym typeface="Times New Roman"/>
-                        </a:rPr>
-                        <a:t>161.7</a:t>
-                      </a:r>
-                      <a:endParaRPr b="1" sz="2000">
-                        <a:solidFill>
-                          <a:schemeClr val="dk1"/>
-                        </a:solidFill>
-                        <a:latin typeface="Times New Roman"/>
-                        <a:ea typeface="Times New Roman"/>
-                        <a:cs typeface="Times New Roman"/>
-                        <a:sym typeface="Times New Roman"/>
-                      </a:endParaRPr>
-                    </a:p>
-                  </a:txBody>
-                  <a:tcPr marT="91425" marB="91425" marR="91425" marL="91425" anchor="ctr">
-                    <a:lnL cap="flat" cmpd="sng" w="19050">
-                      <a:solidFill>
-                        <a:schemeClr val="dk1"/>
-                      </a:solidFill>
-                      <a:prstDash val="solid"/>
-                      <a:round/>
-                      <a:headEnd len="sm" w="sm" type="none"/>
-                      <a:tailEnd len="sm" w="sm" type="none"/>
-                    </a:lnL>
-                    <a:lnR cap="flat" cmpd="sng" w="19050">
-                      <a:solidFill>
-                        <a:schemeClr val="dk1">
-                          <a:alpha val="0"/>
-                        </a:schemeClr>
-                      </a:solidFill>
-                      <a:prstDash val="solid"/>
-                      <a:round/>
-                      <a:headEnd len="sm" w="sm" type="none"/>
-                      <a:tailEnd len="sm" w="sm" type="none"/>
-                    </a:lnR>
-                    <a:lnT cap="flat" cmpd="sng" w="19050">
-                      <a:solidFill>
-                        <a:schemeClr val="dk1"/>
-                      </a:solidFill>
-                      <a:prstDash val="solid"/>
-                      <a:round/>
-                      <a:headEnd len="sm" w="sm" type="none"/>
-                      <a:tailEnd len="sm" w="sm" type="none"/>
-                    </a:lnT>
-                    <a:lnB cap="flat" cmpd="sng" w="19050">
-                      <a:solidFill>
-                        <a:schemeClr val="dk1"/>
-                      </a:solidFill>
-                      <a:prstDash val="solid"/>
-                      <a:round/>
-                      <a:headEnd len="sm" w="sm" type="none"/>
-                      <a:tailEnd len="sm" w="sm" type="none"/>
-                    </a:lnB>
-                    <a:solidFill>
-                      <a:srgbClr val="CBDFFF"/>
-                    </a:solidFill>
-                  </a:tcPr>
-                </a:tc>
-              </a:tr>
-              <a:tr h="381000">
-                <a:tc>
-                  <a:txBody>
-                    <a:bodyPr/>
-                    <a:lstStyle/>
-                    <a:p>
-                      <a:pPr indent="0" lvl="0" marL="0" rtl="0" algn="l">
-                        <a:lnSpc>
-                          <a:spcPct val="80000"/>
-                        </a:lnSpc>
-                        <a:spcBef>
-                          <a:spcPts val="0"/>
-                        </a:spcBef>
-                        <a:spcAft>
-                          <a:spcPts val="0"/>
-                        </a:spcAft>
-                        <a:buClr>
-                          <a:schemeClr val="dk1"/>
-                        </a:buClr>
-                        <a:buSzPts val="1100"/>
-                        <a:buFont typeface="Arial"/>
-                        <a:buNone/>
-                      </a:pPr>
-                      <a:r>
-                        <a:rPr lang="en" sz="2000">
-                          <a:solidFill>
-                            <a:schemeClr val="dk1"/>
-                          </a:solidFill>
-                          <a:latin typeface="Times New Roman"/>
-                          <a:ea typeface="Times New Roman"/>
-                          <a:cs typeface="Times New Roman"/>
-                          <a:sym typeface="Times New Roman"/>
-                        </a:rPr>
-                        <a:t>Municipality - Chelsea</a:t>
-                      </a:r>
-                      <a:endParaRPr sz="2000">
-                        <a:solidFill>
-                          <a:schemeClr val="dk1"/>
-                        </a:solidFill>
-                        <a:latin typeface="Times New Roman"/>
-                        <a:ea typeface="Times New Roman"/>
-                        <a:cs typeface="Times New Roman"/>
-                        <a:sym typeface="Times New Roman"/>
-                      </a:endParaRPr>
-                    </a:p>
-                  </a:txBody>
-                  <a:tcPr marT="91425" marB="91425" marR="91425" marL="91425" anchor="ctr">
-                    <a:lnL cap="flat" cmpd="sng" w="19050">
-                      <a:solidFill>
-                        <a:schemeClr val="dk1">
-                          <a:alpha val="0"/>
-                        </a:schemeClr>
-                      </a:solidFill>
-                      <a:prstDash val="solid"/>
-                      <a:round/>
-                      <a:headEnd len="sm" w="sm" type="none"/>
-                      <a:tailEnd len="sm" w="sm" type="none"/>
-                    </a:lnL>
-                    <a:lnR cap="flat" cmpd="sng" w="19050">
-                      <a:solidFill>
-                        <a:schemeClr val="dk1"/>
-                      </a:solidFill>
-                      <a:prstDash val="solid"/>
-                      <a:round/>
-                      <a:headEnd len="sm" w="sm" type="none"/>
-                      <a:tailEnd len="sm" w="sm" type="none"/>
-                    </a:lnR>
-                    <a:lnT cap="flat" cmpd="sng" w="19050">
-                      <a:solidFill>
-                        <a:schemeClr val="dk1"/>
-                      </a:solidFill>
-                      <a:prstDash val="solid"/>
-                      <a:round/>
-                      <a:headEnd len="sm" w="sm" type="none"/>
-                      <a:tailEnd len="sm" w="sm" type="none"/>
-                    </a:lnT>
-                    <a:lnB cap="flat" cmpd="sng" w="19050">
-                      <a:solidFill>
-                        <a:schemeClr val="dk1"/>
-                      </a:solidFill>
-                      <a:prstDash val="solid"/>
-                      <a:round/>
-                      <a:headEnd len="sm" w="sm" type="none"/>
-                      <a:tailEnd len="sm" w="sm" type="none"/>
-                    </a:lnB>
-                    <a:solidFill>
-                      <a:srgbClr val="D4D8FF"/>
-                    </a:solidFill>
-                  </a:tcPr>
-                </a:tc>
-                <a:tc>
-                  <a:txBody>
-                    <a:bodyPr/>
-                    <a:lstStyle/>
-                    <a:p>
-                      <a:pPr indent="0" lvl="0" marL="0" rtl="0" algn="l">
-                        <a:lnSpc>
-                          <a:spcPct val="80000"/>
-                        </a:lnSpc>
-                        <a:spcBef>
-                          <a:spcPts val="0"/>
-                        </a:spcBef>
-                        <a:spcAft>
-                          <a:spcPts val="0"/>
-                        </a:spcAft>
-                        <a:buNone/>
-                      </a:pPr>
-                      <a:r>
-                        <a:rPr b="1" lang="en" sz="2000">
-                          <a:solidFill>
-                            <a:schemeClr val="dk1"/>
-                          </a:solidFill>
-                          <a:latin typeface="Times New Roman"/>
-                          <a:ea typeface="Times New Roman"/>
-                          <a:cs typeface="Times New Roman"/>
-                          <a:sym typeface="Times New Roman"/>
-                        </a:rPr>
-                        <a:t>-11.05</a:t>
-                      </a:r>
-                      <a:endParaRPr b="1" sz="2000">
-                        <a:solidFill>
-                          <a:schemeClr val="dk1"/>
-                        </a:solidFill>
-                        <a:latin typeface="Times New Roman"/>
-                        <a:ea typeface="Times New Roman"/>
-                        <a:cs typeface="Times New Roman"/>
-                        <a:sym typeface="Times New Roman"/>
-                      </a:endParaRPr>
-                    </a:p>
-                  </a:txBody>
-                  <a:tcPr marT="91425" marB="91425" marR="91425" marL="91425" anchor="ctr">
-                    <a:lnL cap="flat" cmpd="sng" w="19050">
-                      <a:solidFill>
-                        <a:schemeClr val="dk1"/>
-                      </a:solidFill>
-                      <a:prstDash val="solid"/>
-                      <a:round/>
-                      <a:headEnd len="sm" w="sm" type="none"/>
-                      <a:tailEnd len="sm" w="sm" type="none"/>
-                    </a:lnL>
-                    <a:lnR cap="flat" cmpd="sng" w="19050">
-                      <a:solidFill>
-                        <a:schemeClr val="dk1"/>
-                      </a:solidFill>
-                      <a:prstDash val="solid"/>
-                      <a:round/>
-                      <a:headEnd len="sm" w="sm" type="none"/>
-                      <a:tailEnd len="sm" w="sm" type="none"/>
-                    </a:lnR>
-                    <a:lnT cap="flat" cmpd="sng" w="19050">
-                      <a:solidFill>
-                        <a:schemeClr val="dk1"/>
-                      </a:solidFill>
-                      <a:prstDash val="solid"/>
-                      <a:round/>
-                      <a:headEnd len="sm" w="sm" type="none"/>
-                      <a:tailEnd len="sm" w="sm" type="none"/>
-                    </a:lnT>
-                    <a:lnB cap="flat" cmpd="sng" w="19050">
-                      <a:solidFill>
-                        <a:schemeClr val="dk1"/>
-                      </a:solidFill>
-                      <a:prstDash val="solid"/>
-                      <a:round/>
-                      <a:headEnd len="sm" w="sm" type="none"/>
-                      <a:tailEnd len="sm" w="sm" type="none"/>
-                    </a:lnB>
-                    <a:solidFill>
-                      <a:srgbClr val="D4D8FF"/>
-                    </a:solidFill>
-                  </a:tcPr>
-                </a:tc>
-                <a:tc>
-                  <a:txBody>
-                    <a:bodyPr/>
-                    <a:lstStyle/>
-                    <a:p>
-                      <a:pPr indent="0" lvl="0" marL="0" rtl="0" algn="l">
-                        <a:lnSpc>
-                          <a:spcPct val="80000"/>
-                        </a:lnSpc>
-                        <a:spcBef>
-                          <a:spcPts val="0"/>
-                        </a:spcBef>
-                        <a:spcAft>
-                          <a:spcPts val="0"/>
-                        </a:spcAft>
-                        <a:buNone/>
-                      </a:pPr>
-                      <a:r>
-                        <a:rPr lang="en" sz="2000">
-                          <a:latin typeface="Times New Roman"/>
-                          <a:ea typeface="Times New Roman"/>
-                          <a:cs typeface="Times New Roman"/>
-                          <a:sym typeface="Times New Roman"/>
-                        </a:rPr>
-                        <a:t>Seasonal status: </a:t>
-                      </a:r>
-                      <a:endParaRPr sz="2000">
-                        <a:latin typeface="Times New Roman"/>
-                        <a:ea typeface="Times New Roman"/>
-                        <a:cs typeface="Times New Roman"/>
-                        <a:sym typeface="Times New Roman"/>
-                      </a:endParaRPr>
-                    </a:p>
-                    <a:p>
-                      <a:pPr indent="0" lvl="0" marL="0" rtl="0" algn="l">
-                        <a:lnSpc>
-                          <a:spcPct val="80000"/>
-                        </a:lnSpc>
-                        <a:spcBef>
-                          <a:spcPts val="0"/>
-                        </a:spcBef>
-                        <a:spcAft>
-                          <a:spcPts val="0"/>
-                        </a:spcAft>
-                        <a:buNone/>
-                      </a:pPr>
-                      <a:r>
-                        <a:rPr lang="en" sz="2000">
-                          <a:latin typeface="Times New Roman"/>
-                          <a:ea typeface="Times New Roman"/>
-                          <a:cs typeface="Times New Roman"/>
-                          <a:sym typeface="Times New Roman"/>
-                        </a:rPr>
-                        <a:t>year round</a:t>
-                      </a:r>
-                      <a:endParaRPr sz="2000">
-                        <a:solidFill>
-                          <a:schemeClr val="dk1"/>
-                        </a:solidFill>
-                        <a:latin typeface="Times New Roman"/>
-                        <a:ea typeface="Times New Roman"/>
-                        <a:cs typeface="Times New Roman"/>
-                        <a:sym typeface="Times New Roman"/>
-                      </a:endParaRPr>
-                    </a:p>
-                  </a:txBody>
-                  <a:tcPr marT="91425" marB="91425" marR="91425" marL="91425" anchor="ctr">
-                    <a:lnL cap="flat" cmpd="sng" w="19050">
-                      <a:solidFill>
-                        <a:schemeClr val="dk1"/>
-                      </a:solidFill>
-                      <a:prstDash val="solid"/>
-                      <a:round/>
-                      <a:headEnd len="sm" w="sm" type="none"/>
-                      <a:tailEnd len="sm" w="sm" type="none"/>
-                    </a:lnL>
-                    <a:lnR cap="flat" cmpd="sng" w="19050">
-                      <a:solidFill>
-                        <a:schemeClr val="dk1"/>
-                      </a:solidFill>
-                      <a:prstDash val="solid"/>
-                      <a:round/>
-                      <a:headEnd len="sm" w="sm" type="none"/>
-                      <a:tailEnd len="sm" w="sm" type="none"/>
-                    </a:lnR>
-                    <a:lnT cap="flat" cmpd="sng" w="19050">
-                      <a:solidFill>
-                        <a:schemeClr val="dk1"/>
-                      </a:solidFill>
-                      <a:prstDash val="solid"/>
-                      <a:round/>
-                      <a:headEnd len="sm" w="sm" type="none"/>
-                      <a:tailEnd len="sm" w="sm" type="none"/>
-                    </a:lnT>
-                    <a:lnB cap="flat" cmpd="sng" w="19050">
-                      <a:solidFill>
-                        <a:schemeClr val="dk1"/>
-                      </a:solidFill>
-                      <a:prstDash val="solid"/>
-                      <a:round/>
-                      <a:headEnd len="sm" w="sm" type="none"/>
-                      <a:tailEnd len="sm" w="sm" type="none"/>
-                    </a:lnB>
-                    <a:solidFill>
-                      <a:srgbClr val="CBDFFF"/>
-                    </a:solidFill>
-                  </a:tcPr>
-                </a:tc>
-                <a:tc>
-                  <a:txBody>
-                    <a:bodyPr/>
-                    <a:lstStyle/>
-                    <a:p>
-                      <a:pPr indent="0" lvl="0" marL="0" rtl="0" algn="l">
-                        <a:lnSpc>
-                          <a:spcPct val="80000"/>
-                        </a:lnSpc>
-                        <a:spcBef>
-                          <a:spcPts val="0"/>
-                        </a:spcBef>
-                        <a:spcAft>
-                          <a:spcPts val="0"/>
-                        </a:spcAft>
-                        <a:buNone/>
-                      </a:pPr>
-                      <a:r>
-                        <a:rPr b="1" lang="en" sz="2000">
-                          <a:solidFill>
-                            <a:schemeClr val="dk1"/>
-                          </a:solidFill>
-                          <a:latin typeface="Times New Roman"/>
-                          <a:ea typeface="Times New Roman"/>
-                          <a:cs typeface="Times New Roman"/>
-                          <a:sym typeface="Times New Roman"/>
-                        </a:rPr>
-                        <a:t>0.4774</a:t>
-                      </a:r>
-                      <a:endParaRPr b="1" sz="2000">
-                        <a:solidFill>
-                          <a:schemeClr val="dk1"/>
-                        </a:solidFill>
-                        <a:latin typeface="Times New Roman"/>
-                        <a:ea typeface="Times New Roman"/>
-                        <a:cs typeface="Times New Roman"/>
-                        <a:sym typeface="Times New Roman"/>
-                      </a:endParaRPr>
-                    </a:p>
-                  </a:txBody>
-                  <a:tcPr marT="91425" marB="91425" marR="91425" marL="91425" anchor="ctr">
-                    <a:lnL cap="flat" cmpd="sng" w="19050">
-                      <a:solidFill>
-                        <a:schemeClr val="dk1"/>
-                      </a:solidFill>
-                      <a:prstDash val="solid"/>
-                      <a:round/>
-                      <a:headEnd len="sm" w="sm" type="none"/>
-                      <a:tailEnd len="sm" w="sm" type="none"/>
-                    </a:lnL>
-                    <a:lnR cap="flat" cmpd="sng" w="19050">
-                      <a:solidFill>
-                        <a:schemeClr val="dk1"/>
-                      </a:solidFill>
-                      <a:prstDash val="solid"/>
-                      <a:round/>
-                      <a:headEnd len="sm" w="sm" type="none"/>
-                      <a:tailEnd len="sm" w="sm" type="none"/>
-                    </a:lnR>
-                    <a:lnT cap="flat" cmpd="sng" w="19050">
-                      <a:solidFill>
-                        <a:schemeClr val="dk1"/>
-                      </a:solidFill>
-                      <a:prstDash val="solid"/>
-                      <a:round/>
-                      <a:headEnd len="sm" w="sm" type="none"/>
-                      <a:tailEnd len="sm" w="sm" type="none"/>
-                    </a:lnT>
-                    <a:lnB cap="flat" cmpd="sng" w="19050">
-                      <a:solidFill>
-                        <a:schemeClr val="dk1"/>
-                      </a:solidFill>
-                      <a:prstDash val="solid"/>
-                      <a:round/>
-                      <a:headEnd len="sm" w="sm" type="none"/>
-                      <a:tailEnd len="sm" w="sm" type="none"/>
-                    </a:lnB>
-                    <a:solidFill>
-                      <a:srgbClr val="CBDFFF"/>
-                    </a:solidFill>
-                  </a:tcPr>
-                </a:tc>
-                <a:tc>
-                  <a:txBody>
-                    <a:bodyPr/>
-                    <a:lstStyle/>
-                    <a:p>
-                      <a:pPr indent="0" lvl="0" marL="0" rtl="0" algn="l">
-                        <a:lnSpc>
-                          <a:spcPct val="80000"/>
-                        </a:lnSpc>
-                        <a:spcBef>
-                          <a:spcPts val="0"/>
-                        </a:spcBef>
-                        <a:spcAft>
-                          <a:spcPts val="0"/>
-                        </a:spcAft>
-                        <a:buNone/>
-                      </a:pPr>
-                      <a:r>
-                        <a:rPr lang="en" sz="2000">
-                          <a:solidFill>
-                            <a:schemeClr val="dk1"/>
-                          </a:solidFill>
-                          <a:latin typeface="Times New Roman"/>
-                          <a:ea typeface="Times New Roman"/>
-                          <a:cs typeface="Times New Roman"/>
-                          <a:sym typeface="Times New Roman"/>
-                        </a:rPr>
-                        <a:t>Longitude</a:t>
-                      </a:r>
-                      <a:endParaRPr sz="2000">
-                        <a:solidFill>
-                          <a:schemeClr val="dk1"/>
-                        </a:solidFill>
-                        <a:latin typeface="Times New Roman"/>
-                        <a:ea typeface="Times New Roman"/>
-                        <a:cs typeface="Times New Roman"/>
-                        <a:sym typeface="Times New Roman"/>
-                      </a:endParaRPr>
-                    </a:p>
-                  </a:txBody>
-                  <a:tcPr marT="91425" marB="91425" marR="91425" marL="91425" anchor="ctr">
-                    <a:lnL cap="flat" cmpd="sng" w="19050">
-                      <a:solidFill>
-                        <a:schemeClr val="dk1"/>
-                      </a:solidFill>
-                      <a:prstDash val="solid"/>
-                      <a:round/>
-                      <a:headEnd len="sm" w="sm" type="none"/>
-                      <a:tailEnd len="sm" w="sm" type="none"/>
-                    </a:lnL>
-                    <a:lnR cap="flat" cmpd="sng" w="19050">
-                      <a:solidFill>
-                        <a:schemeClr val="dk1"/>
-                      </a:solidFill>
-                      <a:prstDash val="solid"/>
-                      <a:round/>
-                      <a:headEnd len="sm" w="sm" type="none"/>
-                      <a:tailEnd len="sm" w="sm" type="none"/>
-                    </a:lnR>
-                    <a:lnT cap="flat" cmpd="sng" w="19050">
-                      <a:solidFill>
-                        <a:schemeClr val="dk1"/>
-                      </a:solidFill>
-                      <a:prstDash val="solid"/>
-                      <a:round/>
-                      <a:headEnd len="sm" w="sm" type="none"/>
-                      <a:tailEnd len="sm" w="sm" type="none"/>
-                    </a:lnT>
-                    <a:lnB cap="flat" cmpd="sng" w="19050">
-                      <a:solidFill>
-                        <a:schemeClr val="dk1"/>
-                      </a:solidFill>
-                      <a:prstDash val="solid"/>
-                      <a:round/>
-                      <a:headEnd len="sm" w="sm" type="none"/>
-                      <a:tailEnd len="sm" w="sm" type="none"/>
-                    </a:lnB>
-                    <a:solidFill>
-                      <a:srgbClr val="CBDFFF"/>
-                    </a:solidFill>
-                  </a:tcPr>
-                </a:tc>
-                <a:tc>
-                  <a:txBody>
-                    <a:bodyPr/>
-                    <a:lstStyle/>
-                    <a:p>
-                      <a:pPr indent="0" lvl="0" marL="0" rtl="0" algn="l">
-                        <a:lnSpc>
-                          <a:spcPct val="80000"/>
-                        </a:lnSpc>
-                        <a:spcBef>
-                          <a:spcPts val="0"/>
-                        </a:spcBef>
-                        <a:spcAft>
-                          <a:spcPts val="0"/>
-                        </a:spcAft>
-                        <a:buNone/>
-                      </a:pPr>
-                      <a:r>
-                        <a:rPr b="1" lang="en" sz="2000">
-                          <a:solidFill>
-                            <a:schemeClr val="dk1"/>
-                          </a:solidFill>
-                          <a:latin typeface="Times New Roman"/>
-                          <a:ea typeface="Times New Roman"/>
-                          <a:cs typeface="Times New Roman"/>
-                          <a:sym typeface="Times New Roman"/>
-                        </a:rPr>
-                        <a:t>83.31</a:t>
-                      </a:r>
-                      <a:endParaRPr b="1" sz="2000">
-                        <a:solidFill>
-                          <a:schemeClr val="dk1"/>
-                        </a:solidFill>
-                        <a:latin typeface="Times New Roman"/>
-                        <a:ea typeface="Times New Roman"/>
-                        <a:cs typeface="Times New Roman"/>
-                        <a:sym typeface="Times New Roman"/>
-                      </a:endParaRPr>
-                    </a:p>
-                  </a:txBody>
-                  <a:tcPr marT="91425" marB="91425" marR="91425" marL="91425" anchor="ctr">
-                    <a:lnL cap="flat" cmpd="sng" w="19050">
-                      <a:solidFill>
-                        <a:schemeClr val="dk1"/>
-                      </a:solidFill>
-                      <a:prstDash val="solid"/>
-                      <a:round/>
-                      <a:headEnd len="sm" w="sm" type="none"/>
-                      <a:tailEnd len="sm" w="sm" type="none"/>
-                    </a:lnL>
-                    <a:lnR cap="flat" cmpd="sng" w="19050">
-                      <a:solidFill>
-                        <a:schemeClr val="dk1">
-                          <a:alpha val="0"/>
-                        </a:schemeClr>
-                      </a:solidFill>
-                      <a:prstDash val="solid"/>
-                      <a:round/>
-                      <a:headEnd len="sm" w="sm" type="none"/>
-                      <a:tailEnd len="sm" w="sm" type="none"/>
-                    </a:lnR>
-                    <a:lnT cap="flat" cmpd="sng" w="19050">
-                      <a:solidFill>
-                        <a:schemeClr val="dk1"/>
-                      </a:solidFill>
-                      <a:prstDash val="solid"/>
-                      <a:round/>
-                      <a:headEnd len="sm" w="sm" type="none"/>
-                      <a:tailEnd len="sm" w="sm" type="none"/>
-                    </a:lnT>
-                    <a:lnB cap="flat" cmpd="sng" w="19050">
-                      <a:solidFill>
-                        <a:schemeClr val="dk1"/>
-                      </a:solidFill>
-                      <a:prstDash val="solid"/>
-                      <a:round/>
-                      <a:headEnd len="sm" w="sm" type="none"/>
-                      <a:tailEnd len="sm" w="sm" type="none"/>
-                    </a:lnB>
-                    <a:solidFill>
-                      <a:srgbClr val="CBDFFF"/>
-                    </a:solidFill>
-                  </a:tcPr>
-                </a:tc>
-              </a:tr>
-              <a:tr h="381000">
-                <a:tc>
-                  <a:txBody>
-                    <a:bodyPr/>
-                    <a:lstStyle/>
-                    <a:p>
-                      <a:pPr indent="0" lvl="0" marL="0" rtl="0" algn="l">
-                        <a:lnSpc>
-                          <a:spcPct val="80000"/>
-                        </a:lnSpc>
-                        <a:spcBef>
-                          <a:spcPts val="0"/>
-                        </a:spcBef>
-                        <a:spcAft>
-                          <a:spcPts val="0"/>
-                        </a:spcAft>
-                        <a:buClr>
-                          <a:schemeClr val="dk1"/>
-                        </a:buClr>
-                        <a:buSzPts val="1100"/>
-                        <a:buFont typeface="Arial"/>
-                        <a:buNone/>
-                      </a:pPr>
-                      <a:r>
-                        <a:rPr lang="en" sz="2000">
-                          <a:solidFill>
-                            <a:schemeClr val="dk1"/>
-                          </a:solidFill>
-                          <a:latin typeface="Times New Roman"/>
-                          <a:ea typeface="Times New Roman"/>
-                          <a:cs typeface="Times New Roman"/>
-                          <a:sym typeface="Times New Roman"/>
-                        </a:rPr>
-                        <a:t>Municipality - Everett</a:t>
-                      </a:r>
-                      <a:endParaRPr sz="2000">
-                        <a:solidFill>
-                          <a:schemeClr val="dk1"/>
-                        </a:solidFill>
-                        <a:latin typeface="Times New Roman"/>
-                        <a:ea typeface="Times New Roman"/>
-                        <a:cs typeface="Times New Roman"/>
-                        <a:sym typeface="Times New Roman"/>
-                      </a:endParaRPr>
-                    </a:p>
-                  </a:txBody>
-                  <a:tcPr marT="91425" marB="91425" marR="91425" marL="91425" anchor="ctr">
-                    <a:lnL cap="flat" cmpd="sng" w="19050">
-                      <a:solidFill>
-                        <a:schemeClr val="dk1">
-                          <a:alpha val="0"/>
-                        </a:schemeClr>
-                      </a:solidFill>
-                      <a:prstDash val="solid"/>
-                      <a:round/>
-                      <a:headEnd len="sm" w="sm" type="none"/>
-                      <a:tailEnd len="sm" w="sm" type="none"/>
-                    </a:lnL>
-                    <a:lnR cap="flat" cmpd="sng" w="19050">
-                      <a:solidFill>
-                        <a:schemeClr val="dk1"/>
-                      </a:solidFill>
-                      <a:prstDash val="solid"/>
-                      <a:round/>
-                      <a:headEnd len="sm" w="sm" type="none"/>
-                      <a:tailEnd len="sm" w="sm" type="none"/>
-                    </a:lnR>
-                    <a:lnT cap="flat" cmpd="sng" w="19050">
-                      <a:solidFill>
-                        <a:schemeClr val="dk1"/>
-                      </a:solidFill>
-                      <a:prstDash val="solid"/>
-                      <a:round/>
-                      <a:headEnd len="sm" w="sm" type="none"/>
-                      <a:tailEnd len="sm" w="sm" type="none"/>
-                    </a:lnT>
-                    <a:lnB cap="flat" cmpd="sng" w="19050">
-                      <a:solidFill>
-                        <a:schemeClr val="dk1"/>
-                      </a:solidFill>
-                      <a:prstDash val="solid"/>
-                      <a:round/>
-                      <a:headEnd len="sm" w="sm" type="none"/>
-                      <a:tailEnd len="sm" w="sm" type="none"/>
-                    </a:lnB>
-                    <a:solidFill>
-                      <a:srgbClr val="D4D8FF"/>
-                    </a:solidFill>
-                  </a:tcPr>
-                </a:tc>
-                <a:tc>
-                  <a:txBody>
-                    <a:bodyPr/>
-                    <a:lstStyle/>
-                    <a:p>
-                      <a:pPr indent="0" lvl="0" marL="0" rtl="0" algn="l">
-                        <a:lnSpc>
-                          <a:spcPct val="80000"/>
-                        </a:lnSpc>
-                        <a:spcBef>
-                          <a:spcPts val="0"/>
-                        </a:spcBef>
-                        <a:spcAft>
-                          <a:spcPts val="0"/>
-                        </a:spcAft>
-                        <a:buNone/>
-                      </a:pPr>
-                      <a:r>
-                        <a:rPr b="1" lang="en" sz="2000">
-                          <a:solidFill>
-                            <a:schemeClr val="dk1"/>
-                          </a:solidFill>
-                          <a:latin typeface="Times New Roman"/>
-                          <a:ea typeface="Times New Roman"/>
-                          <a:cs typeface="Times New Roman"/>
-                          <a:sym typeface="Times New Roman"/>
-                        </a:rPr>
-                        <a:t>-9.042</a:t>
-                      </a:r>
-                      <a:endParaRPr b="1" sz="2000">
-                        <a:solidFill>
-                          <a:schemeClr val="dk1"/>
-                        </a:solidFill>
-                        <a:latin typeface="Times New Roman"/>
-                        <a:ea typeface="Times New Roman"/>
-                        <a:cs typeface="Times New Roman"/>
-                        <a:sym typeface="Times New Roman"/>
-                      </a:endParaRPr>
-                    </a:p>
-                  </a:txBody>
-                  <a:tcPr marT="91425" marB="91425" marR="91425" marL="91425" anchor="ctr">
-                    <a:lnL cap="flat" cmpd="sng" w="19050">
-                      <a:solidFill>
-                        <a:schemeClr val="dk1"/>
-                      </a:solidFill>
-                      <a:prstDash val="solid"/>
-                      <a:round/>
-                      <a:headEnd len="sm" w="sm" type="none"/>
-                      <a:tailEnd len="sm" w="sm" type="none"/>
-                    </a:lnL>
-                    <a:lnR cap="flat" cmpd="sng" w="19050">
-                      <a:solidFill>
-                        <a:schemeClr val="dk1"/>
-                      </a:solidFill>
-                      <a:prstDash val="solid"/>
-                      <a:round/>
-                      <a:headEnd len="sm" w="sm" type="none"/>
-                      <a:tailEnd len="sm" w="sm" type="none"/>
-                    </a:lnR>
-                    <a:lnT cap="flat" cmpd="sng" w="19050">
-                      <a:solidFill>
-                        <a:schemeClr val="dk1"/>
-                      </a:solidFill>
-                      <a:prstDash val="solid"/>
-                      <a:round/>
-                      <a:headEnd len="sm" w="sm" type="none"/>
-                      <a:tailEnd len="sm" w="sm" type="none"/>
-                    </a:lnT>
-                    <a:lnB cap="flat" cmpd="sng" w="19050">
-                      <a:solidFill>
-                        <a:schemeClr val="dk1"/>
-                      </a:solidFill>
-                      <a:prstDash val="solid"/>
-                      <a:round/>
-                      <a:headEnd len="sm" w="sm" type="none"/>
-                      <a:tailEnd len="sm" w="sm" type="none"/>
-                    </a:lnB>
-                    <a:solidFill>
-                      <a:srgbClr val="D4D8FF"/>
-                    </a:solidFill>
-                  </a:tcPr>
-                </a:tc>
-                <a:tc>
-                  <a:txBody>
-                    <a:bodyPr/>
-                    <a:lstStyle/>
-                    <a:p>
-                      <a:pPr indent="0" lvl="0" marL="0" rtl="0" algn="l">
-                        <a:lnSpc>
-                          <a:spcPct val="80000"/>
-                        </a:lnSpc>
-                        <a:spcBef>
-                          <a:spcPts val="0"/>
-                        </a:spcBef>
-                        <a:spcAft>
-                          <a:spcPts val="0"/>
-                        </a:spcAft>
-                        <a:buNone/>
-                      </a:pPr>
-                      <a:r>
-                        <a:rPr lang="en" sz="2000">
-                          <a:latin typeface="Times New Roman"/>
-                          <a:ea typeface="Times New Roman"/>
-                          <a:cs typeface="Times New Roman"/>
-                          <a:sym typeface="Times New Roman"/>
-                        </a:rPr>
-                        <a:t>Municipality - Boston</a:t>
-                      </a:r>
-                      <a:endParaRPr sz="2000">
-                        <a:solidFill>
-                          <a:schemeClr val="dk1"/>
-                        </a:solidFill>
-                        <a:latin typeface="Times New Roman"/>
-                        <a:ea typeface="Times New Roman"/>
-                        <a:cs typeface="Times New Roman"/>
-                        <a:sym typeface="Times New Roman"/>
-                      </a:endParaRPr>
-                    </a:p>
-                  </a:txBody>
-                  <a:tcPr marT="91425" marB="91425" marR="91425" marL="91425" anchor="ctr">
-                    <a:lnL cap="flat" cmpd="sng" w="19050">
-                      <a:solidFill>
-                        <a:schemeClr val="dk1"/>
-                      </a:solidFill>
-                      <a:prstDash val="solid"/>
-                      <a:round/>
-                      <a:headEnd len="sm" w="sm" type="none"/>
-                      <a:tailEnd len="sm" w="sm" type="none"/>
-                    </a:lnL>
-                    <a:lnR cap="flat" cmpd="sng" w="19050">
-                      <a:solidFill>
-                        <a:schemeClr val="dk1"/>
-                      </a:solidFill>
-                      <a:prstDash val="solid"/>
-                      <a:round/>
-                      <a:headEnd len="sm" w="sm" type="none"/>
-                      <a:tailEnd len="sm" w="sm" type="none"/>
-                    </a:lnR>
-                    <a:lnT cap="flat" cmpd="sng" w="19050">
-                      <a:solidFill>
-                        <a:schemeClr val="dk1"/>
-                      </a:solidFill>
-                      <a:prstDash val="solid"/>
-                      <a:round/>
-                      <a:headEnd len="sm" w="sm" type="none"/>
-                      <a:tailEnd len="sm" w="sm" type="none"/>
-                    </a:lnT>
-                    <a:lnB cap="flat" cmpd="sng" w="19050">
-                      <a:solidFill>
-                        <a:schemeClr val="dk1"/>
-                      </a:solidFill>
-                      <a:prstDash val="solid"/>
-                      <a:round/>
-                      <a:headEnd len="sm" w="sm" type="none"/>
-                      <a:tailEnd len="sm" w="sm" type="none"/>
-                    </a:lnB>
-                    <a:solidFill>
-                      <a:srgbClr val="CBDFFF"/>
-                    </a:solidFill>
-                  </a:tcPr>
-                </a:tc>
-                <a:tc>
-                  <a:txBody>
-                    <a:bodyPr/>
-                    <a:lstStyle/>
-                    <a:p>
-                      <a:pPr indent="0" lvl="0" marL="0" rtl="0" algn="l">
-                        <a:lnSpc>
-                          <a:spcPct val="80000"/>
-                        </a:lnSpc>
-                        <a:spcBef>
-                          <a:spcPts val="0"/>
-                        </a:spcBef>
-                        <a:spcAft>
-                          <a:spcPts val="0"/>
-                        </a:spcAft>
-                        <a:buNone/>
-                      </a:pPr>
-                      <a:r>
-                        <a:rPr b="1" lang="en" sz="2000">
-                          <a:solidFill>
-                            <a:schemeClr val="dk1"/>
-                          </a:solidFill>
-                          <a:latin typeface="Times New Roman"/>
-                          <a:ea typeface="Times New Roman"/>
-                          <a:cs typeface="Times New Roman"/>
-                          <a:sym typeface="Times New Roman"/>
-                        </a:rPr>
-                        <a:t>11</a:t>
-                      </a:r>
-                      <a:endParaRPr b="1" sz="2000">
-                        <a:solidFill>
-                          <a:schemeClr val="dk1"/>
-                        </a:solidFill>
-                        <a:latin typeface="Times New Roman"/>
-                        <a:ea typeface="Times New Roman"/>
-                        <a:cs typeface="Times New Roman"/>
-                        <a:sym typeface="Times New Roman"/>
-                      </a:endParaRPr>
-                    </a:p>
-                  </a:txBody>
-                  <a:tcPr marT="91425" marB="91425" marR="91425" marL="91425" anchor="ctr">
-                    <a:lnL cap="flat" cmpd="sng" w="19050">
-                      <a:solidFill>
-                        <a:schemeClr val="dk1"/>
-                      </a:solidFill>
-                      <a:prstDash val="solid"/>
-                      <a:round/>
-                      <a:headEnd len="sm" w="sm" type="none"/>
-                      <a:tailEnd len="sm" w="sm" type="none"/>
-                    </a:lnL>
-                    <a:lnR cap="flat" cmpd="sng" w="19050">
-                      <a:solidFill>
-                        <a:schemeClr val="dk1"/>
-                      </a:solidFill>
-                      <a:prstDash val="solid"/>
-                      <a:round/>
-                      <a:headEnd len="sm" w="sm" type="none"/>
-                      <a:tailEnd len="sm" w="sm" type="none"/>
-                    </a:lnR>
-                    <a:lnT cap="flat" cmpd="sng" w="19050">
-                      <a:solidFill>
-                        <a:schemeClr val="dk1"/>
-                      </a:solidFill>
-                      <a:prstDash val="solid"/>
-                      <a:round/>
-                      <a:headEnd len="sm" w="sm" type="none"/>
-                      <a:tailEnd len="sm" w="sm" type="none"/>
-                    </a:lnT>
-                    <a:lnB cap="flat" cmpd="sng" w="19050">
-                      <a:solidFill>
-                        <a:schemeClr val="dk1"/>
-                      </a:solidFill>
-                      <a:prstDash val="solid"/>
-                      <a:round/>
-                      <a:headEnd len="sm" w="sm" type="none"/>
-                      <a:tailEnd len="sm" w="sm" type="none"/>
-                    </a:lnB>
-                    <a:solidFill>
-                      <a:srgbClr val="CBDFFF"/>
-                    </a:solidFill>
-                  </a:tcPr>
-                </a:tc>
-                <a:tc>
-                  <a:txBody>
-                    <a:bodyPr/>
-                    <a:lstStyle/>
-                    <a:p>
-                      <a:pPr indent="0" lvl="0" marL="0" rtl="0" algn="l">
-                        <a:lnSpc>
-                          <a:spcPct val="80000"/>
-                        </a:lnSpc>
-                        <a:spcBef>
-                          <a:spcPts val="0"/>
-                        </a:spcBef>
-                        <a:spcAft>
-                          <a:spcPts val="0"/>
-                        </a:spcAft>
-                        <a:buNone/>
-                      </a:pPr>
-                      <a:r>
-                        <a:rPr lang="en" sz="2000">
-                          <a:solidFill>
-                            <a:schemeClr val="dk1"/>
-                          </a:solidFill>
-                          <a:latin typeface="Times New Roman"/>
-                          <a:ea typeface="Times New Roman"/>
-                          <a:cs typeface="Times New Roman"/>
-                          <a:sym typeface="Times New Roman"/>
-                        </a:rPr>
-                        <a:t>Number of Trips made </a:t>
-                      </a:r>
-                      <a:endParaRPr sz="2000">
-                        <a:solidFill>
-                          <a:schemeClr val="dk1"/>
-                        </a:solidFill>
-                        <a:latin typeface="Times New Roman"/>
-                        <a:ea typeface="Times New Roman"/>
-                        <a:cs typeface="Times New Roman"/>
-                        <a:sym typeface="Times New Roman"/>
-                      </a:endParaRPr>
-                    </a:p>
-                    <a:p>
-                      <a:pPr indent="0" lvl="0" marL="0" rtl="0" algn="l">
-                        <a:lnSpc>
-                          <a:spcPct val="80000"/>
-                        </a:lnSpc>
-                        <a:spcBef>
-                          <a:spcPts val="0"/>
-                        </a:spcBef>
-                        <a:spcAft>
-                          <a:spcPts val="0"/>
-                        </a:spcAft>
-                        <a:buNone/>
-                      </a:pPr>
-                      <a:r>
-                        <a:rPr lang="en" sz="2000">
-                          <a:solidFill>
-                            <a:schemeClr val="dk1"/>
-                          </a:solidFill>
-                          <a:latin typeface="Times New Roman"/>
-                          <a:ea typeface="Times New Roman"/>
-                          <a:cs typeface="Times New Roman"/>
-                          <a:sym typeface="Times New Roman"/>
-                        </a:rPr>
-                        <a:t>by Subscribers</a:t>
-                      </a:r>
-                      <a:endParaRPr sz="2000">
-                        <a:solidFill>
-                          <a:schemeClr val="dk1"/>
-                        </a:solidFill>
-                        <a:latin typeface="Times New Roman"/>
-                        <a:ea typeface="Times New Roman"/>
-                        <a:cs typeface="Times New Roman"/>
-                        <a:sym typeface="Times New Roman"/>
-                      </a:endParaRPr>
-                    </a:p>
-                  </a:txBody>
-                  <a:tcPr marT="91425" marB="91425" marR="91425" marL="91425" anchor="ctr">
-                    <a:lnL cap="flat" cmpd="sng" w="19050">
-                      <a:solidFill>
-                        <a:schemeClr val="dk1"/>
-                      </a:solidFill>
-                      <a:prstDash val="solid"/>
-                      <a:round/>
-                      <a:headEnd len="sm" w="sm" type="none"/>
-                      <a:tailEnd len="sm" w="sm" type="none"/>
-                    </a:lnL>
-                    <a:lnR cap="flat" cmpd="sng" w="19050">
-                      <a:solidFill>
-                        <a:schemeClr val="dk1"/>
-                      </a:solidFill>
-                      <a:prstDash val="solid"/>
-                      <a:round/>
-                      <a:headEnd len="sm" w="sm" type="none"/>
-                      <a:tailEnd len="sm" w="sm" type="none"/>
-                    </a:lnR>
-                    <a:lnT cap="flat" cmpd="sng" w="19050">
-                      <a:solidFill>
-                        <a:schemeClr val="dk1"/>
-                      </a:solidFill>
-                      <a:prstDash val="solid"/>
-                      <a:round/>
-                      <a:headEnd len="sm" w="sm" type="none"/>
-                      <a:tailEnd len="sm" w="sm" type="none"/>
-                    </a:lnT>
-                    <a:lnB cap="flat" cmpd="sng" w="19050">
-                      <a:solidFill>
-                        <a:schemeClr val="dk1"/>
-                      </a:solidFill>
-                      <a:prstDash val="solid"/>
-                      <a:round/>
-                      <a:headEnd len="sm" w="sm" type="none"/>
-                      <a:tailEnd len="sm" w="sm" type="none"/>
-                    </a:lnB>
-                    <a:solidFill>
-                      <a:srgbClr val="CBDFFF"/>
-                    </a:solidFill>
-                  </a:tcPr>
-                </a:tc>
-                <a:tc>
-                  <a:txBody>
-                    <a:bodyPr/>
-                    <a:lstStyle/>
-                    <a:p>
-                      <a:pPr indent="0" lvl="0" marL="0" rtl="0" algn="l">
-                        <a:lnSpc>
-                          <a:spcPct val="80000"/>
-                        </a:lnSpc>
-                        <a:spcBef>
-                          <a:spcPts val="0"/>
-                        </a:spcBef>
-                        <a:spcAft>
-                          <a:spcPts val="0"/>
-                        </a:spcAft>
-                        <a:buNone/>
-                      </a:pPr>
-                      <a:r>
-                        <a:rPr b="1" lang="en" sz="2000">
-                          <a:solidFill>
-                            <a:schemeClr val="dk1"/>
-                          </a:solidFill>
-                          <a:latin typeface="Times New Roman"/>
-                          <a:ea typeface="Times New Roman"/>
-                          <a:cs typeface="Times New Roman"/>
-                          <a:sym typeface="Times New Roman"/>
-                        </a:rPr>
-                        <a:t>1.296</a:t>
-                      </a:r>
-                      <a:endParaRPr b="1" sz="2000">
-                        <a:solidFill>
-                          <a:schemeClr val="dk1"/>
-                        </a:solidFill>
-                        <a:latin typeface="Times New Roman"/>
-                        <a:ea typeface="Times New Roman"/>
-                        <a:cs typeface="Times New Roman"/>
-                        <a:sym typeface="Times New Roman"/>
-                      </a:endParaRPr>
-                    </a:p>
-                  </a:txBody>
-                  <a:tcPr marT="91425" marB="91425" marR="91425" marL="91425" anchor="ctr">
-                    <a:lnL cap="flat" cmpd="sng" w="19050">
-                      <a:solidFill>
-                        <a:schemeClr val="dk1"/>
-                      </a:solidFill>
-                      <a:prstDash val="solid"/>
-                      <a:round/>
-                      <a:headEnd len="sm" w="sm" type="none"/>
-                      <a:tailEnd len="sm" w="sm" type="none"/>
-                    </a:lnL>
-                    <a:lnR cap="flat" cmpd="sng" w="19050">
-                      <a:solidFill>
-                        <a:schemeClr val="dk1">
-                          <a:alpha val="0"/>
-                        </a:schemeClr>
-                      </a:solidFill>
-                      <a:prstDash val="solid"/>
-                      <a:round/>
-                      <a:headEnd len="sm" w="sm" type="none"/>
-                      <a:tailEnd len="sm" w="sm" type="none"/>
-                    </a:lnR>
-                    <a:lnT cap="flat" cmpd="sng" w="19050">
-                      <a:solidFill>
-                        <a:schemeClr val="dk1"/>
-                      </a:solidFill>
-                      <a:prstDash val="solid"/>
-                      <a:round/>
-                      <a:headEnd len="sm" w="sm" type="none"/>
-                      <a:tailEnd len="sm" w="sm" type="none"/>
-                    </a:lnT>
-                    <a:lnB cap="flat" cmpd="sng" w="19050">
-                      <a:solidFill>
-                        <a:schemeClr val="dk1"/>
-                      </a:solidFill>
-                      <a:prstDash val="solid"/>
-                      <a:round/>
-                      <a:headEnd len="sm" w="sm" type="none"/>
-                      <a:tailEnd len="sm" w="sm" type="none"/>
-                    </a:lnB>
-                    <a:solidFill>
-                      <a:srgbClr val="CBDFFF"/>
-                    </a:solidFill>
-                  </a:tcPr>
-                </a:tc>
-              </a:tr>
-              <a:tr h="381000">
-                <a:tc>
-                  <a:txBody>
-                    <a:bodyPr/>
-                    <a:lstStyle/>
-                    <a:p>
-                      <a:pPr indent="0" lvl="0" marL="0" rtl="0" algn="l">
-                        <a:lnSpc>
-                          <a:spcPct val="80000"/>
-                        </a:lnSpc>
-                        <a:spcBef>
-                          <a:spcPts val="0"/>
-                        </a:spcBef>
-                        <a:spcAft>
-                          <a:spcPts val="0"/>
-                        </a:spcAft>
-                        <a:buClr>
-                          <a:schemeClr val="dk1"/>
-                        </a:buClr>
-                        <a:buSzPts val="1100"/>
-                        <a:buFont typeface="Arial"/>
-                        <a:buNone/>
-                      </a:pPr>
-                      <a:r>
-                        <a:rPr lang="en" sz="2000">
-                          <a:solidFill>
-                            <a:schemeClr val="dk1"/>
-                          </a:solidFill>
-                          <a:latin typeface="Times New Roman"/>
-                          <a:ea typeface="Times New Roman"/>
-                          <a:cs typeface="Times New Roman"/>
-                          <a:sym typeface="Times New Roman"/>
-                        </a:rPr>
-                        <a:t>Municipality - Malden</a:t>
-                      </a:r>
-                      <a:endParaRPr sz="2000">
-                        <a:solidFill>
-                          <a:schemeClr val="dk1"/>
-                        </a:solidFill>
-                        <a:latin typeface="Times New Roman"/>
-                        <a:ea typeface="Times New Roman"/>
-                        <a:cs typeface="Times New Roman"/>
-                        <a:sym typeface="Times New Roman"/>
-                      </a:endParaRPr>
-                    </a:p>
-                  </a:txBody>
-                  <a:tcPr marT="91425" marB="91425" marR="91425" marL="91425" anchor="ctr">
-                    <a:lnL cap="flat" cmpd="sng" w="19050">
-                      <a:solidFill>
-                        <a:schemeClr val="dk1">
-                          <a:alpha val="0"/>
-                        </a:schemeClr>
-                      </a:solidFill>
-                      <a:prstDash val="solid"/>
-                      <a:round/>
-                      <a:headEnd len="sm" w="sm" type="none"/>
-                      <a:tailEnd len="sm" w="sm" type="none"/>
-                    </a:lnL>
-                    <a:lnR cap="flat" cmpd="sng" w="19050">
-                      <a:solidFill>
-                        <a:schemeClr val="dk1"/>
-                      </a:solidFill>
-                      <a:prstDash val="solid"/>
-                      <a:round/>
-                      <a:headEnd len="sm" w="sm" type="none"/>
-                      <a:tailEnd len="sm" w="sm" type="none"/>
-                    </a:lnR>
-                    <a:lnT cap="flat" cmpd="sng" w="19050">
-                      <a:solidFill>
-                        <a:schemeClr val="dk1"/>
-                      </a:solidFill>
-                      <a:prstDash val="solid"/>
-                      <a:round/>
-                      <a:headEnd len="sm" w="sm" type="none"/>
-                      <a:tailEnd len="sm" w="sm" type="none"/>
-                    </a:lnT>
-                    <a:lnB cap="flat" cmpd="sng" w="19050">
-                      <a:solidFill>
-                        <a:schemeClr val="dk1"/>
-                      </a:solidFill>
-                      <a:prstDash val="solid"/>
-                      <a:round/>
-                      <a:headEnd len="sm" w="sm" type="none"/>
-                      <a:tailEnd len="sm" w="sm" type="none"/>
-                    </a:lnB>
-                    <a:solidFill>
-                      <a:srgbClr val="D4D8FF"/>
-                    </a:solidFill>
-                  </a:tcPr>
-                </a:tc>
-                <a:tc>
-                  <a:txBody>
-                    <a:bodyPr/>
-                    <a:lstStyle/>
-                    <a:p>
-                      <a:pPr indent="0" lvl="0" marL="0" rtl="0" algn="l">
-                        <a:lnSpc>
-                          <a:spcPct val="80000"/>
-                        </a:lnSpc>
-                        <a:spcBef>
-                          <a:spcPts val="0"/>
-                        </a:spcBef>
-                        <a:spcAft>
-                          <a:spcPts val="0"/>
-                        </a:spcAft>
-                        <a:buNone/>
-                      </a:pPr>
-                      <a:r>
-                        <a:rPr b="1" lang="en" sz="2000">
-                          <a:solidFill>
-                            <a:schemeClr val="dk1"/>
-                          </a:solidFill>
-                          <a:latin typeface="Times New Roman"/>
-                          <a:ea typeface="Times New Roman"/>
-                          <a:cs typeface="Times New Roman"/>
-                          <a:sym typeface="Times New Roman"/>
-                        </a:rPr>
-                        <a:t>-14.79</a:t>
-                      </a:r>
-                      <a:endParaRPr b="1" sz="2000">
-                        <a:solidFill>
-                          <a:schemeClr val="dk1"/>
-                        </a:solidFill>
-                        <a:latin typeface="Times New Roman"/>
-                        <a:ea typeface="Times New Roman"/>
-                        <a:cs typeface="Times New Roman"/>
-                        <a:sym typeface="Times New Roman"/>
-                      </a:endParaRPr>
-                    </a:p>
-                  </a:txBody>
-                  <a:tcPr marT="91425" marB="91425" marR="91425" marL="91425" anchor="ctr">
-                    <a:lnL cap="flat" cmpd="sng" w="19050">
-                      <a:solidFill>
-                        <a:schemeClr val="dk1"/>
-                      </a:solidFill>
-                      <a:prstDash val="solid"/>
-                      <a:round/>
-                      <a:headEnd len="sm" w="sm" type="none"/>
-                      <a:tailEnd len="sm" w="sm" type="none"/>
-                    </a:lnL>
-                    <a:lnR cap="flat" cmpd="sng" w="19050">
-                      <a:solidFill>
-                        <a:schemeClr val="dk1"/>
-                      </a:solidFill>
-                      <a:prstDash val="solid"/>
-                      <a:round/>
-                      <a:headEnd len="sm" w="sm" type="none"/>
-                      <a:tailEnd len="sm" w="sm" type="none"/>
-                    </a:lnR>
-                    <a:lnT cap="flat" cmpd="sng" w="19050">
-                      <a:solidFill>
-                        <a:schemeClr val="dk1"/>
-                      </a:solidFill>
-                      <a:prstDash val="solid"/>
-                      <a:round/>
-                      <a:headEnd len="sm" w="sm" type="none"/>
-                      <a:tailEnd len="sm" w="sm" type="none"/>
-                    </a:lnT>
-                    <a:lnB cap="flat" cmpd="sng" w="19050">
-                      <a:solidFill>
-                        <a:schemeClr val="dk1"/>
-                      </a:solidFill>
-                      <a:prstDash val="solid"/>
-                      <a:round/>
-                      <a:headEnd len="sm" w="sm" type="none"/>
-                      <a:tailEnd len="sm" w="sm" type="none"/>
-                    </a:lnB>
-                    <a:solidFill>
-                      <a:srgbClr val="D4D8FF"/>
-                    </a:solidFill>
-                  </a:tcPr>
-                </a:tc>
-                <a:tc>
-                  <a:txBody>
-                    <a:bodyPr/>
-                    <a:lstStyle/>
-                    <a:p>
-                      <a:pPr indent="0" lvl="0" marL="0" rtl="0" algn="l">
-                        <a:lnSpc>
-                          <a:spcPct val="80000"/>
-                        </a:lnSpc>
-                        <a:spcBef>
-                          <a:spcPts val="0"/>
-                        </a:spcBef>
-                        <a:spcAft>
-                          <a:spcPts val="0"/>
-                        </a:spcAft>
-                        <a:buNone/>
-                      </a:pPr>
-                      <a:r>
-                        <a:rPr lang="en" sz="2000">
-                          <a:latin typeface="Times New Roman"/>
-                          <a:ea typeface="Times New Roman"/>
-                          <a:cs typeface="Times New Roman"/>
-                          <a:sym typeface="Times New Roman"/>
-                        </a:rPr>
-                        <a:t>Municipality - Brookline</a:t>
-                      </a:r>
-                      <a:endParaRPr sz="2000">
-                        <a:solidFill>
-                          <a:schemeClr val="dk1"/>
-                        </a:solidFill>
-                        <a:latin typeface="Times New Roman"/>
-                        <a:ea typeface="Times New Roman"/>
-                        <a:cs typeface="Times New Roman"/>
-                        <a:sym typeface="Times New Roman"/>
-                      </a:endParaRPr>
-                    </a:p>
-                  </a:txBody>
-                  <a:tcPr marT="91425" marB="91425" marR="91425" marL="91425" anchor="ctr">
-                    <a:lnL cap="flat" cmpd="sng" w="19050">
-                      <a:solidFill>
-                        <a:schemeClr val="dk1"/>
-                      </a:solidFill>
-                      <a:prstDash val="solid"/>
-                      <a:round/>
-                      <a:headEnd len="sm" w="sm" type="none"/>
-                      <a:tailEnd len="sm" w="sm" type="none"/>
-                    </a:lnL>
-                    <a:lnR cap="flat" cmpd="sng" w="19050">
-                      <a:solidFill>
-                        <a:schemeClr val="dk1"/>
-                      </a:solidFill>
-                      <a:prstDash val="solid"/>
-                      <a:round/>
-                      <a:headEnd len="sm" w="sm" type="none"/>
-                      <a:tailEnd len="sm" w="sm" type="none"/>
-                    </a:lnR>
-                    <a:lnT cap="flat" cmpd="sng" w="19050">
-                      <a:solidFill>
-                        <a:schemeClr val="dk1"/>
-                      </a:solidFill>
-                      <a:prstDash val="solid"/>
-                      <a:round/>
-                      <a:headEnd len="sm" w="sm" type="none"/>
-                      <a:tailEnd len="sm" w="sm" type="none"/>
-                    </a:lnT>
-                    <a:lnB cap="flat" cmpd="sng" w="19050">
-                      <a:solidFill>
-                        <a:schemeClr val="dk1"/>
-                      </a:solidFill>
-                      <a:prstDash val="solid"/>
-                      <a:round/>
-                      <a:headEnd len="sm" w="sm" type="none"/>
-                      <a:tailEnd len="sm" w="sm" type="none"/>
-                    </a:lnB>
-                    <a:solidFill>
-                      <a:srgbClr val="CBDFFF"/>
-                    </a:solidFill>
-                  </a:tcPr>
-                </a:tc>
-                <a:tc>
-                  <a:txBody>
-                    <a:bodyPr/>
-                    <a:lstStyle/>
-                    <a:p>
-                      <a:pPr indent="0" lvl="0" marL="0" rtl="0" algn="l">
-                        <a:lnSpc>
-                          <a:spcPct val="80000"/>
-                        </a:lnSpc>
-                        <a:spcBef>
-                          <a:spcPts val="0"/>
-                        </a:spcBef>
-                        <a:spcAft>
-                          <a:spcPts val="0"/>
-                        </a:spcAft>
-                        <a:buNone/>
-                      </a:pPr>
-                      <a:r>
-                        <a:rPr b="1" lang="en" sz="2000">
-                          <a:solidFill>
-                            <a:schemeClr val="dk1"/>
-                          </a:solidFill>
-                          <a:latin typeface="Times New Roman"/>
-                          <a:ea typeface="Times New Roman"/>
-                          <a:cs typeface="Times New Roman"/>
-                          <a:sym typeface="Times New Roman"/>
-                        </a:rPr>
-                        <a:t>8.073</a:t>
-                      </a:r>
-                      <a:endParaRPr b="1" sz="2000">
-                        <a:solidFill>
-                          <a:schemeClr val="dk1"/>
-                        </a:solidFill>
+                      <a:endParaRPr b="1" sz="2100">
                         <a:latin typeface="Times New Roman"/>
                         <a:ea typeface="Times New Roman"/>
                         <a:cs typeface="Times New Roman"/>
@@ -13993,132 +13141,7 @@
                         <a:buNone/>
                       </a:pPr>
                       <a:r>
-                        <a:t/>
-                      </a:r>
-                      <a:endParaRPr sz="2000"/>
-                    </a:p>
-                  </a:txBody>
-                  <a:tcPr marT="91425" marB="91425" marR="91425" marL="91425" anchor="ctr">
-                    <a:lnL cap="flat" cmpd="sng" w="19050">
-                      <a:solidFill>
-                        <a:schemeClr val="dk1"/>
-                      </a:solidFill>
-                      <a:prstDash val="solid"/>
-                      <a:round/>
-                      <a:headEnd len="sm" w="sm" type="none"/>
-                      <a:tailEnd len="sm" w="sm" type="none"/>
-                    </a:lnL>
-                    <a:lnR cap="flat" cmpd="sng" w="19050">
-                      <a:solidFill>
-                        <a:schemeClr val="dk1"/>
-                      </a:solidFill>
-                      <a:prstDash val="solid"/>
-                      <a:round/>
-                      <a:headEnd len="sm" w="sm" type="none"/>
-                      <a:tailEnd len="sm" w="sm" type="none"/>
-                    </a:lnR>
-                    <a:lnT cap="flat" cmpd="sng" w="19050">
-                      <a:solidFill>
-                        <a:schemeClr val="dk1"/>
-                      </a:solidFill>
-                      <a:prstDash val="solid"/>
-                      <a:round/>
-                      <a:headEnd len="sm" w="sm" type="none"/>
-                      <a:tailEnd len="sm" w="sm" type="none"/>
-                    </a:lnT>
-                    <a:lnB cap="flat" cmpd="sng" w="19050">
-                      <a:solidFill>
-                        <a:schemeClr val="dk1"/>
-                      </a:solidFill>
-                      <a:prstDash val="solid"/>
-                      <a:round/>
-                      <a:headEnd len="sm" w="sm" type="none"/>
-                      <a:tailEnd len="sm" w="sm" type="none"/>
-                    </a:lnB>
-                  </a:tcPr>
-                </a:tc>
-                <a:tc>
-                  <a:txBody>
-                    <a:bodyPr/>
-                    <a:lstStyle/>
-                    <a:p>
-                      <a:pPr indent="0" lvl="0" marL="0" rtl="0" algn="l">
-                        <a:spcBef>
-                          <a:spcPts val="0"/>
-                        </a:spcBef>
-                        <a:spcAft>
-                          <a:spcPts val="0"/>
-                        </a:spcAft>
-                        <a:buNone/>
-                      </a:pPr>
-                      <a:r>
-                        <a:t/>
-                      </a:r>
-                      <a:endParaRPr sz="2000"/>
-                    </a:p>
-                  </a:txBody>
-                  <a:tcPr marT="91425" marB="91425" marR="91425" marL="91425" anchor="ctr">
-                    <a:lnL cap="flat" cmpd="sng" w="19050">
-                      <a:solidFill>
-                        <a:schemeClr val="dk1"/>
-                      </a:solidFill>
-                      <a:prstDash val="solid"/>
-                      <a:round/>
-                      <a:headEnd len="sm" w="sm" type="none"/>
-                      <a:tailEnd len="sm" w="sm" type="none"/>
-                    </a:lnL>
-                    <a:lnR cap="flat" cmpd="sng" w="19050">
-                      <a:solidFill>
-                        <a:schemeClr val="dk1">
-                          <a:alpha val="0"/>
-                        </a:schemeClr>
-                      </a:solidFill>
-                      <a:prstDash val="solid"/>
-                      <a:round/>
-                      <a:headEnd len="sm" w="sm" type="none"/>
-                      <a:tailEnd len="sm" w="sm" type="none"/>
-                    </a:lnR>
-                    <a:lnT cap="flat" cmpd="sng" w="19050">
-                      <a:solidFill>
-                        <a:schemeClr val="dk1"/>
-                      </a:solidFill>
-                      <a:prstDash val="solid"/>
-                      <a:round/>
-                      <a:headEnd len="sm" w="sm" type="none"/>
-                      <a:tailEnd len="sm" w="sm" type="none"/>
-                    </a:lnT>
-                    <a:lnB cap="flat" cmpd="sng" w="19050">
-                      <a:solidFill>
-                        <a:schemeClr val="dk1"/>
-                      </a:solidFill>
-                      <a:prstDash val="solid"/>
-                      <a:round/>
-                      <a:headEnd len="sm" w="sm" type="none"/>
-                      <a:tailEnd len="sm" w="sm" type="none"/>
-                    </a:lnB>
-                  </a:tcPr>
-                </a:tc>
-              </a:tr>
-              <a:tr h="381000">
-                <a:tc>
-                  <a:txBody>
-                    <a:bodyPr/>
-                    <a:lstStyle/>
-                    <a:p>
-                      <a:pPr indent="0" lvl="0" marL="0" rtl="0" algn="l">
-                        <a:lnSpc>
-                          <a:spcPct val="80000"/>
-                        </a:lnSpc>
-                        <a:spcBef>
-                          <a:spcPts val="0"/>
-                        </a:spcBef>
-                        <a:spcAft>
-                          <a:spcPts val="0"/>
-                        </a:spcAft>
-                        <a:buNone/>
-                      </a:pPr>
-                      <a:r>
-                        <a:rPr lang="en" sz="2000">
+                        <a:rPr lang="en" sz="2100">
                           <a:solidFill>
                             <a:schemeClr val="dk1"/>
                           </a:solidFill>
@@ -14127,12 +13150,9 @@
                           <a:cs typeface="Times New Roman"/>
                           <a:sym typeface="Times New Roman"/>
                         </a:rPr>
-                        <a:t>Municipality - Medford</a:t>
+                        <a:t>n_mbta_1km:membership_total   </a:t>
                       </a:r>
-                      <a:endParaRPr sz="2000">
-                        <a:solidFill>
-                          <a:schemeClr val="dk1"/>
-                        </a:solidFill>
+                      <a:endParaRPr sz="2100">
                         <a:latin typeface="Times New Roman"/>
                         <a:ea typeface="Times New Roman"/>
                         <a:cs typeface="Times New Roman"/>
@@ -14143,9 +13163,7 @@
                   <a:tcPr marT="91425" marB="91425" marR="91425" marL="91425" anchor="ctr">
                     <a:lnL cap="flat" cmpd="sng" w="19050">
                       <a:solidFill>
-                        <a:schemeClr val="dk1">
-                          <a:alpha val="0"/>
-                        </a:schemeClr>
+                        <a:schemeClr val="dk1"/>
                       </a:solidFill>
                       <a:prstDash val="solid"/>
                       <a:round/>
@@ -14181,249 +13199,6 @@
                     </a:lnB>
                     <a:solidFill>
                       <a:srgbClr val="D4D8FF"/>
-                    </a:solidFill>
-                  </a:tcPr>
-                </a:tc>
-                <a:tc>
-                  <a:txBody>
-                    <a:bodyPr/>
-                    <a:lstStyle/>
-                    <a:p>
-                      <a:pPr indent="0" lvl="0" marL="0" rtl="0" algn="l">
-                        <a:lnSpc>
-                          <a:spcPct val="80000"/>
-                        </a:lnSpc>
-                        <a:spcBef>
-                          <a:spcPts val="0"/>
-                        </a:spcBef>
-                        <a:spcAft>
-                          <a:spcPts val="0"/>
-                        </a:spcAft>
-                        <a:buNone/>
-                      </a:pPr>
-                      <a:r>
-                        <a:rPr b="1" lang="en" sz="2000">
-                          <a:solidFill>
-                            <a:schemeClr val="dk1"/>
-                          </a:solidFill>
-                          <a:latin typeface="Times New Roman"/>
-                          <a:ea typeface="Times New Roman"/>
-                          <a:cs typeface="Times New Roman"/>
-                          <a:sym typeface="Times New Roman"/>
-                        </a:rPr>
-                        <a:t>-8.434</a:t>
-                      </a:r>
-                      <a:endParaRPr b="1" sz="2000">
-                        <a:solidFill>
-                          <a:schemeClr val="dk1"/>
-                        </a:solidFill>
-                        <a:latin typeface="Times New Roman"/>
-                        <a:ea typeface="Times New Roman"/>
-                        <a:cs typeface="Times New Roman"/>
-                        <a:sym typeface="Times New Roman"/>
-                      </a:endParaRPr>
-                    </a:p>
-                  </a:txBody>
-                  <a:tcPr marT="91425" marB="91425" marR="91425" marL="91425" anchor="ctr">
-                    <a:lnL cap="flat" cmpd="sng" w="19050">
-                      <a:solidFill>
-                        <a:schemeClr val="dk1"/>
-                      </a:solidFill>
-                      <a:prstDash val="solid"/>
-                      <a:round/>
-                      <a:headEnd len="sm" w="sm" type="none"/>
-                      <a:tailEnd len="sm" w="sm" type="none"/>
-                    </a:lnL>
-                    <a:lnR cap="flat" cmpd="sng" w="19050">
-                      <a:solidFill>
-                        <a:schemeClr val="dk1"/>
-                      </a:solidFill>
-                      <a:prstDash val="solid"/>
-                      <a:round/>
-                      <a:headEnd len="sm" w="sm" type="none"/>
-                      <a:tailEnd len="sm" w="sm" type="none"/>
-                    </a:lnR>
-                    <a:lnT cap="flat" cmpd="sng" w="19050">
-                      <a:solidFill>
-                        <a:schemeClr val="dk1"/>
-                      </a:solidFill>
-                      <a:prstDash val="solid"/>
-                      <a:round/>
-                      <a:headEnd len="sm" w="sm" type="none"/>
-                      <a:tailEnd len="sm" w="sm" type="none"/>
-                    </a:lnT>
-                    <a:lnB cap="flat" cmpd="sng" w="19050">
-                      <a:solidFill>
-                        <a:schemeClr val="dk1"/>
-                      </a:solidFill>
-                      <a:prstDash val="solid"/>
-                      <a:round/>
-                      <a:headEnd len="sm" w="sm" type="none"/>
-                      <a:tailEnd len="sm" w="sm" type="none"/>
-                    </a:lnB>
-                    <a:solidFill>
-                      <a:srgbClr val="D4D8FF"/>
-                    </a:solidFill>
-                  </a:tcPr>
-                </a:tc>
-                <a:tc>
-                  <a:txBody>
-                    <a:bodyPr/>
-                    <a:lstStyle/>
-                    <a:p>
-                      <a:pPr indent="0" lvl="0" marL="0" rtl="0" algn="l">
-                        <a:lnSpc>
-                          <a:spcPct val="80000"/>
-                        </a:lnSpc>
-                        <a:spcBef>
-                          <a:spcPts val="0"/>
-                        </a:spcBef>
-                        <a:spcAft>
-                          <a:spcPts val="0"/>
-                        </a:spcAft>
-                        <a:buNone/>
-                      </a:pPr>
-                      <a:r>
-                        <a:rPr lang="en" sz="2000">
-                          <a:latin typeface="Times New Roman"/>
-                          <a:ea typeface="Times New Roman"/>
-                          <a:cs typeface="Times New Roman"/>
-                          <a:sym typeface="Times New Roman"/>
-                        </a:rPr>
-                        <a:t>Municipality - Newton</a:t>
-                      </a:r>
-                      <a:endParaRPr sz="2000">
-                        <a:solidFill>
-                          <a:schemeClr val="dk1"/>
-                        </a:solidFill>
-                        <a:latin typeface="Times New Roman"/>
-                        <a:ea typeface="Times New Roman"/>
-                        <a:cs typeface="Times New Roman"/>
-                        <a:sym typeface="Times New Roman"/>
-                      </a:endParaRPr>
-                    </a:p>
-                  </a:txBody>
-                  <a:tcPr marT="91425" marB="91425" marR="91425" marL="91425" anchor="ctr">
-                    <a:lnL cap="flat" cmpd="sng" w="19050">
-                      <a:solidFill>
-                        <a:schemeClr val="dk1"/>
-                      </a:solidFill>
-                      <a:prstDash val="solid"/>
-                      <a:round/>
-                      <a:headEnd len="sm" w="sm" type="none"/>
-                      <a:tailEnd len="sm" w="sm" type="none"/>
-                    </a:lnL>
-                    <a:lnR cap="flat" cmpd="sng" w="19050">
-                      <a:solidFill>
-                        <a:schemeClr val="dk1"/>
-                      </a:solidFill>
-                      <a:prstDash val="solid"/>
-                      <a:round/>
-                      <a:headEnd len="sm" w="sm" type="none"/>
-                      <a:tailEnd len="sm" w="sm" type="none"/>
-                    </a:lnR>
-                    <a:lnT cap="flat" cmpd="sng" w="19050">
-                      <a:solidFill>
-                        <a:schemeClr val="dk1"/>
-                      </a:solidFill>
-                      <a:prstDash val="solid"/>
-                      <a:round/>
-                      <a:headEnd len="sm" w="sm" type="none"/>
-                      <a:tailEnd len="sm" w="sm" type="none"/>
-                    </a:lnT>
-                    <a:lnB cap="flat" cmpd="sng" w="19050">
-                      <a:solidFill>
-                        <a:schemeClr val="dk1"/>
-                      </a:solidFill>
-                      <a:prstDash val="solid"/>
-                      <a:round/>
-                      <a:headEnd len="sm" w="sm" type="none"/>
-                      <a:tailEnd len="sm" w="sm" type="none"/>
-                    </a:lnB>
-                    <a:solidFill>
-                      <a:srgbClr val="CBDFFF"/>
-                    </a:solidFill>
-                  </a:tcPr>
-                </a:tc>
-                <a:tc>
-                  <a:txBody>
-                    <a:bodyPr/>
-                    <a:lstStyle/>
-                    <a:p>
-                      <a:pPr indent="0" lvl="0" marL="0" rtl="0" algn="l">
-                        <a:lnSpc>
-                          <a:spcPct val="80000"/>
-                        </a:lnSpc>
-                        <a:spcBef>
-                          <a:spcPts val="0"/>
-                        </a:spcBef>
-                        <a:spcAft>
-                          <a:spcPts val="0"/>
-                        </a:spcAft>
-                        <a:buNone/>
-                      </a:pPr>
-                      <a:r>
-                        <a:rPr b="1" lang="en" sz="2000">
-                          <a:solidFill>
-                            <a:schemeClr val="dk1"/>
-                          </a:solidFill>
-                          <a:latin typeface="Times New Roman"/>
-                          <a:ea typeface="Times New Roman"/>
-                          <a:cs typeface="Times New Roman"/>
-                          <a:sym typeface="Times New Roman"/>
-                        </a:rPr>
-                        <a:t>10.74</a:t>
-                      </a:r>
-                      <a:endParaRPr b="1" sz="2000">
-                        <a:solidFill>
-                          <a:schemeClr val="dk1"/>
-                        </a:solidFill>
-                        <a:latin typeface="Times New Roman"/>
-                        <a:ea typeface="Times New Roman"/>
-                        <a:cs typeface="Times New Roman"/>
-                        <a:sym typeface="Times New Roman"/>
-                      </a:endParaRPr>
-                    </a:p>
-                  </a:txBody>
-                  <a:tcPr marT="91425" marB="91425" marR="91425" marL="91425" anchor="ctr">
-                    <a:lnL cap="flat" cmpd="sng" w="19050">
-                      <a:solidFill>
-                        <a:schemeClr val="dk1"/>
-                      </a:solidFill>
-                      <a:prstDash val="solid"/>
-                      <a:round/>
-                      <a:headEnd len="sm" w="sm" type="none"/>
-                      <a:tailEnd len="sm" w="sm" type="none"/>
-                    </a:lnL>
-                    <a:lnR cap="flat" cmpd="sng" w="19050">
-                      <a:solidFill>
-                        <a:schemeClr val="dk1"/>
-                      </a:solidFill>
-                      <a:prstDash val="solid"/>
-                      <a:round/>
-                      <a:headEnd len="sm" w="sm" type="none"/>
-                      <a:tailEnd len="sm" w="sm" type="none"/>
-                    </a:lnR>
-                    <a:lnT cap="flat" cmpd="sng" w="19050">
-                      <a:solidFill>
-                        <a:schemeClr val="dk1"/>
-                      </a:solidFill>
-                      <a:prstDash val="solid"/>
-                      <a:round/>
-                      <a:headEnd len="sm" w="sm" type="none"/>
-                      <a:tailEnd len="sm" w="sm" type="none"/>
-                    </a:lnT>
-                    <a:lnB cap="flat" cmpd="sng" w="19050">
-                      <a:solidFill>
-                        <a:schemeClr val="dk1"/>
-                      </a:solidFill>
-                      <a:prstDash val="solid"/>
-                      <a:round/>
-                      <a:headEnd len="sm" w="sm" type="none"/>
-                      <a:tailEnd len="sm" w="sm" type="none"/>
-                    </a:lnB>
-                    <a:solidFill>
-                      <a:srgbClr val="CBDFFF"/>
                     </a:solidFill>
                   </a:tcPr>
                 </a:tc>
@@ -14442,9 +13217,23 @@
                         <a:buNone/>
                       </a:pPr>
                       <a:r>
-                        <a:t/>
+                        <a:rPr b="1" lang="en" sz="2100">
+                          <a:solidFill>
+                            <a:schemeClr val="dk1"/>
+                          </a:solidFill>
+                          <a:latin typeface="Times New Roman"/>
+                          <a:ea typeface="Times New Roman"/>
+                          <a:cs typeface="Times New Roman"/>
+                          <a:sym typeface="Times New Roman"/>
+                        </a:rPr>
+                        <a:t> -0.00719</a:t>
                       </a:r>
-                      <a:endParaRPr sz="2000"/>
+                      <a:endParaRPr b="1" sz="2100">
+                        <a:latin typeface="Times New Roman"/>
+                        <a:ea typeface="Times New Roman"/>
+                        <a:cs typeface="Times New Roman"/>
+                        <a:sym typeface="Times New Roman"/>
+                      </a:endParaRPr>
                     </a:p>
                   </a:txBody>
                   <a:tcPr marT="91425" marB="91425" marR="91425" marL="91425" anchor="ctr">
@@ -14484,6 +13273,9 @@
                       <a:headEnd len="sm" w="sm" type="none"/>
                       <a:tailEnd len="sm" w="sm" type="none"/>
                     </a:lnB>
+                    <a:solidFill>
+                      <a:srgbClr val="D4D8FF"/>
+                    </a:solidFill>
                   </a:tcPr>
                 </a:tc>
                 <a:tc>
@@ -14501,9 +13293,23 @@
                         <a:buNone/>
                       </a:pPr>
                       <a:r>
-                        <a:t/>
+                        <a:rPr lang="en" sz="2100">
+                          <a:latin typeface="Times New Roman"/>
+                          <a:ea typeface="Times New Roman"/>
+                          <a:cs typeface="Times New Roman"/>
+                          <a:sym typeface="Times New Roman"/>
+                        </a:rPr>
+                        <a:t>total_docks:n_mbta_1km    </a:t>
                       </a:r>
-                      <a:endParaRPr sz="2000"/>
+                      <a:endParaRPr sz="2100">
+                        <a:solidFill>
+                          <a:schemeClr val="dk1"/>
+                        </a:solidFill>
+                        <a:latin typeface="Times New Roman"/>
+                        <a:ea typeface="Times New Roman"/>
+                        <a:cs typeface="Times New Roman"/>
+                        <a:sym typeface="Times New Roman"/>
+                      </a:endParaRPr>
                     </a:p>
                   </a:txBody>
                   <a:tcPr marT="91425" marB="91425" marR="91425" marL="91425" anchor="ctr">
@@ -14518,6 +13324,85 @@
                     </a:lnL>
                     <a:lnR cap="flat" cmpd="sng" w="19050">
                       <a:solidFill>
+                        <a:schemeClr val="dk1"/>
+                      </a:solidFill>
+                      <a:prstDash val="solid"/>
+                      <a:round/>
+                      <a:headEnd len="sm" w="sm" type="none"/>
+                      <a:tailEnd len="sm" w="sm" type="none"/>
+                    </a:lnR>
+                    <a:lnT cap="flat" cmpd="sng" w="19050">
+                      <a:solidFill>
+                        <a:schemeClr val="dk1"/>
+                      </a:solidFill>
+                      <a:prstDash val="solid"/>
+                      <a:round/>
+                      <a:headEnd len="sm" w="sm" type="none"/>
+                      <a:tailEnd len="sm" w="sm" type="none"/>
+                    </a:lnT>
+                    <a:lnB cap="flat" cmpd="sng" w="19050">
+                      <a:solidFill>
+                        <a:schemeClr val="dk1"/>
+                      </a:solidFill>
+                      <a:prstDash val="solid"/>
+                      <a:round/>
+                      <a:headEnd len="sm" w="sm" type="none"/>
+                      <a:tailEnd len="sm" w="sm" type="none"/>
+                    </a:lnB>
+                    <a:solidFill>
+                      <a:srgbClr val="D4D8FF"/>
+                    </a:solidFill>
+                  </a:tcPr>
+                </a:tc>
+                <a:tc>
+                  <a:txBody>
+                    <a:bodyPr/>
+                    <a:lstStyle/>
+                    <a:p>
+                      <a:pPr indent="0" lvl="0" marL="0" rtl="0" algn="l">
+                        <a:spcBef>
+                          <a:spcPts val="0"/>
+                        </a:spcBef>
+                        <a:spcAft>
+                          <a:spcPts val="0"/>
+                        </a:spcAft>
+                        <a:buNone/>
+                      </a:pPr>
+                      <a:r>
+                        <a:rPr b="1" lang="en" sz="2100">
+                          <a:solidFill>
+                            <a:schemeClr val="dk1"/>
+                          </a:solidFill>
+                          <a:latin typeface="Times New Roman"/>
+                          <a:ea typeface="Times New Roman"/>
+                          <a:cs typeface="Times New Roman"/>
+                          <a:sym typeface="Times New Roman"/>
+                        </a:rPr>
+                        <a:t>-0.03006</a:t>
+                      </a:r>
+                      <a:endParaRPr b="1" sz="2100">
+                        <a:solidFill>
+                          <a:schemeClr val="dk1"/>
+                        </a:solidFill>
+                        <a:latin typeface="Times New Roman"/>
+                        <a:ea typeface="Times New Roman"/>
+                        <a:cs typeface="Times New Roman"/>
+                        <a:sym typeface="Times New Roman"/>
+                      </a:endParaRPr>
+                    </a:p>
+                  </a:txBody>
+                  <a:tcPr marT="91425" marB="91425" marR="91425" marL="91425" anchor="ctr">
+                    <a:lnL cap="flat" cmpd="sng" w="19050">
+                      <a:solidFill>
+                        <a:schemeClr val="dk1"/>
+                      </a:solidFill>
+                      <a:prstDash val="solid"/>
+                      <a:round/>
+                      <a:headEnd len="sm" w="sm" type="none"/>
+                      <a:tailEnd len="sm" w="sm" type="none"/>
+                    </a:lnL>
+                    <a:lnR cap="flat" cmpd="sng" w="19050">
+                      <a:solidFill>
                         <a:schemeClr val="dk1">
                           <a:alpha val="0"/>
                         </a:schemeClr>
@@ -14545,6 +13430,9 @@
                       <a:headEnd len="sm" w="sm" type="none"/>
                       <a:tailEnd len="sm" w="sm" type="none"/>
                     </a:lnB>
+                    <a:solidFill>
+                      <a:srgbClr val="D4D8FF"/>
+                    </a:solidFill>
                   </a:tcPr>
                 </a:tc>
               </a:tr>
@@ -14552,43 +13440,16 @@
           </a:graphicData>
         </a:graphic>
       </p:graphicFrame>
-      <p:pic>
-        <p:nvPicPr>
-          <p:cNvPr id="82" name="Google Shape;82;p13"/>
-          <p:cNvPicPr preferRelativeResize="0"/>
-          <p:nvPr/>
-        </p:nvPicPr>
-        <p:blipFill rotWithShape="1">
-          <a:blip r:embed="rId5">
-            <a:alphaModFix/>
-          </a:blip>
-          <a:srcRect b="4443" l="0" r="0" t="0"/>
-          <a:stretch/>
-        </p:blipFill>
-        <p:spPr>
-          <a:xfrm>
-            <a:off x="12283750" y="8144249"/>
-            <a:ext cx="8939923" cy="3009900"/>
-          </a:xfrm>
-          <a:prstGeom prst="rect">
-            <a:avLst/>
-          </a:prstGeom>
-          <a:noFill/>
-          <a:ln>
-            <a:noFill/>
-          </a:ln>
-        </p:spPr>
-      </p:pic>
       <p:sp>
         <p:nvSpPr>
-          <p:cNvPr id="83" name="Google Shape;83;p13"/>
+          <p:cNvPr id="81" name="Google Shape;81;p13"/>
           <p:cNvSpPr txBox="1"/>
           <p:nvPr/>
         </p:nvSpPr>
         <p:spPr>
           <a:xfrm>
-            <a:off x="12303125" y="18074078"/>
-            <a:ext cx="14771700" cy="794100"/>
+            <a:off x="11819875" y="12429188"/>
+            <a:ext cx="15528000" cy="794100"/>
           </a:xfrm>
           <a:prstGeom prst="rect">
             <a:avLst/>
@@ -14614,6 +13475,76 @@
               <a:buNone/>
             </a:pPr>
             <a:r>
+              <a:rPr b="1" lang="en" sz="2400">
+                <a:solidFill>
+                  <a:schemeClr val="dk1"/>
+                </a:solidFill>
+                <a:latin typeface="Times New Roman"/>
+                <a:ea typeface="Times New Roman"/>
+                <a:cs typeface="Times New Roman"/>
+                <a:sym typeface="Times New Roman"/>
+              </a:rPr>
+              <a:t>STEP 4: </a:t>
+            </a:r>
+            <a:r>
+              <a:rPr lang="en" sz="2400">
+                <a:solidFill>
+                  <a:schemeClr val="dk1"/>
+                </a:solidFill>
+                <a:latin typeface="Times New Roman"/>
+                <a:ea typeface="Times New Roman"/>
+                <a:cs typeface="Times New Roman"/>
+                <a:sym typeface="Times New Roman"/>
+              </a:rPr>
+              <a:t>Conduct a partial F test to compare the AIC interaction model with the first-order BIC model (these two models are nested) to determine if the interaction terms are necessary.</a:t>
+            </a:r>
+            <a:endParaRPr sz="2400">
+              <a:solidFill>
+                <a:schemeClr val="dk1"/>
+              </a:solidFill>
+              <a:latin typeface="Times New Roman"/>
+              <a:ea typeface="Times New Roman"/>
+              <a:cs typeface="Times New Roman"/>
+              <a:sym typeface="Times New Roman"/>
+            </a:endParaRPr>
+          </a:p>
+        </p:txBody>
+      </p:sp>
+      <p:sp>
+        <p:nvSpPr>
+          <p:cNvPr id="82" name="Google Shape;82;p13"/>
+          <p:cNvSpPr txBox="1"/>
+          <p:nvPr/>
+        </p:nvSpPr>
+        <p:spPr>
+          <a:xfrm>
+            <a:off x="11810400" y="18339151"/>
+            <a:ext cx="15212400" cy="646500"/>
+          </a:xfrm>
+          <a:prstGeom prst="rect">
+            <a:avLst/>
+          </a:prstGeom>
+          <a:noFill/>
+          <a:ln>
+            <a:noFill/>
+          </a:ln>
+        </p:spPr>
+        <p:txBody>
+          <a:bodyPr anchorCtr="0" anchor="ctr" bIns="91425" lIns="91425" spcFirstLastPara="1" rIns="91425" wrap="square" tIns="91425">
+            <a:noAutofit/>
+          </a:bodyPr>
+          <a:lstStyle/>
+          <a:p>
+            <a:pPr indent="0" lvl="0" marL="0" rtl="0" algn="l">
+              <a:spcBef>
+                <a:spcPts val="0"/>
+              </a:spcBef>
+              <a:spcAft>
+                <a:spcPts val="0"/>
+              </a:spcAft>
+              <a:buNone/>
+            </a:pPr>
+            <a:r>
               <a:rPr b="1" i="1" lang="en" sz="2200">
                 <a:solidFill>
                   <a:schemeClr val="dk1"/>
@@ -14623,7 +13554,7 @@
                 <a:cs typeface="Times New Roman"/>
                 <a:sym typeface="Times New Roman"/>
               </a:rPr>
-              <a:t>Table 2:</a:t>
+              <a:t>Table 3:</a:t>
             </a:r>
             <a:r>
               <a:rPr i="1" lang="en" sz="2200">
@@ -14635,7 +13566,39 @@
                 <a:cs typeface="Times New Roman"/>
                 <a:sym typeface="Times New Roman"/>
               </a:rPr>
-              <a:t> Table of my final model’s predictors and coefficients. Positive coefficients are highlighted in blue, and negative coefficients are highlighted.</a:t>
+              <a:t> Table of my final model’s predictors and coefficients (only included the predictors with the most significant p-value)</a:t>
+            </a:r>
+            <a:endParaRPr i="1" sz="2200">
+              <a:solidFill>
+                <a:schemeClr val="dk1"/>
+              </a:solidFill>
+              <a:latin typeface="Times New Roman"/>
+              <a:ea typeface="Times New Roman"/>
+              <a:cs typeface="Times New Roman"/>
+              <a:sym typeface="Times New Roman"/>
+            </a:endParaRPr>
+          </a:p>
+          <a:p>
+            <a:pPr indent="0" lvl="0" marL="0" rtl="0" algn="l">
+              <a:spcBef>
+                <a:spcPts val="0"/>
+              </a:spcBef>
+              <a:spcAft>
+                <a:spcPts val="0"/>
+              </a:spcAft>
+              <a:buNone/>
+            </a:pPr>
+            <a:r>
+              <a:rPr i="1" lang="en" sz="2200">
+                <a:solidFill>
+                  <a:schemeClr val="dk1"/>
+                </a:solidFill>
+                <a:latin typeface="Times New Roman"/>
+                <a:ea typeface="Times New Roman"/>
+                <a:cs typeface="Times New Roman"/>
+                <a:sym typeface="Times New Roman"/>
+              </a:rPr>
+              <a:t>Positive coefficients are highlighted in blue, and negative coefficients are highlighted. </a:t>
             </a:r>
             <a:endParaRPr i="1" sz="2200">
               <a:solidFill>
@@ -14649,6 +13612,132 @@
           </a:p>
         </p:txBody>
       </p:sp>
+      <p:sp>
+        <p:nvSpPr>
+          <p:cNvPr id="83" name="Google Shape;83;p13"/>
+          <p:cNvSpPr txBox="1"/>
+          <p:nvPr/>
+        </p:nvSpPr>
+        <p:spPr>
+          <a:xfrm>
+            <a:off x="19339150" y="13256054"/>
+            <a:ext cx="7872000" cy="1326300"/>
+          </a:xfrm>
+          <a:prstGeom prst="rect">
+            <a:avLst/>
+          </a:prstGeom>
+          <a:noFill/>
+          <a:ln>
+            <a:noFill/>
+          </a:ln>
+        </p:spPr>
+        <p:txBody>
+          <a:bodyPr anchorCtr="0" anchor="ctr" bIns="91425" lIns="91425" spcFirstLastPara="1" rIns="91425" wrap="square" tIns="91425">
+            <a:noAutofit/>
+          </a:bodyPr>
+          <a:lstStyle/>
+          <a:p>
+            <a:pPr indent="0" lvl="0" marL="0" rtl="0" algn="l">
+              <a:spcBef>
+                <a:spcPts val="0"/>
+              </a:spcBef>
+              <a:spcAft>
+                <a:spcPts val="0"/>
+              </a:spcAft>
+              <a:buNone/>
+            </a:pPr>
+            <a:r>
+              <a:rPr b="1" i="1" lang="en" sz="2100">
+                <a:solidFill>
+                  <a:schemeClr val="dk1"/>
+                </a:solidFill>
+                <a:latin typeface="Times New Roman"/>
+                <a:ea typeface="Times New Roman"/>
+                <a:cs typeface="Times New Roman"/>
+                <a:sym typeface="Times New Roman"/>
+              </a:rPr>
+              <a:t>Table 2: </a:t>
+            </a:r>
+            <a:r>
+              <a:rPr i="1" lang="en" sz="2100">
+                <a:solidFill>
+                  <a:schemeClr val="dk1"/>
+                </a:solidFill>
+                <a:latin typeface="Times New Roman"/>
+                <a:ea typeface="Times New Roman"/>
+                <a:cs typeface="Times New Roman"/>
+                <a:sym typeface="Times New Roman"/>
+              </a:rPr>
+              <a:t>This is the table of the anova result of the first order BIC model and the AIC interaction model. From this table, we can calculate the partial F-stat, which is 41.0832, which ends up having the p value of 0. </a:t>
+            </a:r>
+            <a:endParaRPr i="1" sz="2100">
+              <a:solidFill>
+                <a:schemeClr val="dk1"/>
+              </a:solidFill>
+              <a:latin typeface="Times New Roman"/>
+              <a:ea typeface="Times New Roman"/>
+              <a:cs typeface="Times New Roman"/>
+              <a:sym typeface="Times New Roman"/>
+            </a:endParaRPr>
+          </a:p>
+        </p:txBody>
+      </p:sp>
+      <p:pic>
+        <p:nvPicPr>
+          <p:cNvPr id="84" name="Google Shape;84;p13"/>
+          <p:cNvPicPr preferRelativeResize="0"/>
+          <p:nvPr/>
+        </p:nvPicPr>
+        <p:blipFill>
+          <a:blip r:embed="rId5">
+            <a:alphaModFix/>
+          </a:blip>
+          <a:stretch>
+            <a:fillRect/>
+          </a:stretch>
+        </p:blipFill>
+        <p:spPr>
+          <a:xfrm>
+            <a:off x="11857850" y="13280832"/>
+            <a:ext cx="7338213" cy="1326300"/>
+          </a:xfrm>
+          <a:prstGeom prst="rect">
+            <a:avLst/>
+          </a:prstGeom>
+          <a:noFill/>
+          <a:ln>
+            <a:noFill/>
+          </a:ln>
+        </p:spPr>
+      </p:pic>
+      <p:pic>
+        <p:nvPicPr>
+          <p:cNvPr id="85" name="Google Shape;85;p13"/>
+          <p:cNvPicPr preferRelativeResize="0"/>
+          <p:nvPr/>
+        </p:nvPicPr>
+        <p:blipFill>
+          <a:blip r:embed="rId6">
+            <a:alphaModFix/>
+          </a:blip>
+          <a:stretch>
+            <a:fillRect/>
+          </a:stretch>
+        </p:blipFill>
+        <p:spPr>
+          <a:xfrm>
+            <a:off x="11857850" y="8529536"/>
+            <a:ext cx="7706776" cy="3874289"/>
+          </a:xfrm>
+          <a:prstGeom prst="rect">
+            <a:avLst/>
+          </a:prstGeom>
+          <a:noFill/>
+          <a:ln>
+            <a:noFill/>
+          </a:ln>
+        </p:spPr>
+      </p:pic>
     </p:spTree>
   </p:cSld>
   <p:clrMapOvr>
